--- a/ВКР_Face2_АкБарс_презентация.pptx
+++ b/ВКР_Face2_АкБарс_презентация.pptx
@@ -22768,21 +22768,21 @@
                 <a:ea typeface="PT Sans"/>
                 <a:cs typeface="PT Sans"/>
               </a:rPr>
-              <a:t>РЕЗУЛЬТАТЫ ПО ЗАДАЧЕ 5: ЭФФЕКТИВНОСТЬ И РИСКИ</a:t>
-            </a:r>
-          </a:p>
-        </p:txBody>
-      </p:sp>
-      <p:sp>
-        <p:nvSpPr>
-          <p:cNvPr id="805" name="KPITitle"/>
+              <a:t>РЕЗУЛЬТАТЫ ПО ЗАДАЧЕ 5: ФИНАНСОВАЯ ЭФФЕКТИВНОСТЬ И РИСКИ</a:t>
+            </a:r>
+          </a:p>
+        </p:txBody>
+      </p:sp>
+      <p:sp>
+        <p:nvSpPr>
+          <p:cNvPr id="805" name="Params"/>
           <p:cNvSpPr txBox="1"/>
           <p:nvPr/>
         </p:nvSpPr>
         <p:spPr>
           <a:xfrm>
-            <a:off x="1050000" y="800000"/>
-            <a:ext cx="4400000" cy="350000"/>
+            <a:off x="1050000" y="770000"/>
+            <a:ext cx="7900000" cy="280000"/>
           </a:xfrm>
           <a:prstGeom prst="rect">
             <a:avLst/>
@@ -22811,7 +22811,7 @@
               <a:buNone/>
             </a:pPr>
             <a:r>
-              <a:rPr lang="ru-RU" sz="1200" b="1" dirty="0">
+              <a:rPr lang="ru-RU" sz="1000" b="1" dirty="0">
                 <a:solidFill>
                   <a:srgbClr val="17365D"/>
                 </a:solidFill>
@@ -22819,21 +22819,107 @@
                 <a:ea typeface="PT Sans"/>
                 <a:cs typeface="PT Sans"/>
               </a:rPr>
-              <a:t>ЦЕЛЕВЫЕ ПОКАЗАТЕЛИ ЗА 24 МЕСЯЦА</a:t>
-            </a:r>
-          </a:p>
-        </p:txBody>
-      </p:sp>
-      <p:sp>
-        <p:nvSpPr>
-          <p:cNvPr id="806" name="KPIH0"/>
+              <a:t>Параметры модели: </a:t>
+            </a:r>
+            <a:r>
+              <a:rPr lang="ru-RU" sz="1000" dirty="0">
+                <a:solidFill>
+                  <a:srgbClr val="000000"/>
+                </a:solidFill>
+                <a:latin typeface="PT Sans"/>
+                <a:ea typeface="PT Sans"/>
+                <a:cs typeface="PT Sans"/>
+              </a:rPr>
+              <a:t>I</a:t>
+            </a:r>
+            <a:r>
+              <a:rPr lang="ru-RU" sz="700" dirty="0">
+                <a:solidFill>
+                  <a:srgbClr val="000000"/>
+                </a:solidFill>
+                <a:latin typeface="PT Sans"/>
+                <a:ea typeface="PT Sans"/>
+                <a:cs typeface="PT Sans"/>
+              </a:rPr>
+              <a:t>0</a:t>
+            </a:r>
+            <a:r>
+              <a:rPr lang="ru-RU" sz="1000" dirty="0">
+                <a:solidFill>
+                  <a:srgbClr val="000000"/>
+                </a:solidFill>
+                <a:latin typeface="PT Sans"/>
+                <a:ea typeface="PT Sans"/>
+                <a:cs typeface="PT Sans"/>
+              </a:rPr>
+              <a:t> = 25 млн ₽   ·   r = 18 %   ·   горизонт 5 лет   ·   CF = (8 / 18 / 28 / 35 / 38) млн ₽</a:t>
+            </a:r>
+          </a:p>
+        </p:txBody>
+      </p:sp>
+      <p:sp>
+        <p:nvSpPr>
+          <p:cNvPr id="806" name="FinL0"/>
           <p:cNvSpPr/>
           <p:nvPr/>
         </p:nvSpPr>
         <p:spPr>
           <a:xfrm>
-            <a:off x="1050000" y="1200000"/>
-            <a:ext cx="2400000" cy="360000"/>
+            <a:off x="1050000" y="1080000"/>
+            <a:ext cx="1915000" cy="280000"/>
+          </a:xfrm>
+          <a:prstGeom prst="rect">
+            <a:avLst/>
+          </a:prstGeom>
+          <a:solidFill>
+            <a:srgbClr val="888888"/>
+          </a:solidFill>
+          <a:ln>
+            <a:noFill/>
+          </a:ln>
+        </p:spPr>
+        <p:txBody>
+          <a:bodyPr wrap="square" lIns="91440" tIns="45720" rIns="91440" bIns="45720" anchor="ctr" anchorCtr="1">
+            <a:normAutofit/>
+          </a:bodyPr>
+          <a:lstStyle/>
+          <a:p>
+            <a:pPr marL="0" lvl="0" indent="0" algn="ctr" rtl="0">
+              <a:lnSpc>
+                <a:spcPct val="110000"/>
+              </a:lnSpc>
+              <a:spcBef>
+                <a:spcPts val="0"/>
+              </a:spcBef>
+              <a:spcAft>
+                <a:spcPts val="0"/>
+              </a:spcAft>
+              <a:buNone/>
+            </a:pPr>
+            <a:r>
+              <a:rPr lang="ru-RU" sz="1300" b="1" dirty="0">
+                <a:solidFill>
+                  <a:srgbClr val="FFFFFF"/>
+                </a:solidFill>
+                <a:latin typeface="PT Sans"/>
+                <a:ea typeface="PT Sans"/>
+                <a:cs typeface="PT Sans"/>
+              </a:rPr>
+              <a:t>NPV</a:t>
+            </a:r>
+          </a:p>
+        </p:txBody>
+      </p:sp>
+      <p:sp>
+        <p:nvSpPr>
+          <p:cNvPr id="807" name="FinV0"/>
+          <p:cNvSpPr/>
+          <p:nvPr/>
+        </p:nvSpPr>
+        <p:spPr>
+          <a:xfrm>
+            <a:off x="1050000" y="1360000"/>
+            <a:ext cx="1915000" cy="670000"/>
           </a:xfrm>
           <a:prstGeom prst="rect">
             <a:avLst/>
@@ -22851,20 +22937,20 @@
           </a:bodyPr>
           <a:lstStyle/>
           <a:p>
-            <a:pPr marL="0" lvl="0" indent="0" algn="l" rtl="0">
-              <a:lnSpc>
-                <a:spcPct val="110000"/>
-              </a:lnSpc>
-              <a:spcBef>
-                <a:spcPts val="0"/>
-              </a:spcBef>
-              <a:spcAft>
-                <a:spcPts val="0"/>
-              </a:spcAft>
-              <a:buNone/>
-            </a:pPr>
-            <a:r>
-              <a:rPr lang="ru-RU" sz="1000" b="1" dirty="0">
+            <a:pPr marL="0" lvl="0" indent="0" algn="ctr" rtl="0">
+              <a:lnSpc>
+                <a:spcPct val="110000"/>
+              </a:lnSpc>
+              <a:spcBef>
+                <a:spcPts val="0"/>
+              </a:spcBef>
+              <a:spcAft>
+                <a:spcPts val="0"/>
+              </a:spcAft>
+              <a:buNone/>
+            </a:pPr>
+            <a:r>
+              <a:rPr lang="ru-RU" sz="2200" b="1" dirty="0">
                 <a:solidFill>
                   <a:srgbClr val="FFFFFF"/>
                 </a:solidFill>
@@ -22872,21 +22958,124 @@
                 <a:ea typeface="PT Sans"/>
                 <a:cs typeface="PT Sans"/>
               </a:rPr>
-              <a:t>Метрика</a:t>
-            </a:r>
-          </a:p>
-        </p:txBody>
-      </p:sp>
-      <p:sp>
-        <p:nvSpPr>
-          <p:cNvPr id="807" name="KPIH1"/>
+              <a:t>46,4 млн ₽</a:t>
+            </a:r>
+          </a:p>
+          <a:p>
+            <a:pPr marL="0" lvl="0" indent="0" algn="ctr" rtl="0">
+              <a:lnSpc>
+                <a:spcPct val="110000"/>
+              </a:lnSpc>
+              <a:spcBef>
+                <a:spcPts val="100"/>
+              </a:spcBef>
+              <a:spcAft>
+                <a:spcPts val="0"/>
+              </a:spcAft>
+              <a:buNone/>
+            </a:pPr>
+            <a:r>
+              <a:rPr lang="ru-RU" sz="850" dirty="0">
+                <a:solidFill>
+                  <a:srgbClr val="FFFFFF"/>
+                </a:solidFill>
+                <a:latin typeface="PT Sans"/>
+                <a:ea typeface="PT Sans"/>
+                <a:cs typeface="PT Sans"/>
+              </a:rPr>
+              <a:t>чистый дисконтированный</a:t>
+            </a:r>
+          </a:p>
+          <a:p>
+            <a:pPr marL="0" lvl="0" indent="0" algn="ctr" rtl="0">
+              <a:lnSpc>
+                <a:spcPct val="110000"/>
+              </a:lnSpc>
+              <a:spcBef>
+                <a:spcPts val="50"/>
+              </a:spcBef>
+              <a:spcAft>
+                <a:spcPts val="0"/>
+              </a:spcAft>
+              <a:buNone/>
+            </a:pPr>
+            <a:r>
+              <a:rPr lang="ru-RU" sz="850" dirty="0">
+                <a:solidFill>
+                  <a:srgbClr val="FFFFFF"/>
+                </a:solidFill>
+                <a:latin typeface="PT Sans"/>
+                <a:ea typeface="PT Sans"/>
+                <a:cs typeface="PT Sans"/>
+              </a:rPr>
+              <a:t>доход стратегии</a:t>
+            </a:r>
+          </a:p>
+        </p:txBody>
+      </p:sp>
+      <p:sp>
+        <p:nvSpPr>
+          <p:cNvPr id="808" name="FinL1"/>
           <p:cNvSpPr/>
           <p:nvPr/>
         </p:nvSpPr>
         <p:spPr>
           <a:xfrm>
-            <a:off x="3450000" y="1200000"/>
-            <a:ext cx="1100000" cy="360000"/>
+            <a:off x="3045000" y="1080000"/>
+            <a:ext cx="1915000" cy="280000"/>
+          </a:xfrm>
+          <a:prstGeom prst="rect">
+            <a:avLst/>
+          </a:prstGeom>
+          <a:solidFill>
+            <a:srgbClr val="888888"/>
+          </a:solidFill>
+          <a:ln>
+            <a:noFill/>
+          </a:ln>
+        </p:spPr>
+        <p:txBody>
+          <a:bodyPr wrap="square" lIns="91440" tIns="45720" rIns="91440" bIns="45720" anchor="ctr" anchorCtr="1">
+            <a:normAutofit/>
+          </a:bodyPr>
+          <a:lstStyle/>
+          <a:p>
+            <a:pPr marL="0" lvl="0" indent="0" algn="ctr" rtl="0">
+              <a:lnSpc>
+                <a:spcPct val="110000"/>
+              </a:lnSpc>
+              <a:spcBef>
+                <a:spcPts val="0"/>
+              </a:spcBef>
+              <a:spcAft>
+                <a:spcPts val="0"/>
+              </a:spcAft>
+              <a:buNone/>
+            </a:pPr>
+            <a:r>
+              <a:rPr lang="ru-RU" sz="1300" b="1" dirty="0">
+                <a:solidFill>
+                  <a:srgbClr val="FFFFFF"/>
+                </a:solidFill>
+                <a:latin typeface="PT Sans"/>
+                <a:ea typeface="PT Sans"/>
+                <a:cs typeface="PT Sans"/>
+              </a:rPr>
+              <a:t>PP</a:t>
+            </a:r>
+          </a:p>
+        </p:txBody>
+      </p:sp>
+      <p:sp>
+        <p:nvSpPr>
+          <p:cNvPr id="809" name="FinV1"/>
+          <p:cNvSpPr/>
+          <p:nvPr/>
+        </p:nvSpPr>
+        <p:spPr>
+          <a:xfrm>
+            <a:off x="3045000" y="1360000"/>
+            <a:ext cx="1915000" cy="670000"/>
           </a:xfrm>
           <a:prstGeom prst="rect">
             <a:avLst/>
@@ -22917,7 +23106,7 @@
               <a:buNone/>
             </a:pPr>
             <a:r>
-              <a:rPr lang="ru-RU" sz="1000" b="1" dirty="0">
+              <a:rPr lang="ru-RU" sz="2200" b="1" dirty="0">
                 <a:solidFill>
                   <a:srgbClr val="FFFFFF"/>
                 </a:solidFill>
@@ -22925,21 +23114,124 @@
                 <a:ea typeface="PT Sans"/>
                 <a:cs typeface="PT Sans"/>
               </a:rPr>
-              <a:t>Цель</a:t>
-            </a:r>
-          </a:p>
-        </p:txBody>
-      </p:sp>
-      <p:sp>
-        <p:nvSpPr>
-          <p:cNvPr id="808" name="KPIH2"/>
+              <a:t>23 мес.</a:t>
+            </a:r>
+          </a:p>
+          <a:p>
+            <a:pPr marL="0" lvl="0" indent="0" algn="ctr" rtl="0">
+              <a:lnSpc>
+                <a:spcPct val="110000"/>
+              </a:lnSpc>
+              <a:spcBef>
+                <a:spcPts val="100"/>
+              </a:spcBef>
+              <a:spcAft>
+                <a:spcPts val="0"/>
+              </a:spcAft>
+              <a:buNone/>
+            </a:pPr>
+            <a:r>
+              <a:rPr lang="ru-RU" sz="850" dirty="0">
+                <a:solidFill>
+                  <a:srgbClr val="FFFFFF"/>
+                </a:solidFill>
+                <a:latin typeface="PT Sans"/>
+                <a:ea typeface="PT Sans"/>
+                <a:cs typeface="PT Sans"/>
+              </a:rPr>
+              <a:t>простой срок</a:t>
+            </a:r>
+          </a:p>
+          <a:p>
+            <a:pPr marL="0" lvl="0" indent="0" algn="ctr" rtl="0">
+              <a:lnSpc>
+                <a:spcPct val="110000"/>
+              </a:lnSpc>
+              <a:spcBef>
+                <a:spcPts val="50"/>
+              </a:spcBef>
+              <a:spcAft>
+                <a:spcPts val="0"/>
+              </a:spcAft>
+              <a:buNone/>
+            </a:pPr>
+            <a:r>
+              <a:rPr lang="ru-RU" sz="850" dirty="0">
+                <a:solidFill>
+                  <a:srgbClr val="FFFFFF"/>
+                </a:solidFill>
+                <a:latin typeface="PT Sans"/>
+                <a:ea typeface="PT Sans"/>
+                <a:cs typeface="PT Sans"/>
+              </a:rPr>
+              <a:t>окупаемости (DPP ≈ 28 мес.)</a:t>
+            </a:r>
+          </a:p>
+        </p:txBody>
+      </p:sp>
+      <p:sp>
+        <p:nvSpPr>
+          <p:cNvPr id="810" name="FinL2"/>
           <p:cNvSpPr/>
           <p:nvPr/>
         </p:nvSpPr>
         <p:spPr>
           <a:xfrm>
-            <a:off x="4550000" y="1200000"/>
-            <a:ext cx="900000" cy="360000"/>
+            <a:off x="5040000" y="1080000"/>
+            <a:ext cx="1915000" cy="280000"/>
+          </a:xfrm>
+          <a:prstGeom prst="rect">
+            <a:avLst/>
+          </a:prstGeom>
+          <a:solidFill>
+            <a:srgbClr val="888888"/>
+          </a:solidFill>
+          <a:ln>
+            <a:noFill/>
+          </a:ln>
+        </p:spPr>
+        <p:txBody>
+          <a:bodyPr wrap="square" lIns="91440" tIns="45720" rIns="91440" bIns="45720" anchor="ctr" anchorCtr="1">
+            <a:normAutofit/>
+          </a:bodyPr>
+          <a:lstStyle/>
+          <a:p>
+            <a:pPr marL="0" lvl="0" indent="0" algn="ctr" rtl="0">
+              <a:lnSpc>
+                <a:spcPct val="110000"/>
+              </a:lnSpc>
+              <a:spcBef>
+                <a:spcPts val="0"/>
+              </a:spcBef>
+              <a:spcAft>
+                <a:spcPts val="0"/>
+              </a:spcAft>
+              <a:buNone/>
+            </a:pPr>
+            <a:r>
+              <a:rPr lang="ru-RU" sz="1300" b="1" dirty="0">
+                <a:solidFill>
+                  <a:srgbClr val="FFFFFF"/>
+                </a:solidFill>
+                <a:latin typeface="PT Sans"/>
+                <a:ea typeface="PT Sans"/>
+                <a:cs typeface="PT Sans"/>
+              </a:rPr>
+              <a:t>PI</a:t>
+            </a:r>
+          </a:p>
+        </p:txBody>
+      </p:sp>
+      <p:sp>
+        <p:nvSpPr>
+          <p:cNvPr id="811" name="FinV2"/>
+          <p:cNvSpPr/>
+          <p:nvPr/>
+        </p:nvSpPr>
+        <p:spPr>
+          <a:xfrm>
+            <a:off x="5040000" y="1360000"/>
+            <a:ext cx="1915000" cy="670000"/>
           </a:xfrm>
           <a:prstGeom prst="rect">
             <a:avLst/>
@@ -22970,7 +23262,7 @@
               <a:buNone/>
             </a:pPr>
             <a:r>
-              <a:rPr lang="ru-RU" sz="1000" b="1" dirty="0">
+              <a:rPr lang="ru-RU" sz="2200" b="1" dirty="0">
                 <a:solidFill>
                   <a:srgbClr val="FFFFFF"/>
                 </a:solidFill>
@@ -22978,21 +23270,702 @@
                 <a:ea typeface="PT Sans"/>
                 <a:cs typeface="PT Sans"/>
               </a:rPr>
-              <a:t>Ед.</a:t>
-            </a:r>
-          </a:p>
-        </p:txBody>
-      </p:sp>
-      <p:sp>
-        <p:nvSpPr>
-          <p:cNvPr id="809" name="KPI00"/>
+              <a:t>2,86</a:t>
+            </a:r>
+          </a:p>
+          <a:p>
+            <a:pPr marL="0" lvl="0" indent="0" algn="ctr" rtl="0">
+              <a:lnSpc>
+                <a:spcPct val="110000"/>
+              </a:lnSpc>
+              <a:spcBef>
+                <a:spcPts val="100"/>
+              </a:spcBef>
+              <a:spcAft>
+                <a:spcPts val="0"/>
+              </a:spcAft>
+              <a:buNone/>
+            </a:pPr>
+            <a:r>
+              <a:rPr lang="ru-RU" sz="850" dirty="0">
+                <a:solidFill>
+                  <a:srgbClr val="FFFFFF"/>
+                </a:solidFill>
+                <a:latin typeface="PT Sans"/>
+                <a:ea typeface="PT Sans"/>
+                <a:cs typeface="PT Sans"/>
+              </a:rPr>
+              <a:t>индекс доходности —</a:t>
+            </a:r>
+          </a:p>
+          <a:p>
+            <a:pPr marL="0" lvl="0" indent="0" algn="ctr" rtl="0">
+              <a:lnSpc>
+                <a:spcPct val="110000"/>
+              </a:lnSpc>
+              <a:spcBef>
+                <a:spcPts val="50"/>
+              </a:spcBef>
+              <a:spcAft>
+                <a:spcPts val="0"/>
+              </a:spcAft>
+              <a:buNone/>
+            </a:pPr>
+            <a:r>
+              <a:rPr lang="ru-RU" sz="850" dirty="0">
+                <a:solidFill>
+                  <a:srgbClr val="FFFFFF"/>
+                </a:solidFill>
+                <a:latin typeface="PT Sans"/>
+                <a:ea typeface="PT Sans"/>
+                <a:cs typeface="PT Sans"/>
+              </a:rPr>
+              <a:t>на 1 ₽ инвестиций 2,86 ₽</a:t>
+            </a:r>
+          </a:p>
+        </p:txBody>
+      </p:sp>
+      <p:sp>
+        <p:nvSpPr>
+          <p:cNvPr id="812" name="FinL3"/>
           <p:cNvSpPr/>
           <p:nvPr/>
         </p:nvSpPr>
         <p:spPr>
           <a:xfrm>
-            <a:off x="1050000" y="1560000"/>
-            <a:ext cx="2400000" cy="360000"/>
+            <a:off x="7035000" y="1080000"/>
+            <a:ext cx="1915000" cy="280000"/>
+          </a:xfrm>
+          <a:prstGeom prst="rect">
+            <a:avLst/>
+          </a:prstGeom>
+          <a:solidFill>
+            <a:srgbClr val="888888"/>
+          </a:solidFill>
+          <a:ln>
+            <a:noFill/>
+          </a:ln>
+        </p:spPr>
+        <p:txBody>
+          <a:bodyPr wrap="square" lIns="91440" tIns="45720" rIns="91440" bIns="45720" anchor="ctr" anchorCtr="1">
+            <a:normAutofit/>
+          </a:bodyPr>
+          <a:lstStyle/>
+          <a:p>
+            <a:pPr marL="0" lvl="0" indent="0" algn="ctr" rtl="0">
+              <a:lnSpc>
+                <a:spcPct val="110000"/>
+              </a:lnSpc>
+              <a:spcBef>
+                <a:spcPts val="0"/>
+              </a:spcBef>
+              <a:spcAft>
+                <a:spcPts val="0"/>
+              </a:spcAft>
+              <a:buNone/>
+            </a:pPr>
+            <a:r>
+              <a:rPr lang="ru-RU" sz="1300" b="1" dirty="0">
+                <a:solidFill>
+                  <a:srgbClr val="FFFFFF"/>
+                </a:solidFill>
+                <a:latin typeface="PT Sans"/>
+                <a:ea typeface="PT Sans"/>
+                <a:cs typeface="PT Sans"/>
+              </a:rPr>
+              <a:t>IRR</a:t>
+            </a:r>
+          </a:p>
+        </p:txBody>
+      </p:sp>
+      <p:sp>
+        <p:nvSpPr>
+          <p:cNvPr id="813" name="FinV3"/>
+          <p:cNvSpPr/>
+          <p:nvPr/>
+        </p:nvSpPr>
+        <p:spPr>
+          <a:xfrm>
+            <a:off x="7035000" y="1360000"/>
+            <a:ext cx="1915000" cy="670000"/>
+          </a:xfrm>
+          <a:prstGeom prst="rect">
+            <a:avLst/>
+          </a:prstGeom>
+          <a:solidFill>
+            <a:srgbClr val="17365D"/>
+          </a:solidFill>
+          <a:ln>
+            <a:noFill/>
+          </a:ln>
+        </p:spPr>
+        <p:txBody>
+          <a:bodyPr wrap="square" lIns="91440" tIns="45720" rIns="91440" bIns="45720" anchor="ctr" anchorCtr="1">
+            <a:normAutofit/>
+          </a:bodyPr>
+          <a:lstStyle/>
+          <a:p>
+            <a:pPr marL="0" lvl="0" indent="0" algn="ctr" rtl="0">
+              <a:lnSpc>
+                <a:spcPct val="110000"/>
+              </a:lnSpc>
+              <a:spcBef>
+                <a:spcPts val="0"/>
+              </a:spcBef>
+              <a:spcAft>
+                <a:spcPts val="0"/>
+              </a:spcAft>
+              <a:buNone/>
+            </a:pPr>
+            <a:r>
+              <a:rPr lang="ru-RU" sz="2200" b="1" dirty="0">
+                <a:solidFill>
+                  <a:srgbClr val="FFFFFF"/>
+                </a:solidFill>
+                <a:latin typeface="PT Sans"/>
+                <a:ea typeface="PT Sans"/>
+                <a:cs typeface="PT Sans"/>
+              </a:rPr>
+              <a:t>66,2 %</a:t>
+            </a:r>
+          </a:p>
+          <a:p>
+            <a:pPr marL="0" lvl="0" indent="0" algn="ctr" rtl="0">
+              <a:lnSpc>
+                <a:spcPct val="110000"/>
+              </a:lnSpc>
+              <a:spcBef>
+                <a:spcPts val="100"/>
+              </a:spcBef>
+              <a:spcAft>
+                <a:spcPts val="0"/>
+              </a:spcAft>
+              <a:buNone/>
+            </a:pPr>
+            <a:r>
+              <a:rPr lang="ru-RU" sz="850" dirty="0">
+                <a:solidFill>
+                  <a:srgbClr val="FFFFFF"/>
+                </a:solidFill>
+                <a:latin typeface="PT Sans"/>
+                <a:ea typeface="PT Sans"/>
+                <a:cs typeface="PT Sans"/>
+              </a:rPr>
+              <a:t>внутренняя норма</a:t>
+            </a:r>
+          </a:p>
+          <a:p>
+            <a:pPr marL="0" lvl="0" indent="0" algn="ctr" rtl="0">
+              <a:lnSpc>
+                <a:spcPct val="110000"/>
+              </a:lnSpc>
+              <a:spcBef>
+                <a:spcPts val="50"/>
+              </a:spcBef>
+              <a:spcAft>
+                <a:spcPts val="0"/>
+              </a:spcAft>
+              <a:buNone/>
+            </a:pPr>
+            <a:r>
+              <a:rPr lang="ru-RU" sz="850" dirty="0">
+                <a:solidFill>
+                  <a:srgbClr val="FFFFFF"/>
+                </a:solidFill>
+                <a:latin typeface="PT Sans"/>
+                <a:ea typeface="PT Sans"/>
+                <a:cs typeface="PT Sans"/>
+              </a:rPr>
+              <a:t>доходности (≫ r = 18 %)</a:t>
+            </a:r>
+          </a:p>
+        </p:txBody>
+      </p:sp>
+      <p:sp>
+        <p:nvSpPr>
+          <p:cNvPr id="814" name="CFTitle"/>
+          <p:cNvSpPr txBox="1"/>
+          <p:nvPr/>
+        </p:nvSpPr>
+        <p:spPr>
+          <a:xfrm>
+            <a:off x="1050000" y="2080000"/>
+            <a:ext cx="7900000" cy="280000"/>
+          </a:xfrm>
+          <a:prstGeom prst="rect">
+            <a:avLst/>
+          </a:prstGeom>
+          <a:noFill/>
+          <a:ln>
+            <a:noFill/>
+          </a:ln>
+        </p:spPr>
+        <p:txBody>
+          <a:bodyPr wrap="square" lIns="91440" tIns="45720" rIns="91440" bIns="45720" anchor="ctr" anchorCtr="0">
+            <a:noAutofit/>
+          </a:bodyPr>
+          <a:lstStyle/>
+          <a:p>
+            <a:pPr marL="0" lvl="0" indent="0" algn="l" rtl="0">
+              <a:lnSpc>
+                <a:spcPct val="110000"/>
+              </a:lnSpc>
+              <a:spcBef>
+                <a:spcPts val="0"/>
+              </a:spcBef>
+              <a:spcAft>
+                <a:spcPts val="0"/>
+              </a:spcAft>
+              <a:buNone/>
+            </a:pPr>
+            <a:r>
+              <a:rPr lang="ru-RU" sz="1100" b="1" dirty="0">
+                <a:solidFill>
+                  <a:srgbClr val="17365D"/>
+                </a:solidFill>
+                <a:latin typeface="PT Sans"/>
+                <a:ea typeface="PT Sans"/>
+                <a:cs typeface="PT Sans"/>
+              </a:rPr>
+              <a:t>ДЕНЕЖНЫЕ ПОТОКИ СТРАТЕГИИ ПРОДВИЖЕНИЯ FACE2</a:t>
+            </a:r>
+          </a:p>
+        </p:txBody>
+      </p:sp>
+      <p:sp>
+        <p:nvSpPr>
+          <p:cNvPr id="815" name="CFH0"/>
+          <p:cNvSpPr/>
+          <p:nvPr/>
+        </p:nvSpPr>
+        <p:spPr>
+          <a:xfrm>
+            <a:off x="1050000" y="2360000"/>
+            <a:ext cx="1300000" cy="320000"/>
+          </a:xfrm>
+          <a:prstGeom prst="rect">
+            <a:avLst/>
+          </a:prstGeom>
+          <a:solidFill>
+            <a:srgbClr val="17365D"/>
+          </a:solidFill>
+          <a:ln>
+            <a:noFill/>
+          </a:ln>
+        </p:spPr>
+        <p:txBody>
+          <a:bodyPr wrap="square" lIns="91440" tIns="45720" rIns="91440" bIns="45720" anchor="ctr" anchorCtr="1">
+            <a:normAutofit/>
+          </a:bodyPr>
+          <a:lstStyle/>
+          <a:p>
+            <a:pPr marL="0" lvl="0" indent="0" algn="l" rtl="0">
+              <a:lnSpc>
+                <a:spcPct val="110000"/>
+              </a:lnSpc>
+              <a:spcBef>
+                <a:spcPts val="0"/>
+              </a:spcBef>
+              <a:spcAft>
+                <a:spcPts val="0"/>
+              </a:spcAft>
+              <a:buNone/>
+            </a:pPr>
+            <a:r>
+              <a:rPr lang="ru-RU" sz="950" b="1" dirty="0">
+                <a:solidFill>
+                  <a:srgbClr val="FFFFFF"/>
+                </a:solidFill>
+                <a:latin typeface="PT Sans"/>
+                <a:ea typeface="PT Sans"/>
+                <a:cs typeface="PT Sans"/>
+              </a:rPr>
+              <a:t>Год / показатель</a:t>
+            </a:r>
+          </a:p>
+        </p:txBody>
+      </p:sp>
+      <p:sp>
+        <p:nvSpPr>
+          <p:cNvPr id="816" name="CFH1"/>
+          <p:cNvSpPr/>
+          <p:nvPr/>
+        </p:nvSpPr>
+        <p:spPr>
+          <a:xfrm>
+            <a:off x="2350000" y="2360000"/>
+            <a:ext cx="916666" cy="320000"/>
+          </a:xfrm>
+          <a:prstGeom prst="rect">
+            <a:avLst/>
+          </a:prstGeom>
+          <a:solidFill>
+            <a:srgbClr val="17365D"/>
+          </a:solidFill>
+          <a:ln>
+            <a:noFill/>
+          </a:ln>
+        </p:spPr>
+        <p:txBody>
+          <a:bodyPr wrap="square" lIns="91440" tIns="45720" rIns="91440" bIns="45720" anchor="ctr" anchorCtr="1">
+            <a:normAutofit/>
+          </a:bodyPr>
+          <a:lstStyle/>
+          <a:p>
+            <a:pPr marL="0" lvl="0" indent="0" algn="ctr" rtl="0">
+              <a:lnSpc>
+                <a:spcPct val="110000"/>
+              </a:lnSpc>
+              <a:spcBef>
+                <a:spcPts val="0"/>
+              </a:spcBef>
+              <a:spcAft>
+                <a:spcPts val="0"/>
+              </a:spcAft>
+              <a:buNone/>
+            </a:pPr>
+            <a:r>
+              <a:rPr lang="ru-RU" sz="950" b="1" dirty="0">
+                <a:solidFill>
+                  <a:srgbClr val="FFFFFF"/>
+                </a:solidFill>
+                <a:latin typeface="PT Sans"/>
+                <a:ea typeface="PT Sans"/>
+                <a:cs typeface="PT Sans"/>
+              </a:rPr>
+              <a:t>0</a:t>
+            </a:r>
+          </a:p>
+        </p:txBody>
+      </p:sp>
+      <p:sp>
+        <p:nvSpPr>
+          <p:cNvPr id="817" name="CFH2"/>
+          <p:cNvSpPr/>
+          <p:nvPr/>
+        </p:nvSpPr>
+        <p:spPr>
+          <a:xfrm>
+            <a:off x="3266666" y="2360000"/>
+            <a:ext cx="916666" cy="320000"/>
+          </a:xfrm>
+          <a:prstGeom prst="rect">
+            <a:avLst/>
+          </a:prstGeom>
+          <a:solidFill>
+            <a:srgbClr val="17365D"/>
+          </a:solidFill>
+          <a:ln>
+            <a:noFill/>
+          </a:ln>
+        </p:spPr>
+        <p:txBody>
+          <a:bodyPr wrap="square" lIns="91440" tIns="45720" rIns="91440" bIns="45720" anchor="ctr" anchorCtr="1">
+            <a:normAutofit/>
+          </a:bodyPr>
+          <a:lstStyle/>
+          <a:p>
+            <a:pPr marL="0" lvl="0" indent="0" algn="ctr" rtl="0">
+              <a:lnSpc>
+                <a:spcPct val="110000"/>
+              </a:lnSpc>
+              <a:spcBef>
+                <a:spcPts val="0"/>
+              </a:spcBef>
+              <a:spcAft>
+                <a:spcPts val="0"/>
+              </a:spcAft>
+              <a:buNone/>
+            </a:pPr>
+            <a:r>
+              <a:rPr lang="ru-RU" sz="950" b="1" dirty="0">
+                <a:solidFill>
+                  <a:srgbClr val="FFFFFF"/>
+                </a:solidFill>
+                <a:latin typeface="PT Sans"/>
+                <a:ea typeface="PT Sans"/>
+                <a:cs typeface="PT Sans"/>
+              </a:rPr>
+              <a:t>1</a:t>
+            </a:r>
+          </a:p>
+        </p:txBody>
+      </p:sp>
+      <p:sp>
+        <p:nvSpPr>
+          <p:cNvPr id="818" name="CFH3"/>
+          <p:cNvSpPr/>
+          <p:nvPr/>
+        </p:nvSpPr>
+        <p:spPr>
+          <a:xfrm>
+            <a:off x="4183332" y="2360000"/>
+            <a:ext cx="916666" cy="320000"/>
+          </a:xfrm>
+          <a:prstGeom prst="rect">
+            <a:avLst/>
+          </a:prstGeom>
+          <a:solidFill>
+            <a:srgbClr val="17365D"/>
+          </a:solidFill>
+          <a:ln>
+            <a:noFill/>
+          </a:ln>
+        </p:spPr>
+        <p:txBody>
+          <a:bodyPr wrap="square" lIns="91440" tIns="45720" rIns="91440" bIns="45720" anchor="ctr" anchorCtr="1">
+            <a:normAutofit/>
+          </a:bodyPr>
+          <a:lstStyle/>
+          <a:p>
+            <a:pPr marL="0" lvl="0" indent="0" algn="ctr" rtl="0">
+              <a:lnSpc>
+                <a:spcPct val="110000"/>
+              </a:lnSpc>
+              <a:spcBef>
+                <a:spcPts val="0"/>
+              </a:spcBef>
+              <a:spcAft>
+                <a:spcPts val="0"/>
+              </a:spcAft>
+              <a:buNone/>
+            </a:pPr>
+            <a:r>
+              <a:rPr lang="ru-RU" sz="950" b="1" dirty="0">
+                <a:solidFill>
+                  <a:srgbClr val="FFFFFF"/>
+                </a:solidFill>
+                <a:latin typeface="PT Sans"/>
+                <a:ea typeface="PT Sans"/>
+                <a:cs typeface="PT Sans"/>
+              </a:rPr>
+              <a:t>2</a:t>
+            </a:r>
+          </a:p>
+        </p:txBody>
+      </p:sp>
+      <p:sp>
+        <p:nvSpPr>
+          <p:cNvPr id="819" name="CFH4"/>
+          <p:cNvSpPr/>
+          <p:nvPr/>
+        </p:nvSpPr>
+        <p:spPr>
+          <a:xfrm>
+            <a:off x="5099998" y="2360000"/>
+            <a:ext cx="916666" cy="320000"/>
+          </a:xfrm>
+          <a:prstGeom prst="rect">
+            <a:avLst/>
+          </a:prstGeom>
+          <a:solidFill>
+            <a:srgbClr val="17365D"/>
+          </a:solidFill>
+          <a:ln>
+            <a:noFill/>
+          </a:ln>
+        </p:spPr>
+        <p:txBody>
+          <a:bodyPr wrap="square" lIns="91440" tIns="45720" rIns="91440" bIns="45720" anchor="ctr" anchorCtr="1">
+            <a:normAutofit/>
+          </a:bodyPr>
+          <a:lstStyle/>
+          <a:p>
+            <a:pPr marL="0" lvl="0" indent="0" algn="ctr" rtl="0">
+              <a:lnSpc>
+                <a:spcPct val="110000"/>
+              </a:lnSpc>
+              <a:spcBef>
+                <a:spcPts val="0"/>
+              </a:spcBef>
+              <a:spcAft>
+                <a:spcPts val="0"/>
+              </a:spcAft>
+              <a:buNone/>
+            </a:pPr>
+            <a:r>
+              <a:rPr lang="ru-RU" sz="950" b="1" dirty="0">
+                <a:solidFill>
+                  <a:srgbClr val="FFFFFF"/>
+                </a:solidFill>
+                <a:latin typeface="PT Sans"/>
+                <a:ea typeface="PT Sans"/>
+                <a:cs typeface="PT Sans"/>
+              </a:rPr>
+              <a:t>3</a:t>
+            </a:r>
+          </a:p>
+        </p:txBody>
+      </p:sp>
+      <p:sp>
+        <p:nvSpPr>
+          <p:cNvPr id="820" name="CFH5"/>
+          <p:cNvSpPr/>
+          <p:nvPr/>
+        </p:nvSpPr>
+        <p:spPr>
+          <a:xfrm>
+            <a:off x="6016664" y="2360000"/>
+            <a:ext cx="916666" cy="320000"/>
+          </a:xfrm>
+          <a:prstGeom prst="rect">
+            <a:avLst/>
+          </a:prstGeom>
+          <a:solidFill>
+            <a:srgbClr val="17365D"/>
+          </a:solidFill>
+          <a:ln>
+            <a:noFill/>
+          </a:ln>
+        </p:spPr>
+        <p:txBody>
+          <a:bodyPr wrap="square" lIns="91440" tIns="45720" rIns="91440" bIns="45720" anchor="ctr" anchorCtr="1">
+            <a:normAutofit/>
+          </a:bodyPr>
+          <a:lstStyle/>
+          <a:p>
+            <a:pPr marL="0" lvl="0" indent="0" algn="ctr" rtl="0">
+              <a:lnSpc>
+                <a:spcPct val="110000"/>
+              </a:lnSpc>
+              <a:spcBef>
+                <a:spcPts val="0"/>
+              </a:spcBef>
+              <a:spcAft>
+                <a:spcPts val="0"/>
+              </a:spcAft>
+              <a:buNone/>
+            </a:pPr>
+            <a:r>
+              <a:rPr lang="ru-RU" sz="950" b="1" dirty="0">
+                <a:solidFill>
+                  <a:srgbClr val="FFFFFF"/>
+                </a:solidFill>
+                <a:latin typeface="PT Sans"/>
+                <a:ea typeface="PT Sans"/>
+                <a:cs typeface="PT Sans"/>
+              </a:rPr>
+              <a:t>4</a:t>
+            </a:r>
+          </a:p>
+        </p:txBody>
+      </p:sp>
+      <p:sp>
+        <p:nvSpPr>
+          <p:cNvPr id="821" name="CFH6"/>
+          <p:cNvSpPr/>
+          <p:nvPr/>
+        </p:nvSpPr>
+        <p:spPr>
+          <a:xfrm>
+            <a:off x="6933330" y="2360000"/>
+            <a:ext cx="916666" cy="320000"/>
+          </a:xfrm>
+          <a:prstGeom prst="rect">
+            <a:avLst/>
+          </a:prstGeom>
+          <a:solidFill>
+            <a:srgbClr val="17365D"/>
+          </a:solidFill>
+          <a:ln>
+            <a:noFill/>
+          </a:ln>
+        </p:spPr>
+        <p:txBody>
+          <a:bodyPr wrap="square" lIns="91440" tIns="45720" rIns="91440" bIns="45720" anchor="ctr" anchorCtr="1">
+            <a:normAutofit/>
+          </a:bodyPr>
+          <a:lstStyle/>
+          <a:p>
+            <a:pPr marL="0" lvl="0" indent="0" algn="ctr" rtl="0">
+              <a:lnSpc>
+                <a:spcPct val="110000"/>
+              </a:lnSpc>
+              <a:spcBef>
+                <a:spcPts val="0"/>
+              </a:spcBef>
+              <a:spcAft>
+                <a:spcPts val="0"/>
+              </a:spcAft>
+              <a:buNone/>
+            </a:pPr>
+            <a:r>
+              <a:rPr lang="ru-RU" sz="950" b="1" dirty="0">
+                <a:solidFill>
+                  <a:srgbClr val="FFFFFF"/>
+                </a:solidFill>
+                <a:latin typeface="PT Sans"/>
+                <a:ea typeface="PT Sans"/>
+                <a:cs typeface="PT Sans"/>
+              </a:rPr>
+              <a:t>5</a:t>
+            </a:r>
+          </a:p>
+        </p:txBody>
+      </p:sp>
+      <p:sp>
+        <p:nvSpPr>
+          <p:cNvPr id="822" name="CFH7"/>
+          <p:cNvSpPr/>
+          <p:nvPr/>
+        </p:nvSpPr>
+        <p:spPr>
+          <a:xfrm>
+            <a:off x="7849996" y="2360000"/>
+            <a:ext cx="1100000" cy="320000"/>
+          </a:xfrm>
+          <a:prstGeom prst="rect">
+            <a:avLst/>
+          </a:prstGeom>
+          <a:solidFill>
+            <a:srgbClr val="17365D"/>
+          </a:solidFill>
+          <a:ln>
+            <a:noFill/>
+          </a:ln>
+        </p:spPr>
+        <p:txBody>
+          <a:bodyPr wrap="square" lIns="91440" tIns="45720" rIns="91440" bIns="45720" anchor="ctr" anchorCtr="1">
+            <a:normAutofit/>
+          </a:bodyPr>
+          <a:lstStyle/>
+          <a:p>
+            <a:pPr marL="0" lvl="0" indent="0" algn="ctr" rtl="0">
+              <a:lnSpc>
+                <a:spcPct val="110000"/>
+              </a:lnSpc>
+              <a:spcBef>
+                <a:spcPts val="0"/>
+              </a:spcBef>
+              <a:spcAft>
+                <a:spcPts val="0"/>
+              </a:spcAft>
+              <a:buNone/>
+            </a:pPr>
+            <a:r>
+              <a:rPr lang="ru-RU" sz="950" b="1" dirty="0">
+                <a:solidFill>
+                  <a:srgbClr val="FFFFFF"/>
+                </a:solidFill>
+                <a:latin typeface="PT Sans"/>
+                <a:ea typeface="PT Sans"/>
+                <a:cs typeface="PT Sans"/>
+              </a:rPr>
+              <a:t>Итого</a:t>
+            </a:r>
+          </a:p>
+        </p:txBody>
+      </p:sp>
+      <p:sp>
+        <p:nvSpPr>
+          <p:cNvPr id="823" name="CFR0L"/>
+          <p:cNvSpPr/>
+          <p:nvPr/>
+        </p:nvSpPr>
+        <p:spPr>
+          <a:xfrm>
+            <a:off x="1050000" y="2680000"/>
+            <a:ext cx="1300000" cy="320000"/>
           </a:xfrm>
           <a:prstGeom prst="rect">
             <a:avLst/>
@@ -23025,29 +23998,29 @@
               <a:buNone/>
             </a:pPr>
             <a:r>
-              <a:rPr lang="ru-RU" sz="950" dirty="0">
-                <a:solidFill>
-                  <a:srgbClr val="000000"/>
-                </a:solidFill>
-                <a:latin typeface="PT Sans"/>
-                <a:ea typeface="PT Sans"/>
-                <a:cs typeface="PT Sans"/>
-              </a:rPr>
-              <a:t>Активных B2B-контрактов</a:t>
-            </a:r>
-          </a:p>
-        </p:txBody>
-      </p:sp>
-      <p:sp>
-        <p:nvSpPr>
-          <p:cNvPr id="810" name="KPI01"/>
+              <a:rPr lang="ru-RU" sz="900" b="1" dirty="0">
+                <a:solidFill>
+                  <a:srgbClr val="17365D"/>
+                </a:solidFill>
+                <a:latin typeface="PT Sans"/>
+                <a:ea typeface="PT Sans"/>
+                <a:cs typeface="PT Sans"/>
+              </a:rPr>
+              <a:t>CF, млн ₽</a:t>
+            </a:r>
+          </a:p>
+        </p:txBody>
+      </p:sp>
+      <p:sp>
+        <p:nvSpPr>
+          <p:cNvPr id="824" name="CFR0C0"/>
           <p:cNvSpPr/>
           <p:nvPr/>
         </p:nvSpPr>
         <p:spPr>
           <a:xfrm>
-            <a:off x="3450000" y="1560000"/>
-            <a:ext cx="1100000" cy="360000"/>
+            <a:off x="2350000" y="2680000"/>
+            <a:ext cx="916666" cy="320000"/>
           </a:xfrm>
           <a:prstGeom prst="rect">
             <a:avLst/>
@@ -23080,29 +24053,29 @@
               <a:buNone/>
             </a:pPr>
             <a:r>
-              <a:rPr lang="ru-RU" sz="950" b="1" dirty="0">
-                <a:solidFill>
-                  <a:srgbClr val="17365D"/>
-                </a:solidFill>
-                <a:latin typeface="PT Sans"/>
-                <a:ea typeface="PT Sans"/>
-                <a:cs typeface="PT Sans"/>
-              </a:rPr>
-              <a:t>≥ 25</a:t>
-            </a:r>
-          </a:p>
-        </p:txBody>
-      </p:sp>
-      <p:sp>
-        <p:nvSpPr>
-          <p:cNvPr id="811" name="KPI02"/>
+              <a:rPr lang="ru-RU" sz="950" dirty="0">
+                <a:solidFill>
+                  <a:srgbClr val="000000"/>
+                </a:solidFill>
+                <a:latin typeface="PT Sans"/>
+                <a:ea typeface="PT Sans"/>
+                <a:cs typeface="PT Sans"/>
+              </a:rPr>
+              <a:t>−25,0</a:t>
+            </a:r>
+          </a:p>
+        </p:txBody>
+      </p:sp>
+      <p:sp>
+        <p:nvSpPr>
+          <p:cNvPr id="825" name="CFR0C1"/>
           <p:cNvSpPr/>
           <p:nvPr/>
         </p:nvSpPr>
         <p:spPr>
           <a:xfrm>
-            <a:off x="4550000" y="1560000"/>
-            <a:ext cx="900000" cy="360000"/>
+            <a:off x="3266666" y="2680000"/>
+            <a:ext cx="916666" cy="320000"/>
           </a:xfrm>
           <a:prstGeom prst="rect">
             <a:avLst/>
@@ -23143,21 +24116,296 @@
                 <a:ea typeface="PT Sans"/>
                 <a:cs typeface="PT Sans"/>
               </a:rPr>
-              <a:t>шт./год</a:t>
-            </a:r>
-          </a:p>
-        </p:txBody>
-      </p:sp>
-      <p:sp>
-        <p:nvSpPr>
-          <p:cNvPr id="812" name="KPI10"/>
+              <a:t>8,0</a:t>
+            </a:r>
+          </a:p>
+        </p:txBody>
+      </p:sp>
+      <p:sp>
+        <p:nvSpPr>
+          <p:cNvPr id="826" name="CFR0C2"/>
           <p:cNvSpPr/>
           <p:nvPr/>
         </p:nvSpPr>
         <p:spPr>
           <a:xfrm>
-            <a:off x="1050000" y="1920000"/>
-            <a:ext cx="2400000" cy="360000"/>
+            <a:off x="4183332" y="2680000"/>
+            <a:ext cx="916666" cy="320000"/>
+          </a:xfrm>
+          <a:prstGeom prst="rect">
+            <a:avLst/>
+          </a:prstGeom>
+          <a:solidFill>
+            <a:srgbClr val="F2F2F2"/>
+          </a:solidFill>
+          <a:ln w="3175">
+            <a:solidFill>
+              <a:srgbClr val="888888"/>
+            </a:solidFill>
+          </a:ln>
+        </p:spPr>
+        <p:txBody>
+          <a:bodyPr wrap="square" lIns="91440" tIns="45720" rIns="91440" bIns="45720" anchor="ctr" anchorCtr="1">
+            <a:normAutofit/>
+          </a:bodyPr>
+          <a:lstStyle/>
+          <a:p>
+            <a:pPr marL="0" lvl="0" indent="0" algn="ctr" rtl="0">
+              <a:lnSpc>
+                <a:spcPct val="110000"/>
+              </a:lnSpc>
+              <a:spcBef>
+                <a:spcPts val="0"/>
+              </a:spcBef>
+              <a:spcAft>
+                <a:spcPts val="0"/>
+              </a:spcAft>
+              <a:buNone/>
+            </a:pPr>
+            <a:r>
+              <a:rPr lang="ru-RU" sz="950" dirty="0">
+                <a:solidFill>
+                  <a:srgbClr val="000000"/>
+                </a:solidFill>
+                <a:latin typeface="PT Sans"/>
+                <a:ea typeface="PT Sans"/>
+                <a:cs typeface="PT Sans"/>
+              </a:rPr>
+              <a:t>18,0</a:t>
+            </a:r>
+          </a:p>
+        </p:txBody>
+      </p:sp>
+      <p:sp>
+        <p:nvSpPr>
+          <p:cNvPr id="827" name="CFR0C3"/>
+          <p:cNvSpPr/>
+          <p:nvPr/>
+        </p:nvSpPr>
+        <p:spPr>
+          <a:xfrm>
+            <a:off x="5099998" y="2680000"/>
+            <a:ext cx="916666" cy="320000"/>
+          </a:xfrm>
+          <a:prstGeom prst="rect">
+            <a:avLst/>
+          </a:prstGeom>
+          <a:solidFill>
+            <a:srgbClr val="F2F2F2"/>
+          </a:solidFill>
+          <a:ln w="3175">
+            <a:solidFill>
+              <a:srgbClr val="888888"/>
+            </a:solidFill>
+          </a:ln>
+        </p:spPr>
+        <p:txBody>
+          <a:bodyPr wrap="square" lIns="91440" tIns="45720" rIns="91440" bIns="45720" anchor="ctr" anchorCtr="1">
+            <a:normAutofit/>
+          </a:bodyPr>
+          <a:lstStyle/>
+          <a:p>
+            <a:pPr marL="0" lvl="0" indent="0" algn="ctr" rtl="0">
+              <a:lnSpc>
+                <a:spcPct val="110000"/>
+              </a:lnSpc>
+              <a:spcBef>
+                <a:spcPts val="0"/>
+              </a:spcBef>
+              <a:spcAft>
+                <a:spcPts val="0"/>
+              </a:spcAft>
+              <a:buNone/>
+            </a:pPr>
+            <a:r>
+              <a:rPr lang="ru-RU" sz="950" dirty="0">
+                <a:solidFill>
+                  <a:srgbClr val="000000"/>
+                </a:solidFill>
+                <a:latin typeface="PT Sans"/>
+                <a:ea typeface="PT Sans"/>
+                <a:cs typeface="PT Sans"/>
+              </a:rPr>
+              <a:t>28,0</a:t>
+            </a:r>
+          </a:p>
+        </p:txBody>
+      </p:sp>
+      <p:sp>
+        <p:nvSpPr>
+          <p:cNvPr id="828" name="CFR0C4"/>
+          <p:cNvSpPr/>
+          <p:nvPr/>
+        </p:nvSpPr>
+        <p:spPr>
+          <a:xfrm>
+            <a:off x="6016664" y="2680000"/>
+            <a:ext cx="916666" cy="320000"/>
+          </a:xfrm>
+          <a:prstGeom prst="rect">
+            <a:avLst/>
+          </a:prstGeom>
+          <a:solidFill>
+            <a:srgbClr val="F2F2F2"/>
+          </a:solidFill>
+          <a:ln w="3175">
+            <a:solidFill>
+              <a:srgbClr val="888888"/>
+            </a:solidFill>
+          </a:ln>
+        </p:spPr>
+        <p:txBody>
+          <a:bodyPr wrap="square" lIns="91440" tIns="45720" rIns="91440" bIns="45720" anchor="ctr" anchorCtr="1">
+            <a:normAutofit/>
+          </a:bodyPr>
+          <a:lstStyle/>
+          <a:p>
+            <a:pPr marL="0" lvl="0" indent="0" algn="ctr" rtl="0">
+              <a:lnSpc>
+                <a:spcPct val="110000"/>
+              </a:lnSpc>
+              <a:spcBef>
+                <a:spcPts val="0"/>
+              </a:spcBef>
+              <a:spcAft>
+                <a:spcPts val="0"/>
+              </a:spcAft>
+              <a:buNone/>
+            </a:pPr>
+            <a:r>
+              <a:rPr lang="ru-RU" sz="950" dirty="0">
+                <a:solidFill>
+                  <a:srgbClr val="000000"/>
+                </a:solidFill>
+                <a:latin typeface="PT Sans"/>
+                <a:ea typeface="PT Sans"/>
+                <a:cs typeface="PT Sans"/>
+              </a:rPr>
+              <a:t>35,0</a:t>
+            </a:r>
+          </a:p>
+        </p:txBody>
+      </p:sp>
+      <p:sp>
+        <p:nvSpPr>
+          <p:cNvPr id="829" name="CFR0C5"/>
+          <p:cNvSpPr/>
+          <p:nvPr/>
+        </p:nvSpPr>
+        <p:spPr>
+          <a:xfrm>
+            <a:off x="6933330" y="2680000"/>
+            <a:ext cx="916666" cy="320000"/>
+          </a:xfrm>
+          <a:prstGeom prst="rect">
+            <a:avLst/>
+          </a:prstGeom>
+          <a:solidFill>
+            <a:srgbClr val="F2F2F2"/>
+          </a:solidFill>
+          <a:ln w="3175">
+            <a:solidFill>
+              <a:srgbClr val="888888"/>
+            </a:solidFill>
+          </a:ln>
+        </p:spPr>
+        <p:txBody>
+          <a:bodyPr wrap="square" lIns="91440" tIns="45720" rIns="91440" bIns="45720" anchor="ctr" anchorCtr="1">
+            <a:normAutofit/>
+          </a:bodyPr>
+          <a:lstStyle/>
+          <a:p>
+            <a:pPr marL="0" lvl="0" indent="0" algn="ctr" rtl="0">
+              <a:lnSpc>
+                <a:spcPct val="110000"/>
+              </a:lnSpc>
+              <a:spcBef>
+                <a:spcPts val="0"/>
+              </a:spcBef>
+              <a:spcAft>
+                <a:spcPts val="0"/>
+              </a:spcAft>
+              <a:buNone/>
+            </a:pPr>
+            <a:r>
+              <a:rPr lang="ru-RU" sz="950" dirty="0">
+                <a:solidFill>
+                  <a:srgbClr val="000000"/>
+                </a:solidFill>
+                <a:latin typeface="PT Sans"/>
+                <a:ea typeface="PT Sans"/>
+                <a:cs typeface="PT Sans"/>
+              </a:rPr>
+              <a:t>38,0</a:t>
+            </a:r>
+          </a:p>
+        </p:txBody>
+      </p:sp>
+      <p:sp>
+        <p:nvSpPr>
+          <p:cNvPr id="830" name="CFR0C6"/>
+          <p:cNvSpPr/>
+          <p:nvPr/>
+        </p:nvSpPr>
+        <p:spPr>
+          <a:xfrm>
+            <a:off x="7849996" y="2680000"/>
+            <a:ext cx="1100000" cy="320000"/>
+          </a:xfrm>
+          <a:prstGeom prst="rect">
+            <a:avLst/>
+          </a:prstGeom>
+          <a:solidFill>
+            <a:srgbClr val="D6DCE5"/>
+          </a:solidFill>
+          <a:ln w="3175">
+            <a:solidFill>
+              <a:srgbClr val="888888"/>
+            </a:solidFill>
+          </a:ln>
+        </p:spPr>
+        <p:txBody>
+          <a:bodyPr wrap="square" lIns="91440" tIns="45720" rIns="91440" bIns="45720" anchor="ctr" anchorCtr="1">
+            <a:normAutofit/>
+          </a:bodyPr>
+          <a:lstStyle/>
+          <a:p>
+            <a:pPr marL="0" lvl="0" indent="0" algn="ctr" rtl="0">
+              <a:lnSpc>
+                <a:spcPct val="110000"/>
+              </a:lnSpc>
+              <a:spcBef>
+                <a:spcPts val="0"/>
+              </a:spcBef>
+              <a:spcAft>
+                <a:spcPts val="0"/>
+              </a:spcAft>
+              <a:buNone/>
+            </a:pPr>
+            <a:r>
+              <a:rPr lang="ru-RU" sz="950" b="1" dirty="0">
+                <a:solidFill>
+                  <a:srgbClr val="17365D"/>
+                </a:solidFill>
+                <a:latin typeface="PT Sans"/>
+                <a:ea typeface="PT Sans"/>
+                <a:cs typeface="PT Sans"/>
+              </a:rPr>
+              <a:t>+127,0</a:t>
+            </a:r>
+          </a:p>
+        </p:txBody>
+      </p:sp>
+      <p:sp>
+        <p:nvSpPr>
+          <p:cNvPr id="831" name="CFR1L"/>
+          <p:cNvSpPr/>
+          <p:nvPr/>
+        </p:nvSpPr>
+        <p:spPr>
+          <a:xfrm>
+            <a:off x="1050000" y="3000000"/>
+            <a:ext cx="1300000" cy="320000"/>
           </a:xfrm>
           <a:prstGeom prst="rect">
             <a:avLst/>
@@ -23190,29 +24438,29 @@
               <a:buNone/>
             </a:pPr>
             <a:r>
-              <a:rPr lang="ru-RU" sz="950" dirty="0">
-                <a:solidFill>
-                  <a:srgbClr val="000000"/>
-                </a:solidFill>
-                <a:latin typeface="PT Sans"/>
-                <a:ea typeface="PT Sans"/>
-                <a:cs typeface="PT Sans"/>
-              </a:rPr>
-              <a:t>Биометрических векторов</a:t>
-            </a:r>
-          </a:p>
-        </p:txBody>
-      </p:sp>
-      <p:sp>
-        <p:nvSpPr>
-          <p:cNvPr id="813" name="KPI11"/>
+              <a:rPr lang="ru-RU" sz="900" b="1" dirty="0">
+                <a:solidFill>
+                  <a:srgbClr val="17365D"/>
+                </a:solidFill>
+                <a:latin typeface="PT Sans"/>
+                <a:ea typeface="PT Sans"/>
+                <a:cs typeface="PT Sans"/>
+              </a:rPr>
+              <a:t>DCF, млн ₽ (r=18 %)</a:t>
+            </a:r>
+          </a:p>
+        </p:txBody>
+      </p:sp>
+      <p:sp>
+        <p:nvSpPr>
+          <p:cNvPr id="832" name="CFR1C0"/>
           <p:cNvSpPr/>
           <p:nvPr/>
         </p:nvSpPr>
         <p:spPr>
           <a:xfrm>
-            <a:off x="3450000" y="1920000"/>
-            <a:ext cx="1100000" cy="360000"/>
+            <a:off x="2350000" y="3000000"/>
+            <a:ext cx="916666" cy="320000"/>
           </a:xfrm>
           <a:prstGeom prst="rect">
             <a:avLst/>
@@ -23245,29 +24493,29 @@
               <a:buNone/>
             </a:pPr>
             <a:r>
-              <a:rPr lang="ru-RU" sz="950" b="1" dirty="0">
-                <a:solidFill>
-                  <a:srgbClr val="17365D"/>
-                </a:solidFill>
-                <a:latin typeface="PT Sans"/>
-                <a:ea typeface="PT Sans"/>
-                <a:cs typeface="PT Sans"/>
-              </a:rPr>
-              <a:t>≥ 500 тыс.</a:t>
-            </a:r>
-          </a:p>
-        </p:txBody>
-      </p:sp>
-      <p:sp>
-        <p:nvSpPr>
-          <p:cNvPr id="814" name="KPI12"/>
+              <a:rPr lang="ru-RU" sz="950" dirty="0">
+                <a:solidFill>
+                  <a:srgbClr val="000000"/>
+                </a:solidFill>
+                <a:latin typeface="PT Sans"/>
+                <a:ea typeface="PT Sans"/>
+                <a:cs typeface="PT Sans"/>
+              </a:rPr>
+              <a:t>−25,0</a:t>
+            </a:r>
+          </a:p>
+        </p:txBody>
+      </p:sp>
+      <p:sp>
+        <p:nvSpPr>
+          <p:cNvPr id="833" name="CFR1C1"/>
           <p:cNvSpPr/>
           <p:nvPr/>
         </p:nvSpPr>
         <p:spPr>
           <a:xfrm>
-            <a:off x="4550000" y="1920000"/>
-            <a:ext cx="900000" cy="360000"/>
+            <a:off x="3266666" y="3000000"/>
+            <a:ext cx="916666" cy="320000"/>
           </a:xfrm>
           <a:prstGeom prst="rect">
             <a:avLst/>
@@ -23308,21 +24556,296 @@
                 <a:ea typeface="PT Sans"/>
                 <a:cs typeface="PT Sans"/>
               </a:rPr>
-              <a:t>в КБС АББ</a:t>
-            </a:r>
-          </a:p>
-        </p:txBody>
-      </p:sp>
-      <p:sp>
-        <p:nvSpPr>
-          <p:cNvPr id="815" name="KPI20"/>
+              <a:t>6,8</a:t>
+            </a:r>
+          </a:p>
+        </p:txBody>
+      </p:sp>
+      <p:sp>
+        <p:nvSpPr>
+          <p:cNvPr id="834" name="CFR1C2"/>
           <p:cNvSpPr/>
           <p:nvPr/>
         </p:nvSpPr>
         <p:spPr>
           <a:xfrm>
-            <a:off x="1050000" y="2280000"/>
-            <a:ext cx="2400000" cy="360000"/>
+            <a:off x="4183332" y="3000000"/>
+            <a:ext cx="916666" cy="320000"/>
+          </a:xfrm>
+          <a:prstGeom prst="rect">
+            <a:avLst/>
+          </a:prstGeom>
+          <a:solidFill>
+            <a:srgbClr val="FFFFFF"/>
+          </a:solidFill>
+          <a:ln w="3175">
+            <a:solidFill>
+              <a:srgbClr val="888888"/>
+            </a:solidFill>
+          </a:ln>
+        </p:spPr>
+        <p:txBody>
+          <a:bodyPr wrap="square" lIns="91440" tIns="45720" rIns="91440" bIns="45720" anchor="ctr" anchorCtr="1">
+            <a:normAutofit/>
+          </a:bodyPr>
+          <a:lstStyle/>
+          <a:p>
+            <a:pPr marL="0" lvl="0" indent="0" algn="ctr" rtl="0">
+              <a:lnSpc>
+                <a:spcPct val="110000"/>
+              </a:lnSpc>
+              <a:spcBef>
+                <a:spcPts val="0"/>
+              </a:spcBef>
+              <a:spcAft>
+                <a:spcPts val="0"/>
+              </a:spcAft>
+              <a:buNone/>
+            </a:pPr>
+            <a:r>
+              <a:rPr lang="ru-RU" sz="950" dirty="0">
+                <a:solidFill>
+                  <a:srgbClr val="000000"/>
+                </a:solidFill>
+                <a:latin typeface="PT Sans"/>
+                <a:ea typeface="PT Sans"/>
+                <a:cs typeface="PT Sans"/>
+              </a:rPr>
+              <a:t>12,9</a:t>
+            </a:r>
+          </a:p>
+        </p:txBody>
+      </p:sp>
+      <p:sp>
+        <p:nvSpPr>
+          <p:cNvPr id="835" name="CFR1C3"/>
+          <p:cNvSpPr/>
+          <p:nvPr/>
+        </p:nvSpPr>
+        <p:spPr>
+          <a:xfrm>
+            <a:off x="5099998" y="3000000"/>
+            <a:ext cx="916666" cy="320000"/>
+          </a:xfrm>
+          <a:prstGeom prst="rect">
+            <a:avLst/>
+          </a:prstGeom>
+          <a:solidFill>
+            <a:srgbClr val="FFFFFF"/>
+          </a:solidFill>
+          <a:ln w="3175">
+            <a:solidFill>
+              <a:srgbClr val="888888"/>
+            </a:solidFill>
+          </a:ln>
+        </p:spPr>
+        <p:txBody>
+          <a:bodyPr wrap="square" lIns="91440" tIns="45720" rIns="91440" bIns="45720" anchor="ctr" anchorCtr="1">
+            <a:normAutofit/>
+          </a:bodyPr>
+          <a:lstStyle/>
+          <a:p>
+            <a:pPr marL="0" lvl="0" indent="0" algn="ctr" rtl="0">
+              <a:lnSpc>
+                <a:spcPct val="110000"/>
+              </a:lnSpc>
+              <a:spcBef>
+                <a:spcPts val="0"/>
+              </a:spcBef>
+              <a:spcAft>
+                <a:spcPts val="0"/>
+              </a:spcAft>
+              <a:buNone/>
+            </a:pPr>
+            <a:r>
+              <a:rPr lang="ru-RU" sz="950" dirty="0">
+                <a:solidFill>
+                  <a:srgbClr val="000000"/>
+                </a:solidFill>
+                <a:latin typeface="PT Sans"/>
+                <a:ea typeface="PT Sans"/>
+                <a:cs typeface="PT Sans"/>
+              </a:rPr>
+              <a:t>17,0</a:t>
+            </a:r>
+          </a:p>
+        </p:txBody>
+      </p:sp>
+      <p:sp>
+        <p:nvSpPr>
+          <p:cNvPr id="836" name="CFR1C4"/>
+          <p:cNvSpPr/>
+          <p:nvPr/>
+        </p:nvSpPr>
+        <p:spPr>
+          <a:xfrm>
+            <a:off x="6016664" y="3000000"/>
+            <a:ext cx="916666" cy="320000"/>
+          </a:xfrm>
+          <a:prstGeom prst="rect">
+            <a:avLst/>
+          </a:prstGeom>
+          <a:solidFill>
+            <a:srgbClr val="FFFFFF"/>
+          </a:solidFill>
+          <a:ln w="3175">
+            <a:solidFill>
+              <a:srgbClr val="888888"/>
+            </a:solidFill>
+          </a:ln>
+        </p:spPr>
+        <p:txBody>
+          <a:bodyPr wrap="square" lIns="91440" tIns="45720" rIns="91440" bIns="45720" anchor="ctr" anchorCtr="1">
+            <a:normAutofit/>
+          </a:bodyPr>
+          <a:lstStyle/>
+          <a:p>
+            <a:pPr marL="0" lvl="0" indent="0" algn="ctr" rtl="0">
+              <a:lnSpc>
+                <a:spcPct val="110000"/>
+              </a:lnSpc>
+              <a:spcBef>
+                <a:spcPts val="0"/>
+              </a:spcBef>
+              <a:spcAft>
+                <a:spcPts val="0"/>
+              </a:spcAft>
+              <a:buNone/>
+            </a:pPr>
+            <a:r>
+              <a:rPr lang="ru-RU" sz="950" dirty="0">
+                <a:solidFill>
+                  <a:srgbClr val="000000"/>
+                </a:solidFill>
+                <a:latin typeface="PT Sans"/>
+                <a:ea typeface="PT Sans"/>
+                <a:cs typeface="PT Sans"/>
+              </a:rPr>
+              <a:t>18,1</a:t>
+            </a:r>
+          </a:p>
+        </p:txBody>
+      </p:sp>
+      <p:sp>
+        <p:nvSpPr>
+          <p:cNvPr id="837" name="CFR1C5"/>
+          <p:cNvSpPr/>
+          <p:nvPr/>
+        </p:nvSpPr>
+        <p:spPr>
+          <a:xfrm>
+            <a:off x="6933330" y="3000000"/>
+            <a:ext cx="916666" cy="320000"/>
+          </a:xfrm>
+          <a:prstGeom prst="rect">
+            <a:avLst/>
+          </a:prstGeom>
+          <a:solidFill>
+            <a:srgbClr val="FFFFFF"/>
+          </a:solidFill>
+          <a:ln w="3175">
+            <a:solidFill>
+              <a:srgbClr val="888888"/>
+            </a:solidFill>
+          </a:ln>
+        </p:spPr>
+        <p:txBody>
+          <a:bodyPr wrap="square" lIns="91440" tIns="45720" rIns="91440" bIns="45720" anchor="ctr" anchorCtr="1">
+            <a:normAutofit/>
+          </a:bodyPr>
+          <a:lstStyle/>
+          <a:p>
+            <a:pPr marL="0" lvl="0" indent="0" algn="ctr" rtl="0">
+              <a:lnSpc>
+                <a:spcPct val="110000"/>
+              </a:lnSpc>
+              <a:spcBef>
+                <a:spcPts val="0"/>
+              </a:spcBef>
+              <a:spcAft>
+                <a:spcPts val="0"/>
+              </a:spcAft>
+              <a:buNone/>
+            </a:pPr>
+            <a:r>
+              <a:rPr lang="ru-RU" sz="950" dirty="0">
+                <a:solidFill>
+                  <a:srgbClr val="000000"/>
+                </a:solidFill>
+                <a:latin typeface="PT Sans"/>
+                <a:ea typeface="PT Sans"/>
+                <a:cs typeface="PT Sans"/>
+              </a:rPr>
+              <a:t>16,6</a:t>
+            </a:r>
+          </a:p>
+        </p:txBody>
+      </p:sp>
+      <p:sp>
+        <p:nvSpPr>
+          <p:cNvPr id="838" name="CFR1C6"/>
+          <p:cNvSpPr/>
+          <p:nvPr/>
+        </p:nvSpPr>
+        <p:spPr>
+          <a:xfrm>
+            <a:off x="7849996" y="3000000"/>
+            <a:ext cx="1100000" cy="320000"/>
+          </a:xfrm>
+          <a:prstGeom prst="rect">
+            <a:avLst/>
+          </a:prstGeom>
+          <a:solidFill>
+            <a:srgbClr val="D6DCE5"/>
+          </a:solidFill>
+          <a:ln w="3175">
+            <a:solidFill>
+              <a:srgbClr val="888888"/>
+            </a:solidFill>
+          </a:ln>
+        </p:spPr>
+        <p:txBody>
+          <a:bodyPr wrap="square" lIns="91440" tIns="45720" rIns="91440" bIns="45720" anchor="ctr" anchorCtr="1">
+            <a:normAutofit/>
+          </a:bodyPr>
+          <a:lstStyle/>
+          <a:p>
+            <a:pPr marL="0" lvl="0" indent="0" algn="ctr" rtl="0">
+              <a:lnSpc>
+                <a:spcPct val="110000"/>
+              </a:lnSpc>
+              <a:spcBef>
+                <a:spcPts val="0"/>
+              </a:spcBef>
+              <a:spcAft>
+                <a:spcPts val="0"/>
+              </a:spcAft>
+              <a:buNone/>
+            </a:pPr>
+            <a:r>
+              <a:rPr lang="ru-RU" sz="950" b="1" dirty="0">
+                <a:solidFill>
+                  <a:srgbClr val="17365D"/>
+                </a:solidFill>
+                <a:latin typeface="PT Sans"/>
+                <a:ea typeface="PT Sans"/>
+                <a:cs typeface="PT Sans"/>
+              </a:rPr>
+              <a:t>+71,4</a:t>
+            </a:r>
+          </a:p>
+        </p:txBody>
+      </p:sp>
+      <p:sp>
+        <p:nvSpPr>
+          <p:cNvPr id="839" name="CFR2L"/>
+          <p:cNvSpPr/>
+          <p:nvPr/>
+        </p:nvSpPr>
+        <p:spPr>
+          <a:xfrm>
+            <a:off x="1050000" y="3320000"/>
+            <a:ext cx="1300000" cy="320000"/>
           </a:xfrm>
           <a:prstGeom prst="rect">
             <a:avLst/>
@@ -23355,29 +24878,29 @@
               <a:buNone/>
             </a:pPr>
             <a:r>
-              <a:rPr lang="ru-RU" sz="950" dirty="0">
-                <a:solidFill>
-                  <a:srgbClr val="000000"/>
-                </a:solidFill>
-                <a:latin typeface="PT Sans"/>
-                <a:ea typeface="PT Sans"/>
-                <a:cs typeface="PT Sans"/>
-              </a:rPr>
-              <a:t>Конверсия лид → пилот</a:t>
-            </a:r>
-          </a:p>
-        </p:txBody>
-      </p:sp>
-      <p:sp>
-        <p:nvSpPr>
-          <p:cNvPr id="816" name="KPI21"/>
+              <a:rPr lang="ru-RU" sz="900" b="1" dirty="0">
+                <a:solidFill>
+                  <a:srgbClr val="17365D"/>
+                </a:solidFill>
+                <a:latin typeface="PT Sans"/>
+                <a:ea typeface="PT Sans"/>
+                <a:cs typeface="PT Sans"/>
+              </a:rPr>
+              <a:t>Накопл. DCF</a:t>
+            </a:r>
+          </a:p>
+        </p:txBody>
+      </p:sp>
+      <p:sp>
+        <p:nvSpPr>
+          <p:cNvPr id="840" name="CFR2C0"/>
           <p:cNvSpPr/>
           <p:nvPr/>
         </p:nvSpPr>
         <p:spPr>
           <a:xfrm>
-            <a:off x="3450000" y="2280000"/>
-            <a:ext cx="1100000" cy="360000"/>
+            <a:off x="2350000" y="3320000"/>
+            <a:ext cx="916666" cy="320000"/>
           </a:xfrm>
           <a:prstGeom prst="rect">
             <a:avLst/>
@@ -23410,29 +24933,29 @@
               <a:buNone/>
             </a:pPr>
             <a:r>
-              <a:rPr lang="ru-RU" sz="950" b="1" dirty="0">
-                <a:solidFill>
-                  <a:srgbClr val="17365D"/>
-                </a:solidFill>
-                <a:latin typeface="PT Sans"/>
-                <a:ea typeface="PT Sans"/>
-                <a:cs typeface="PT Sans"/>
-              </a:rPr>
-              <a:t>≥ 30 %</a:t>
-            </a:r>
-          </a:p>
-        </p:txBody>
-      </p:sp>
-      <p:sp>
-        <p:nvSpPr>
-          <p:cNvPr id="817" name="KPI22"/>
+              <a:rPr lang="ru-RU" sz="950" dirty="0">
+                <a:solidFill>
+                  <a:srgbClr val="000000"/>
+                </a:solidFill>
+                <a:latin typeface="PT Sans"/>
+                <a:ea typeface="PT Sans"/>
+                <a:cs typeface="PT Sans"/>
+              </a:rPr>
+              <a:t>−25,0</a:t>
+            </a:r>
+          </a:p>
+        </p:txBody>
+      </p:sp>
+      <p:sp>
+        <p:nvSpPr>
+          <p:cNvPr id="841" name="CFR2C1"/>
           <p:cNvSpPr/>
           <p:nvPr/>
         </p:nvSpPr>
         <p:spPr>
           <a:xfrm>
-            <a:off x="4550000" y="2280000"/>
-            <a:ext cx="900000" cy="360000"/>
+            <a:off x="3266666" y="3320000"/>
+            <a:ext cx="916666" cy="320000"/>
           </a:xfrm>
           <a:prstGeom prst="rect">
             <a:avLst/>
@@ -23473,21 +24996,400 @@
                 <a:ea typeface="PT Sans"/>
                 <a:cs typeface="PT Sans"/>
               </a:rPr>
-              <a:t/>
-            </a:r>
-          </a:p>
-        </p:txBody>
-      </p:sp>
-      <p:sp>
-        <p:nvSpPr>
-          <p:cNvPr id="818" name="KPI30"/>
+              <a:t>−18,2</a:t>
+            </a:r>
+          </a:p>
+        </p:txBody>
+      </p:sp>
+      <p:sp>
+        <p:nvSpPr>
+          <p:cNvPr id="842" name="CFR2C2"/>
           <p:cNvSpPr/>
           <p:nvPr/>
         </p:nvSpPr>
         <p:spPr>
           <a:xfrm>
-            <a:off x="1050000" y="2640000"/>
-            <a:ext cx="2400000" cy="360000"/>
+            <a:off x="4183332" y="3320000"/>
+            <a:ext cx="916666" cy="320000"/>
+          </a:xfrm>
+          <a:prstGeom prst="rect">
+            <a:avLst/>
+          </a:prstGeom>
+          <a:solidFill>
+            <a:srgbClr val="F2F2F2"/>
+          </a:solidFill>
+          <a:ln w="3175">
+            <a:solidFill>
+              <a:srgbClr val="888888"/>
+            </a:solidFill>
+          </a:ln>
+        </p:spPr>
+        <p:txBody>
+          <a:bodyPr wrap="square" lIns="91440" tIns="45720" rIns="91440" bIns="45720" anchor="ctr" anchorCtr="1">
+            <a:normAutofit/>
+          </a:bodyPr>
+          <a:lstStyle/>
+          <a:p>
+            <a:pPr marL="0" lvl="0" indent="0" algn="ctr" rtl="0">
+              <a:lnSpc>
+                <a:spcPct val="110000"/>
+              </a:lnSpc>
+              <a:spcBef>
+                <a:spcPts val="0"/>
+              </a:spcBef>
+              <a:spcAft>
+                <a:spcPts val="0"/>
+              </a:spcAft>
+              <a:buNone/>
+            </a:pPr>
+            <a:r>
+              <a:rPr lang="ru-RU" sz="950" dirty="0">
+                <a:solidFill>
+                  <a:srgbClr val="000000"/>
+                </a:solidFill>
+                <a:latin typeface="PT Sans"/>
+                <a:ea typeface="PT Sans"/>
+                <a:cs typeface="PT Sans"/>
+              </a:rPr>
+              <a:t>−5,3</a:t>
+            </a:r>
+          </a:p>
+        </p:txBody>
+      </p:sp>
+      <p:sp>
+        <p:nvSpPr>
+          <p:cNvPr id="843" name="CFR2C3"/>
+          <p:cNvSpPr/>
+          <p:nvPr/>
+        </p:nvSpPr>
+        <p:spPr>
+          <a:xfrm>
+            <a:off x="5099998" y="3320000"/>
+            <a:ext cx="916666" cy="320000"/>
+          </a:xfrm>
+          <a:prstGeom prst="rect">
+            <a:avLst/>
+          </a:prstGeom>
+          <a:solidFill>
+            <a:srgbClr val="F2F2F2"/>
+          </a:solidFill>
+          <a:ln w="3175">
+            <a:solidFill>
+              <a:srgbClr val="888888"/>
+            </a:solidFill>
+          </a:ln>
+        </p:spPr>
+        <p:txBody>
+          <a:bodyPr wrap="square" lIns="91440" tIns="45720" rIns="91440" bIns="45720" anchor="ctr" anchorCtr="1">
+            <a:normAutofit/>
+          </a:bodyPr>
+          <a:lstStyle/>
+          <a:p>
+            <a:pPr marL="0" lvl="0" indent="0" algn="ctr" rtl="0">
+              <a:lnSpc>
+                <a:spcPct val="110000"/>
+              </a:lnSpc>
+              <a:spcBef>
+                <a:spcPts val="0"/>
+              </a:spcBef>
+              <a:spcAft>
+                <a:spcPts val="0"/>
+              </a:spcAft>
+              <a:buNone/>
+            </a:pPr>
+            <a:r>
+              <a:rPr lang="ru-RU" sz="950" dirty="0">
+                <a:solidFill>
+                  <a:srgbClr val="000000"/>
+                </a:solidFill>
+                <a:latin typeface="PT Sans"/>
+                <a:ea typeface="PT Sans"/>
+                <a:cs typeface="PT Sans"/>
+              </a:rPr>
+              <a:t>+11,8</a:t>
+            </a:r>
+          </a:p>
+        </p:txBody>
+      </p:sp>
+      <p:sp>
+        <p:nvSpPr>
+          <p:cNvPr id="844" name="CFR2C4"/>
+          <p:cNvSpPr/>
+          <p:nvPr/>
+        </p:nvSpPr>
+        <p:spPr>
+          <a:xfrm>
+            <a:off x="6016664" y="3320000"/>
+            <a:ext cx="916666" cy="320000"/>
+          </a:xfrm>
+          <a:prstGeom prst="rect">
+            <a:avLst/>
+          </a:prstGeom>
+          <a:solidFill>
+            <a:srgbClr val="F2F2F2"/>
+          </a:solidFill>
+          <a:ln w="3175">
+            <a:solidFill>
+              <a:srgbClr val="888888"/>
+            </a:solidFill>
+          </a:ln>
+        </p:spPr>
+        <p:txBody>
+          <a:bodyPr wrap="square" lIns="91440" tIns="45720" rIns="91440" bIns="45720" anchor="ctr" anchorCtr="1">
+            <a:normAutofit/>
+          </a:bodyPr>
+          <a:lstStyle/>
+          <a:p>
+            <a:pPr marL="0" lvl="0" indent="0" algn="ctr" rtl="0">
+              <a:lnSpc>
+                <a:spcPct val="110000"/>
+              </a:lnSpc>
+              <a:spcBef>
+                <a:spcPts val="0"/>
+              </a:spcBef>
+              <a:spcAft>
+                <a:spcPts val="0"/>
+              </a:spcAft>
+              <a:buNone/>
+            </a:pPr>
+            <a:r>
+              <a:rPr lang="ru-RU" sz="950" dirty="0">
+                <a:solidFill>
+                  <a:srgbClr val="000000"/>
+                </a:solidFill>
+                <a:latin typeface="PT Sans"/>
+                <a:ea typeface="PT Sans"/>
+                <a:cs typeface="PT Sans"/>
+              </a:rPr>
+              <a:t>+29,8</a:t>
+            </a:r>
+          </a:p>
+        </p:txBody>
+      </p:sp>
+      <p:sp>
+        <p:nvSpPr>
+          <p:cNvPr id="845" name="CFR2C5"/>
+          <p:cNvSpPr/>
+          <p:nvPr/>
+        </p:nvSpPr>
+        <p:spPr>
+          <a:xfrm>
+            <a:off x="6933330" y="3320000"/>
+            <a:ext cx="916666" cy="320000"/>
+          </a:xfrm>
+          <a:prstGeom prst="rect">
+            <a:avLst/>
+          </a:prstGeom>
+          <a:solidFill>
+            <a:srgbClr val="F2F2F2"/>
+          </a:solidFill>
+          <a:ln w="3175">
+            <a:solidFill>
+              <a:srgbClr val="888888"/>
+            </a:solidFill>
+          </a:ln>
+        </p:spPr>
+        <p:txBody>
+          <a:bodyPr wrap="square" lIns="91440" tIns="45720" rIns="91440" bIns="45720" anchor="ctr" anchorCtr="1">
+            <a:normAutofit/>
+          </a:bodyPr>
+          <a:lstStyle/>
+          <a:p>
+            <a:pPr marL="0" lvl="0" indent="0" algn="ctr" rtl="0">
+              <a:lnSpc>
+                <a:spcPct val="110000"/>
+              </a:lnSpc>
+              <a:spcBef>
+                <a:spcPts val="0"/>
+              </a:spcBef>
+              <a:spcAft>
+                <a:spcPts val="0"/>
+              </a:spcAft>
+              <a:buNone/>
+            </a:pPr>
+            <a:r>
+              <a:rPr lang="ru-RU" sz="950" dirty="0">
+                <a:solidFill>
+                  <a:srgbClr val="000000"/>
+                </a:solidFill>
+                <a:latin typeface="PT Sans"/>
+                <a:ea typeface="PT Sans"/>
+                <a:cs typeface="PT Sans"/>
+              </a:rPr>
+              <a:t>+46,4</a:t>
+            </a:r>
+          </a:p>
+        </p:txBody>
+      </p:sp>
+      <p:sp>
+        <p:nvSpPr>
+          <p:cNvPr id="846" name="CFR2C6"/>
+          <p:cNvSpPr/>
+          <p:nvPr/>
+        </p:nvSpPr>
+        <p:spPr>
+          <a:xfrm>
+            <a:off x="7849996" y="3320000"/>
+            <a:ext cx="1100000" cy="320000"/>
+          </a:xfrm>
+          <a:prstGeom prst="rect">
+            <a:avLst/>
+          </a:prstGeom>
+          <a:solidFill>
+            <a:srgbClr val="D6DCE5"/>
+          </a:solidFill>
+          <a:ln w="3175">
+            <a:solidFill>
+              <a:srgbClr val="888888"/>
+            </a:solidFill>
+          </a:ln>
+        </p:spPr>
+        <p:txBody>
+          <a:bodyPr wrap="square" lIns="91440" tIns="45720" rIns="91440" bIns="45720" anchor="ctr" anchorCtr="1">
+            <a:normAutofit/>
+          </a:bodyPr>
+          <a:lstStyle/>
+          <a:p>
+            <a:pPr marL="0" lvl="0" indent="0" algn="ctr" rtl="0">
+              <a:lnSpc>
+                <a:spcPct val="110000"/>
+              </a:lnSpc>
+              <a:spcBef>
+                <a:spcPts val="0"/>
+              </a:spcBef>
+              <a:spcAft>
+                <a:spcPts val="0"/>
+              </a:spcAft>
+              <a:buNone/>
+            </a:pPr>
+            <a:r>
+              <a:rPr lang="ru-RU" sz="950" b="1" dirty="0">
+                <a:solidFill>
+                  <a:srgbClr val="17365D"/>
+                </a:solidFill>
+                <a:latin typeface="PT Sans"/>
+                <a:ea typeface="PT Sans"/>
+                <a:cs typeface="PT Sans"/>
+              </a:rPr>
+              <a:t>NPV</a:t>
+            </a:r>
+          </a:p>
+        </p:txBody>
+      </p:sp>
+      <p:sp>
+        <p:nvSpPr>
+          <p:cNvPr id="847" name="RisksTitle"/>
+          <p:cNvSpPr txBox="1"/>
+          <p:nvPr/>
+        </p:nvSpPr>
+        <p:spPr>
+          <a:xfrm>
+            <a:off x="1050000" y="3220000"/>
+            <a:ext cx="7900000" cy="250000"/>
+          </a:xfrm>
+          <a:prstGeom prst="rect">
+            <a:avLst/>
+          </a:prstGeom>
+          <a:noFill/>
+          <a:ln>
+            <a:noFill/>
+          </a:ln>
+        </p:spPr>
+        <p:txBody>
+          <a:bodyPr wrap="square" lIns="91440" tIns="45720" rIns="91440" bIns="45720" anchor="ctr" anchorCtr="0">
+            <a:noAutofit/>
+          </a:bodyPr>
+          <a:lstStyle/>
+          <a:p>
+            <a:pPr marL="0" lvl="0" indent="0" algn="l" rtl="0">
+              <a:lnSpc>
+                <a:spcPct val="110000"/>
+              </a:lnSpc>
+              <a:spcBef>
+                <a:spcPts val="0"/>
+              </a:spcBef>
+              <a:spcAft>
+                <a:spcPts val="0"/>
+              </a:spcAft>
+              <a:buNone/>
+            </a:pPr>
+            <a:r>
+              <a:rPr lang="ru-RU" sz="1100" b="1" dirty="0">
+                <a:solidFill>
+                  <a:srgbClr val="17365D"/>
+                </a:solidFill>
+                <a:latin typeface="PT Sans"/>
+                <a:ea typeface="PT Sans"/>
+                <a:cs typeface="PT Sans"/>
+              </a:rPr>
+              <a:t>КЛЮЧЕВЫЕ РИСКИ И МЕРЫ ПО ИХ УДЕРЖАНИЮ</a:t>
+            </a:r>
+          </a:p>
+        </p:txBody>
+      </p:sp>
+      <p:sp>
+        <p:nvSpPr>
+          <p:cNvPr id="848" name="RH0"/>
+          <p:cNvSpPr/>
+          <p:nvPr/>
+        </p:nvSpPr>
+        <p:spPr>
+          <a:xfrm>
+            <a:off x="1050000" y="3500000"/>
+            <a:ext cx="1930000" cy="230000"/>
+          </a:xfrm>
+          <a:prstGeom prst="rect">
+            <a:avLst/>
+          </a:prstGeom>
+          <a:solidFill>
+            <a:srgbClr val="17365D"/>
+          </a:solidFill>
+          <a:ln>
+            <a:noFill/>
+          </a:ln>
+        </p:spPr>
+        <p:txBody>
+          <a:bodyPr wrap="square" lIns="91440" tIns="45720" rIns="91440" bIns="45720" anchor="ctr" anchorCtr="1">
+            <a:normAutofit/>
+          </a:bodyPr>
+          <a:lstStyle/>
+          <a:p>
+            <a:pPr marL="0" lvl="0" indent="0" algn="ctr" rtl="0">
+              <a:lnSpc>
+                <a:spcPct val="110000"/>
+              </a:lnSpc>
+              <a:spcBef>
+                <a:spcPts val="0"/>
+              </a:spcBef>
+              <a:spcAft>
+                <a:spcPts val="0"/>
+              </a:spcAft>
+              <a:buNone/>
+            </a:pPr>
+            <a:r>
+              <a:rPr lang="ru-RU" sz="950" b="1" dirty="0">
+                <a:solidFill>
+                  <a:srgbClr val="FFFFFF"/>
+                </a:solidFill>
+                <a:latin typeface="PT Sans"/>
+                <a:ea typeface="PT Sans"/>
+                <a:cs typeface="PT Sans"/>
+              </a:rPr>
+              <a:t>РЕГУЛЯТОРНЫЙ</a:t>
+            </a:r>
+          </a:p>
+        </p:txBody>
+      </p:sp>
+      <p:sp>
+        <p:nvSpPr>
+          <p:cNvPr id="849" name="RB0"/>
+          <p:cNvSpPr/>
+          <p:nvPr/>
+        </p:nvSpPr>
+        <p:spPr>
+          <a:xfrm>
+            <a:off x="1050000" y="3730000"/>
+            <a:ext cx="1930000" cy="620000"/>
           </a:xfrm>
           <a:prstGeom prst="rect">
             <a:avLst/>
@@ -23502,47 +25404,147 @@
           </a:ln>
         </p:spPr>
         <p:txBody>
+          <a:bodyPr wrap="square" lIns="91440" tIns="45720" rIns="91440" bIns="45720" anchor="t" anchorCtr="1">
+            <a:normAutofit/>
+          </a:bodyPr>
+          <a:lstStyle/>
+          <a:p>
+            <a:pPr marL="0" lvl="0" indent="0" algn="l" rtl="0">
+              <a:lnSpc>
+                <a:spcPct val="110000"/>
+              </a:lnSpc>
+              <a:spcBef>
+                <a:spcPts val="0"/>
+              </a:spcBef>
+              <a:spcAft>
+                <a:spcPts val="0"/>
+              </a:spcAft>
+              <a:buNone/>
+            </a:pPr>
+            <a:r>
+              <a:rPr lang="ru-RU" sz="800" b="1" dirty="0">
+                <a:solidFill>
+                  <a:srgbClr val="17365D"/>
+                </a:solidFill>
+                <a:latin typeface="PT Sans"/>
+                <a:ea typeface="PT Sans"/>
+                <a:cs typeface="PT Sans"/>
+              </a:rPr>
+              <a:t>Угроза: </a:t>
+            </a:r>
+            <a:r>
+              <a:rPr lang="ru-RU" sz="800" dirty="0">
+                <a:solidFill>
+                  <a:srgbClr val="000000"/>
+                </a:solidFill>
+                <a:latin typeface="PT Sans"/>
+                <a:ea typeface="PT Sans"/>
+                <a:cs typeface="PT Sans"/>
+              </a:rPr>
+              <a:t>ужесточение 572-ФЗ, новые штрафы</a:t>
+            </a:r>
+          </a:p>
+          <a:p>
+            <a:pPr marL="0" lvl="0" indent="0" algn="l" rtl="0">
+              <a:lnSpc>
+                <a:spcPct val="110000"/>
+              </a:lnSpc>
+              <a:spcBef>
+                <a:spcPts val="80"/>
+              </a:spcBef>
+              <a:spcAft>
+                <a:spcPts val="0"/>
+              </a:spcAft>
+              <a:buNone/>
+            </a:pPr>
+            <a:r>
+              <a:rPr lang="ru-RU" sz="800" b="1" dirty="0">
+                <a:solidFill>
+                  <a:srgbClr val="17365D"/>
+                </a:solidFill>
+                <a:latin typeface="PT Sans"/>
+                <a:ea typeface="PT Sans"/>
+                <a:cs typeface="PT Sans"/>
+              </a:rPr>
+              <a:t>Меры: </a:t>
+            </a:r>
+            <a:r>
+              <a:rPr lang="ru-RU" sz="800" dirty="0">
+                <a:solidFill>
+                  <a:srgbClr val="000000"/>
+                </a:solidFill>
+                <a:latin typeface="PT Sans"/>
+                <a:ea typeface="PT Sans"/>
+                <a:cs typeface="PT Sans"/>
+              </a:rPr>
+              <a:t>юр. сопровождение, аудит соответствия</a:t>
+            </a:r>
+          </a:p>
+        </p:txBody>
+      </p:sp>
+      <p:sp>
+        <p:nvSpPr>
+          <p:cNvPr id="850" name="RH1"/>
+          <p:cNvSpPr/>
+          <p:nvPr/>
+        </p:nvSpPr>
+        <p:spPr>
+          <a:xfrm>
+            <a:off x="3040000" y="3500000"/>
+            <a:ext cx="1930000" cy="230000"/>
+          </a:xfrm>
+          <a:prstGeom prst="rect">
+            <a:avLst/>
+          </a:prstGeom>
+          <a:solidFill>
+            <a:srgbClr val="17365D"/>
+          </a:solidFill>
+          <a:ln>
+            <a:noFill/>
+          </a:ln>
+        </p:spPr>
+        <p:txBody>
           <a:bodyPr wrap="square" lIns="91440" tIns="45720" rIns="91440" bIns="45720" anchor="ctr" anchorCtr="1">
             <a:normAutofit/>
           </a:bodyPr>
           <a:lstStyle/>
           <a:p>
-            <a:pPr marL="0" lvl="0" indent="0" algn="l" rtl="0">
-              <a:lnSpc>
-                <a:spcPct val="110000"/>
-              </a:lnSpc>
-              <a:spcBef>
-                <a:spcPts val="0"/>
-              </a:spcBef>
-              <a:spcAft>
-                <a:spcPts val="0"/>
-              </a:spcAft>
-              <a:buNone/>
-            </a:pPr>
-            <a:r>
-              <a:rPr lang="ru-RU" sz="950" dirty="0">
-                <a:solidFill>
-                  <a:srgbClr val="000000"/>
-                </a:solidFill>
-                <a:latin typeface="PT Sans"/>
-                <a:ea typeface="PT Sans"/>
-                <a:cs typeface="PT Sans"/>
-              </a:rPr>
-              <a:t>Конверсия пилот → контракт</a:t>
-            </a:r>
-          </a:p>
-        </p:txBody>
-      </p:sp>
-      <p:sp>
-        <p:nvSpPr>
-          <p:cNvPr id="819" name="KPI31"/>
+            <a:pPr marL="0" lvl="0" indent="0" algn="ctr" rtl="0">
+              <a:lnSpc>
+                <a:spcPct val="110000"/>
+              </a:lnSpc>
+              <a:spcBef>
+                <a:spcPts val="0"/>
+              </a:spcBef>
+              <a:spcAft>
+                <a:spcPts val="0"/>
+              </a:spcAft>
+              <a:buNone/>
+            </a:pPr>
+            <a:r>
+              <a:rPr lang="ru-RU" sz="950" b="1" dirty="0">
+                <a:solidFill>
+                  <a:srgbClr val="FFFFFF"/>
+                </a:solidFill>
+                <a:latin typeface="PT Sans"/>
+                <a:ea typeface="PT Sans"/>
+                <a:cs typeface="PT Sans"/>
+              </a:rPr>
+              <a:t>РЕПУТАЦИОННЫЙ</a:t>
+            </a:r>
+          </a:p>
+        </p:txBody>
+      </p:sp>
+      <p:sp>
+        <p:nvSpPr>
+          <p:cNvPr id="851" name="RB1"/>
           <p:cNvSpPr/>
           <p:nvPr/>
         </p:nvSpPr>
         <p:spPr>
           <a:xfrm>
-            <a:off x="3450000" y="2640000"/>
-            <a:ext cx="1100000" cy="360000"/>
+            <a:off x="3040000" y="3730000"/>
+            <a:ext cx="1930000" cy="620000"/>
           </a:xfrm>
           <a:prstGeom prst="rect">
             <a:avLst/>
@@ -23557,6 +25559,106 @@
           </a:ln>
         </p:spPr>
         <p:txBody>
+          <a:bodyPr wrap="square" lIns="91440" tIns="45720" rIns="91440" bIns="45720" anchor="t" anchorCtr="1">
+            <a:normAutofit/>
+          </a:bodyPr>
+          <a:lstStyle/>
+          <a:p>
+            <a:pPr marL="0" lvl="0" indent="0" algn="l" rtl="0">
+              <a:lnSpc>
+                <a:spcPct val="110000"/>
+              </a:lnSpc>
+              <a:spcBef>
+                <a:spcPts val="0"/>
+              </a:spcBef>
+              <a:spcAft>
+                <a:spcPts val="0"/>
+              </a:spcAft>
+              <a:buNone/>
+            </a:pPr>
+            <a:r>
+              <a:rPr lang="ru-RU" sz="800" b="1" dirty="0">
+                <a:solidFill>
+                  <a:srgbClr val="17365D"/>
+                </a:solidFill>
+                <a:latin typeface="PT Sans"/>
+                <a:ea typeface="PT Sans"/>
+                <a:cs typeface="PT Sans"/>
+              </a:rPr>
+              <a:t>Угроза: </a:t>
+            </a:r>
+            <a:r>
+              <a:rPr lang="ru-RU" sz="800" dirty="0">
+                <a:solidFill>
+                  <a:srgbClr val="000000"/>
+                </a:solidFill>
+                <a:latin typeface="PT Sans"/>
+                <a:ea typeface="PT Sans"/>
+                <a:cs typeface="PT Sans"/>
+              </a:rPr>
+              <a:t>утечка биометрии, волна публикаций</a:t>
+            </a:r>
+          </a:p>
+          <a:p>
+            <a:pPr marL="0" lvl="0" indent="0" algn="l" rtl="0">
+              <a:lnSpc>
+                <a:spcPct val="110000"/>
+              </a:lnSpc>
+              <a:spcBef>
+                <a:spcPts val="80"/>
+              </a:spcBef>
+              <a:spcAft>
+                <a:spcPts val="0"/>
+              </a:spcAft>
+              <a:buNone/>
+            </a:pPr>
+            <a:r>
+              <a:rPr lang="ru-RU" sz="800" b="1" dirty="0">
+                <a:solidFill>
+                  <a:srgbClr val="17365D"/>
+                </a:solidFill>
+                <a:latin typeface="PT Sans"/>
+                <a:ea typeface="PT Sans"/>
+                <a:cs typeface="PT Sans"/>
+              </a:rPr>
+              <a:t>Меры: </a:t>
+            </a:r>
+            <a:r>
+              <a:rPr lang="ru-RU" sz="800" dirty="0">
+                <a:solidFill>
+                  <a:srgbClr val="000000"/>
+                </a:solidFill>
+                <a:latin typeface="PT Sans"/>
+                <a:ea typeface="PT Sans"/>
+                <a:cs typeface="PT Sans"/>
+              </a:rPr>
+              <a:t>комплаенс, мониторинг, кризис-план</a:t>
+            </a:r>
+          </a:p>
+        </p:txBody>
+      </p:sp>
+      <p:sp>
+        <p:nvSpPr>
+          <p:cNvPr id="852" name="RH2"/>
+          <p:cNvSpPr/>
+          <p:nvPr/>
+        </p:nvSpPr>
+        <p:spPr>
+          <a:xfrm>
+            <a:off x="5030000" y="3500000"/>
+            <a:ext cx="1930000" cy="230000"/>
+          </a:xfrm>
+          <a:prstGeom prst="rect">
+            <a:avLst/>
+          </a:prstGeom>
+          <a:solidFill>
+            <a:srgbClr val="17365D"/>
+          </a:solidFill>
+          <a:ln>
+            <a:noFill/>
+          </a:ln>
+        </p:spPr>
+        <p:txBody>
           <a:bodyPr wrap="square" lIns="91440" tIns="45720" rIns="91440" bIns="45720" anchor="ctr" anchorCtr="1">
             <a:normAutofit/>
           </a:bodyPr>
@@ -23577,27 +25679,27 @@
             <a:r>
               <a:rPr lang="ru-RU" sz="950" b="1" dirty="0">
                 <a:solidFill>
-                  <a:srgbClr val="17365D"/>
-                </a:solidFill>
-                <a:latin typeface="PT Sans"/>
-                <a:ea typeface="PT Sans"/>
-                <a:cs typeface="PT Sans"/>
-              </a:rPr>
-              <a:t>≥ 50 %</a:t>
-            </a:r>
-          </a:p>
-        </p:txBody>
-      </p:sp>
-      <p:sp>
-        <p:nvSpPr>
-          <p:cNvPr id="820" name="KPI32"/>
+                  <a:srgbClr val="FFFFFF"/>
+                </a:solidFill>
+                <a:latin typeface="PT Sans"/>
+                <a:ea typeface="PT Sans"/>
+                <a:cs typeface="PT Sans"/>
+              </a:rPr>
+              <a:t>ТЕХНИЧЕСКИЙ</a:t>
+            </a:r>
+          </a:p>
+        </p:txBody>
+      </p:sp>
+      <p:sp>
+        <p:nvSpPr>
+          <p:cNvPr id="853" name="RB2"/>
           <p:cNvSpPr/>
           <p:nvPr/>
         </p:nvSpPr>
         <p:spPr>
           <a:xfrm>
-            <a:off x="4550000" y="2640000"/>
-            <a:ext cx="900000" cy="360000"/>
+            <a:off x="5030000" y="3730000"/>
+            <a:ext cx="1930000" cy="620000"/>
           </a:xfrm>
           <a:prstGeom prst="rect">
             <a:avLst/>
@@ -23612,6 +25714,106 @@
           </a:ln>
         </p:spPr>
         <p:txBody>
+          <a:bodyPr wrap="square" lIns="91440" tIns="45720" rIns="91440" bIns="45720" anchor="t" anchorCtr="1">
+            <a:normAutofit/>
+          </a:bodyPr>
+          <a:lstStyle/>
+          <a:p>
+            <a:pPr marL="0" lvl="0" indent="0" algn="l" rtl="0">
+              <a:lnSpc>
+                <a:spcPct val="110000"/>
+              </a:lnSpc>
+              <a:spcBef>
+                <a:spcPts val="0"/>
+              </a:spcBef>
+              <a:spcAft>
+                <a:spcPts val="0"/>
+              </a:spcAft>
+              <a:buNone/>
+            </a:pPr>
+            <a:r>
+              <a:rPr lang="ru-RU" sz="800" b="1" dirty="0">
+                <a:solidFill>
+                  <a:srgbClr val="17365D"/>
+                </a:solidFill>
+                <a:latin typeface="PT Sans"/>
+                <a:ea typeface="PT Sans"/>
+                <a:cs typeface="PT Sans"/>
+              </a:rPr>
+              <a:t>Угроза: </a:t>
+            </a:r>
+            <a:r>
+              <a:rPr lang="ru-RU" sz="800" dirty="0">
+                <a:solidFill>
+                  <a:srgbClr val="000000"/>
+                </a:solidFill>
+                <a:latin typeface="PT Sans"/>
+                <a:ea typeface="PT Sans"/>
+                <a:cs typeface="PT Sans"/>
+              </a:rPr>
+              <a:t>ошибки распознавания, FAR/FRR</a:t>
+            </a:r>
+          </a:p>
+          <a:p>
+            <a:pPr marL="0" lvl="0" indent="0" algn="l" rtl="0">
+              <a:lnSpc>
+                <a:spcPct val="110000"/>
+              </a:lnSpc>
+              <a:spcBef>
+                <a:spcPts val="80"/>
+              </a:spcBef>
+              <a:spcAft>
+                <a:spcPts val="0"/>
+              </a:spcAft>
+              <a:buNone/>
+            </a:pPr>
+            <a:r>
+              <a:rPr lang="ru-RU" sz="800" b="1" dirty="0">
+                <a:solidFill>
+                  <a:srgbClr val="17365D"/>
+                </a:solidFill>
+                <a:latin typeface="PT Sans"/>
+                <a:ea typeface="PT Sans"/>
+                <a:cs typeface="PT Sans"/>
+              </a:rPr>
+              <a:t>Меры: </a:t>
+            </a:r>
+            <a:r>
+              <a:rPr lang="ru-RU" sz="800" dirty="0">
+                <a:solidFill>
+                  <a:srgbClr val="000000"/>
+                </a:solidFill>
+                <a:latin typeface="PT Sans"/>
+                <a:ea typeface="PT Sans"/>
+                <a:cs typeface="PT Sans"/>
+              </a:rPr>
+              <a:t>A/B-тесты, контроль качества модели</a:t>
+            </a:r>
+          </a:p>
+        </p:txBody>
+      </p:sp>
+      <p:sp>
+        <p:nvSpPr>
+          <p:cNvPr id="854" name="RH3"/>
+          <p:cNvSpPr/>
+          <p:nvPr/>
+        </p:nvSpPr>
+        <p:spPr>
+          <a:xfrm>
+            <a:off x="7020000" y="3500000"/>
+            <a:ext cx="1930000" cy="230000"/>
+          </a:xfrm>
+          <a:prstGeom prst="rect">
+            <a:avLst/>
+          </a:prstGeom>
+          <a:solidFill>
+            <a:srgbClr val="17365D"/>
+          </a:solidFill>
+          <a:ln>
+            <a:noFill/>
+          </a:ln>
+        </p:spPr>
+        <p:txBody>
           <a:bodyPr wrap="square" lIns="91440" tIns="45720" rIns="91440" bIns="45720" anchor="ctr" anchorCtr="1">
             <a:normAutofit/>
           </a:bodyPr>
@@ -23630,194 +25832,29 @@
               <a:buNone/>
             </a:pPr>
             <a:r>
-              <a:rPr lang="ru-RU" sz="950" dirty="0">
-                <a:solidFill>
-                  <a:srgbClr val="000000"/>
-                </a:solidFill>
-                <a:latin typeface="PT Sans"/>
-                <a:ea typeface="PT Sans"/>
-                <a:cs typeface="PT Sans"/>
-              </a:rPr>
-              <a:t/>
-            </a:r>
-          </a:p>
-        </p:txBody>
-      </p:sp>
-      <p:sp>
-        <p:nvSpPr>
-          <p:cNvPr id="821" name="KPI40"/>
+              <a:rPr lang="ru-RU" sz="950" b="1" dirty="0">
+                <a:solidFill>
+                  <a:srgbClr val="FFFFFF"/>
+                </a:solidFill>
+                <a:latin typeface="PT Sans"/>
+                <a:ea typeface="PT Sans"/>
+                <a:cs typeface="PT Sans"/>
+              </a:rPr>
+              <a:t>РЫНОЧНЫЙ</a:t>
+            </a:r>
+          </a:p>
+        </p:txBody>
+      </p:sp>
+      <p:sp>
+        <p:nvSpPr>
+          <p:cNvPr id="855" name="RB3"/>
           <p:cNvSpPr/>
           <p:nvPr/>
         </p:nvSpPr>
         <p:spPr>
           <a:xfrm>
-            <a:off x="1050000" y="3000000"/>
-            <a:ext cx="2400000" cy="360000"/>
-          </a:xfrm>
-          <a:prstGeom prst="rect">
-            <a:avLst/>
-          </a:prstGeom>
-          <a:solidFill>
-            <a:srgbClr val="F2F2F2"/>
-          </a:solidFill>
-          <a:ln w="3175">
-            <a:solidFill>
-              <a:srgbClr val="888888"/>
-            </a:solidFill>
-          </a:ln>
-        </p:spPr>
-        <p:txBody>
-          <a:bodyPr wrap="square" lIns="91440" tIns="45720" rIns="91440" bIns="45720" anchor="ctr" anchorCtr="1">
-            <a:normAutofit/>
-          </a:bodyPr>
-          <a:lstStyle/>
-          <a:p>
-            <a:pPr marL="0" lvl="0" indent="0" algn="l" rtl="0">
-              <a:lnSpc>
-                <a:spcPct val="110000"/>
-              </a:lnSpc>
-              <a:spcBef>
-                <a:spcPts val="0"/>
-              </a:spcBef>
-              <a:spcAft>
-                <a:spcPts val="0"/>
-              </a:spcAft>
-              <a:buNone/>
-            </a:pPr>
-            <a:r>
-              <a:rPr lang="ru-RU" sz="950" dirty="0">
-                <a:solidFill>
-                  <a:srgbClr val="000000"/>
-                </a:solidFill>
-                <a:latin typeface="PT Sans"/>
-                <a:ea typeface="PT Sans"/>
-                <a:cs typeface="PT Sans"/>
-              </a:rPr>
-              <a:t>Доля рынка КБС в ПФО</a:t>
-            </a:r>
-          </a:p>
-        </p:txBody>
-      </p:sp>
-      <p:sp>
-        <p:nvSpPr>
-          <p:cNvPr id="822" name="KPI41"/>
-          <p:cNvSpPr/>
-          <p:nvPr/>
-        </p:nvSpPr>
-        <p:spPr>
-          <a:xfrm>
-            <a:off x="3450000" y="3000000"/>
-            <a:ext cx="1100000" cy="360000"/>
-          </a:xfrm>
-          <a:prstGeom prst="rect">
-            <a:avLst/>
-          </a:prstGeom>
-          <a:solidFill>
-            <a:srgbClr val="F2F2F2"/>
-          </a:solidFill>
-          <a:ln w="3175">
-            <a:solidFill>
-              <a:srgbClr val="888888"/>
-            </a:solidFill>
-          </a:ln>
-        </p:spPr>
-        <p:txBody>
-          <a:bodyPr wrap="square" lIns="91440" tIns="45720" rIns="91440" bIns="45720" anchor="ctr" anchorCtr="1">
-            <a:normAutofit/>
-          </a:bodyPr>
-          <a:lstStyle/>
-          <a:p>
-            <a:pPr marL="0" lvl="0" indent="0" algn="ctr" rtl="0">
-              <a:lnSpc>
-                <a:spcPct val="110000"/>
-              </a:lnSpc>
-              <a:spcBef>
-                <a:spcPts val="0"/>
-              </a:spcBef>
-              <a:spcAft>
-                <a:spcPts val="0"/>
-              </a:spcAft>
-              <a:buNone/>
-            </a:pPr>
-            <a:r>
-              <a:rPr lang="ru-RU" sz="950" b="1" dirty="0">
-                <a:solidFill>
-                  <a:srgbClr val="17365D"/>
-                </a:solidFill>
-                <a:latin typeface="PT Sans"/>
-                <a:ea typeface="PT Sans"/>
-                <a:cs typeface="PT Sans"/>
-              </a:rPr>
-              <a:t>≥ 20 %</a:t>
-            </a:r>
-          </a:p>
-        </p:txBody>
-      </p:sp>
-      <p:sp>
-        <p:nvSpPr>
-          <p:cNvPr id="823" name="KPI42"/>
-          <p:cNvSpPr/>
-          <p:nvPr/>
-        </p:nvSpPr>
-        <p:spPr>
-          <a:xfrm>
-            <a:off x="4550000" y="3000000"/>
-            <a:ext cx="900000" cy="360000"/>
-          </a:xfrm>
-          <a:prstGeom prst="rect">
-            <a:avLst/>
-          </a:prstGeom>
-          <a:solidFill>
-            <a:srgbClr val="F2F2F2"/>
-          </a:solidFill>
-          <a:ln w="3175">
-            <a:solidFill>
-              <a:srgbClr val="888888"/>
-            </a:solidFill>
-          </a:ln>
-        </p:spPr>
-        <p:txBody>
-          <a:bodyPr wrap="square" lIns="91440" tIns="45720" rIns="91440" bIns="45720" anchor="ctr" anchorCtr="1">
-            <a:normAutofit/>
-          </a:bodyPr>
-          <a:lstStyle/>
-          <a:p>
-            <a:pPr marL="0" lvl="0" indent="0" algn="ctr" rtl="0">
-              <a:lnSpc>
-                <a:spcPct val="110000"/>
-              </a:lnSpc>
-              <a:spcBef>
-                <a:spcPts val="0"/>
-              </a:spcBef>
-              <a:spcAft>
-                <a:spcPts val="0"/>
-              </a:spcAft>
-              <a:buNone/>
-            </a:pPr>
-            <a:r>
-              <a:rPr lang="ru-RU" sz="950" dirty="0">
-                <a:solidFill>
-                  <a:srgbClr val="000000"/>
-                </a:solidFill>
-                <a:latin typeface="PT Sans"/>
-                <a:ea typeface="PT Sans"/>
-                <a:cs typeface="PT Sans"/>
-              </a:rPr>
-              <a:t/>
-            </a:r>
-          </a:p>
-        </p:txBody>
-      </p:sp>
-      <p:sp>
-        <p:nvSpPr>
-          <p:cNvPr id="824" name="KPI50"/>
-          <p:cNvSpPr/>
-          <p:nvPr/>
-        </p:nvSpPr>
-        <p:spPr>
-          <a:xfrm>
-            <a:off x="1050000" y="3360000"/>
-            <a:ext cx="2400000" cy="360000"/>
+            <a:off x="7020000" y="3730000"/>
+            <a:ext cx="1930000" cy="620000"/>
           </a:xfrm>
           <a:prstGeom prst="rect">
             <a:avLst/>
@@ -23832,7 +25869,7 @@
           </a:ln>
         </p:spPr>
         <p:txBody>
-          <a:bodyPr wrap="square" lIns="91440" tIns="45720" rIns="91440" bIns="45720" anchor="ctr" anchorCtr="1">
+          <a:bodyPr wrap="square" lIns="91440" tIns="45720" rIns="91440" bIns="45720" anchor="t" anchorCtr="1">
             <a:normAutofit/>
           </a:bodyPr>
           <a:lstStyle/>
@@ -23850,7 +25887,18 @@
               <a:buNone/>
             </a:pPr>
             <a:r>
-              <a:rPr lang="ru-RU" sz="950" dirty="0">
+              <a:rPr lang="ru-RU" sz="800" b="1" dirty="0">
+                <a:solidFill>
+                  <a:srgbClr val="17365D"/>
+                </a:solidFill>
+                <a:latin typeface="PT Sans"/>
+                <a:ea typeface="PT Sans"/>
+                <a:cs typeface="PT Sans"/>
+              </a:rPr>
+              <a:t>Угроза: </a:t>
+            </a:r>
+            <a:r>
+              <a:rPr lang="ru-RU" sz="800" dirty="0">
                 <a:solidFill>
                   <a:srgbClr val="000000"/>
                 </a:solidFill>
@@ -23858,182 +25906,57 @@
                 <a:ea typeface="PT Sans"/>
                 <a:cs typeface="PT Sans"/>
               </a:rPr>
-              <a:t>ROI стратегии продвижения</a:t>
-            </a:r>
-          </a:p>
-        </p:txBody>
-      </p:sp>
-      <p:sp>
-        <p:nvSpPr>
-          <p:cNvPr id="825" name="KPI51"/>
+              <a:t>медленная диффузия, барьеры доверия</a:t>
+            </a:r>
+          </a:p>
+          <a:p>
+            <a:pPr marL="0" lvl="0" indent="0" algn="l" rtl="0">
+              <a:lnSpc>
+                <a:spcPct val="110000"/>
+              </a:lnSpc>
+              <a:spcBef>
+                <a:spcPts val="80"/>
+              </a:spcBef>
+              <a:spcAft>
+                <a:spcPts val="0"/>
+              </a:spcAft>
+              <a:buNone/>
+            </a:pPr>
+            <a:r>
+              <a:rPr lang="ru-RU" sz="800" b="1" dirty="0">
+                <a:solidFill>
+                  <a:srgbClr val="17365D"/>
+                </a:solidFill>
+                <a:latin typeface="PT Sans"/>
+                <a:ea typeface="PT Sans"/>
+                <a:cs typeface="PT Sans"/>
+              </a:rPr>
+              <a:t>Меры: </a:t>
+            </a:r>
+            <a:r>
+              <a:rPr lang="ru-RU" sz="800" dirty="0">
+                <a:solidFill>
+                  <a:srgbClr val="000000"/>
+                </a:solidFill>
+                <a:latin typeface="PT Sans"/>
+                <a:ea typeface="PT Sans"/>
+                <a:cs typeface="PT Sans"/>
+              </a:rPr>
+              <a:t>образовательные форматы, кейсы</a:t>
+            </a:r>
+          </a:p>
+        </p:txBody>
+      </p:sp>
+      <p:sp>
+        <p:nvSpPr>
+          <p:cNvPr id="856" name="FinalNote"/>
           <p:cNvSpPr/>
           <p:nvPr/>
         </p:nvSpPr>
         <p:spPr>
           <a:xfrm>
-            <a:off x="3450000" y="3360000"/>
-            <a:ext cx="1100000" cy="360000"/>
-          </a:xfrm>
-          <a:prstGeom prst="rect">
-            <a:avLst/>
-          </a:prstGeom>
-          <a:solidFill>
-            <a:srgbClr val="FFFFFF"/>
-          </a:solidFill>
-          <a:ln w="3175">
-            <a:solidFill>
-              <a:srgbClr val="888888"/>
-            </a:solidFill>
-          </a:ln>
-        </p:spPr>
-        <p:txBody>
-          <a:bodyPr wrap="square" lIns="91440" tIns="45720" rIns="91440" bIns="45720" anchor="ctr" anchorCtr="1">
-            <a:normAutofit/>
-          </a:bodyPr>
-          <a:lstStyle/>
-          <a:p>
-            <a:pPr marL="0" lvl="0" indent="0" algn="ctr" rtl="0">
-              <a:lnSpc>
-                <a:spcPct val="110000"/>
-              </a:lnSpc>
-              <a:spcBef>
-                <a:spcPts val="0"/>
-              </a:spcBef>
-              <a:spcAft>
-                <a:spcPts val="0"/>
-              </a:spcAft>
-              <a:buNone/>
-            </a:pPr>
-            <a:r>
-              <a:rPr lang="ru-RU" sz="950" b="1" dirty="0">
-                <a:solidFill>
-                  <a:srgbClr val="17365D"/>
-                </a:solidFill>
-                <a:latin typeface="PT Sans"/>
-                <a:ea typeface="PT Sans"/>
-                <a:cs typeface="PT Sans"/>
-              </a:rPr>
-              <a:t>≥ 180 %</a:t>
-            </a:r>
-          </a:p>
-        </p:txBody>
-      </p:sp>
-      <p:sp>
-        <p:nvSpPr>
-          <p:cNvPr id="826" name="KPI52"/>
-          <p:cNvSpPr/>
-          <p:nvPr/>
-        </p:nvSpPr>
-        <p:spPr>
-          <a:xfrm>
-            <a:off x="4550000" y="3360000"/>
-            <a:ext cx="900000" cy="360000"/>
-          </a:xfrm>
-          <a:prstGeom prst="rect">
-            <a:avLst/>
-          </a:prstGeom>
-          <a:solidFill>
-            <a:srgbClr val="FFFFFF"/>
-          </a:solidFill>
-          <a:ln w="3175">
-            <a:solidFill>
-              <a:srgbClr val="888888"/>
-            </a:solidFill>
-          </a:ln>
-        </p:spPr>
-        <p:txBody>
-          <a:bodyPr wrap="square" lIns="91440" tIns="45720" rIns="91440" bIns="45720" anchor="ctr" anchorCtr="1">
-            <a:normAutofit/>
-          </a:bodyPr>
-          <a:lstStyle/>
-          <a:p>
-            <a:pPr marL="0" lvl="0" indent="0" algn="ctr" rtl="0">
-              <a:lnSpc>
-                <a:spcPct val="110000"/>
-              </a:lnSpc>
-              <a:spcBef>
-                <a:spcPts val="0"/>
-              </a:spcBef>
-              <a:spcAft>
-                <a:spcPts val="0"/>
-              </a:spcAft>
-              <a:buNone/>
-            </a:pPr>
-            <a:r>
-              <a:rPr lang="ru-RU" sz="950" dirty="0">
-                <a:solidFill>
-                  <a:srgbClr val="000000"/>
-                </a:solidFill>
-                <a:latin typeface="PT Sans"/>
-                <a:ea typeface="PT Sans"/>
-                <a:cs typeface="PT Sans"/>
-              </a:rPr>
-              <a:t>за 24 мес.</a:t>
-            </a:r>
-          </a:p>
-        </p:txBody>
-      </p:sp>
-      <p:sp>
-        <p:nvSpPr>
-          <p:cNvPr id="827" name="RiskTitle"/>
-          <p:cNvSpPr txBox="1"/>
-          <p:nvPr/>
-        </p:nvSpPr>
-        <p:spPr>
-          <a:xfrm>
-            <a:off x="5650000" y="800000"/>
-            <a:ext cx="3300000" cy="350000"/>
-          </a:xfrm>
-          <a:prstGeom prst="rect">
-            <a:avLst/>
-          </a:prstGeom>
-          <a:noFill/>
-          <a:ln>
-            <a:noFill/>
-          </a:ln>
-        </p:spPr>
-        <p:txBody>
-          <a:bodyPr wrap="square" lIns="91440" tIns="45720" rIns="91440" bIns="45720" anchor="ctr" anchorCtr="0">
-            <a:noAutofit/>
-          </a:bodyPr>
-          <a:lstStyle/>
-          <a:p>
-            <a:pPr marL="0" lvl="0" indent="0" algn="l" rtl="0">
-              <a:lnSpc>
-                <a:spcPct val="110000"/>
-              </a:lnSpc>
-              <a:spcBef>
-                <a:spcPts val="0"/>
-              </a:spcBef>
-              <a:spcAft>
-                <a:spcPts val="0"/>
-              </a:spcAft>
-              <a:buNone/>
-            </a:pPr>
-            <a:r>
-              <a:rPr lang="ru-RU" sz="1200" b="1" dirty="0">
-                <a:solidFill>
-                  <a:srgbClr val="17365D"/>
-                </a:solidFill>
-                <a:latin typeface="PT Sans"/>
-                <a:ea typeface="PT Sans"/>
-                <a:cs typeface="PT Sans"/>
-              </a:rPr>
-              <a:t>МАТРИЦА КЛЮЧЕВЫХ РИСКОВ</a:t>
-            </a:r>
-          </a:p>
-        </p:txBody>
-      </p:sp>
-      <p:sp>
-        <p:nvSpPr>
-          <p:cNvPr id="828" name="Risk0H"/>
-          <p:cNvSpPr/>
-          <p:nvPr/>
-        </p:nvSpPr>
-        <p:spPr>
-          <a:xfrm>
-            <a:off x="5650000" y="1200000"/>
-            <a:ext cx="1620000" cy="280000"/>
+            <a:off x="1050000" y="4500000"/>
+            <a:ext cx="7900000" cy="400000"/>
           </a:xfrm>
           <a:prstGeom prst="rect">
             <a:avLst/>
@@ -24064,7 +25987,7 @@
               <a:buNone/>
             </a:pPr>
             <a:r>
-              <a:rPr lang="ru-RU" sz="1000" b="1" dirty="0">
+              <a:rPr lang="ru-RU" sz="1100" b="1" dirty="0">
                 <a:solidFill>
                   <a:srgbClr val="FFFFFF"/>
                 </a:solidFill>
@@ -24072,182 +25995,10 @@
                 <a:ea typeface="PT Sans"/>
                 <a:cs typeface="PT Sans"/>
               </a:rPr>
-              <a:t>Регуляторный</a:t>
-            </a:r>
-          </a:p>
-        </p:txBody>
-      </p:sp>
-      <p:sp>
-        <p:nvSpPr>
-          <p:cNvPr id="829" name="Risk0B"/>
-          <p:cNvSpPr/>
-          <p:nvPr/>
-        </p:nvSpPr>
-        <p:spPr>
-          <a:xfrm>
-            <a:off x="5650000" y="1480000"/>
-            <a:ext cx="1620000" cy="1040000"/>
-          </a:xfrm>
-          <a:prstGeom prst="rect">
-            <a:avLst/>
-          </a:prstGeom>
-          <a:solidFill>
-            <a:srgbClr val="FFFFFF"/>
-          </a:solidFill>
-          <a:ln w="3175">
-            <a:solidFill>
-              <a:srgbClr val="888888"/>
-            </a:solidFill>
-          </a:ln>
-        </p:spPr>
-        <p:txBody>
-          <a:bodyPr wrap="square" lIns="91440" tIns="45720" rIns="91440" bIns="45720" anchor="t" anchorCtr="1">
-            <a:normAutofit/>
-          </a:bodyPr>
-          <a:lstStyle/>
-          <a:p>
-            <a:pPr marL="0" lvl="0" indent="0" algn="l" rtl="0">
-              <a:lnSpc>
-                <a:spcPct val="110000"/>
-              </a:lnSpc>
-              <a:spcBef>
-                <a:spcPts val="0"/>
-              </a:spcBef>
-              <a:spcAft>
-                <a:spcPts val="0"/>
-              </a:spcAft>
-              <a:buNone/>
-            </a:pPr>
-            <a:r>
-              <a:rPr lang="ru-RU" sz="850" b="1" dirty="0">
-                <a:solidFill>
-                  <a:srgbClr val="17365D"/>
-                </a:solidFill>
-                <a:latin typeface="PT Sans"/>
-                <a:ea typeface="PT Sans"/>
-                <a:cs typeface="PT Sans"/>
-              </a:rPr>
-              <a:t>Угроза:</a:t>
-            </a:r>
-          </a:p>
-          <a:p>
-            <a:pPr marL="0" lvl="0" indent="0" algn="l" rtl="0">
-              <a:lnSpc>
-                <a:spcPct val="110000"/>
-              </a:lnSpc>
-              <a:spcBef>
-                <a:spcPts val="40"/>
-              </a:spcBef>
-              <a:spcAft>
-                <a:spcPts val="0"/>
-              </a:spcAft>
-              <a:buNone/>
-            </a:pPr>
-            <a:r>
-              <a:rPr lang="ru-RU" sz="850" dirty="0">
-                <a:solidFill>
-                  <a:srgbClr val="000000"/>
-                </a:solidFill>
-                <a:latin typeface="PT Sans"/>
-                <a:ea typeface="PT Sans"/>
-                <a:cs typeface="PT Sans"/>
-              </a:rPr>
-              <a:t>ужесточение 572-ФЗ, новые штрафы (420-ФЗ, 421-ФЗ)</a:t>
-            </a:r>
-          </a:p>
-          <a:p>
-            <a:pPr marL="0" lvl="0" indent="0" algn="l" rtl="0">
-              <a:lnSpc>
-                <a:spcPct val="110000"/>
-              </a:lnSpc>
-              <a:spcBef>
-                <a:spcPts val="120"/>
-              </a:spcBef>
-              <a:spcAft>
-                <a:spcPts val="0"/>
-              </a:spcAft>
-              <a:buNone/>
-            </a:pPr>
-            <a:r>
-              <a:rPr lang="ru-RU" sz="850" b="1" dirty="0">
-                <a:solidFill>
-                  <a:srgbClr val="17365D"/>
-                </a:solidFill>
-                <a:latin typeface="PT Sans"/>
-                <a:ea typeface="PT Sans"/>
-                <a:cs typeface="PT Sans"/>
-              </a:rPr>
-              <a:t>Меры:</a:t>
-            </a:r>
-          </a:p>
-          <a:p>
-            <a:pPr marL="0" lvl="0" indent="0" algn="l" rtl="0">
-              <a:lnSpc>
-                <a:spcPct val="110000"/>
-              </a:lnSpc>
-              <a:spcBef>
-                <a:spcPts val="40"/>
-              </a:spcBef>
-              <a:spcAft>
-                <a:spcPts val="0"/>
-              </a:spcAft>
-              <a:buNone/>
-            </a:pPr>
-            <a:r>
-              <a:rPr lang="ru-RU" sz="850" dirty="0">
-                <a:solidFill>
-                  <a:srgbClr val="000000"/>
-                </a:solidFill>
-                <a:latin typeface="PT Sans"/>
-                <a:ea typeface="PT Sans"/>
-                <a:cs typeface="PT Sans"/>
-              </a:rPr>
-              <a:t>юр. сопровождение, аудит соответствия</a:t>
-            </a:r>
-          </a:p>
-        </p:txBody>
-      </p:sp>
-      <p:sp>
-        <p:nvSpPr>
-          <p:cNvPr id="830" name="Risk1H"/>
-          <p:cNvSpPr/>
-          <p:nvPr/>
-        </p:nvSpPr>
-        <p:spPr>
-          <a:xfrm>
-            <a:off x="7330000" y="1200000"/>
-            <a:ext cx="1620000" cy="280000"/>
-          </a:xfrm>
-          <a:prstGeom prst="rect">
-            <a:avLst/>
-          </a:prstGeom>
-          <a:solidFill>
-            <a:srgbClr val="17365D"/>
-          </a:solidFill>
-          <a:ln>
-            <a:noFill/>
-          </a:ln>
-        </p:spPr>
-        <p:txBody>
-          <a:bodyPr wrap="square" lIns="91440" tIns="45720" rIns="91440" bIns="45720" anchor="ctr" anchorCtr="1">
-            <a:normAutofit/>
-          </a:bodyPr>
-          <a:lstStyle/>
-          <a:p>
-            <a:pPr marL="0" lvl="0" indent="0" algn="ctr" rtl="0">
-              <a:lnSpc>
-                <a:spcPct val="110000"/>
-              </a:lnSpc>
-              <a:spcBef>
-                <a:spcPts val="0"/>
-              </a:spcBef>
-              <a:spcAft>
-                <a:spcPts val="0"/>
-              </a:spcAft>
-              <a:buNone/>
-            </a:pPr>
-            <a:r>
-              <a:rPr lang="ru-RU" sz="1000" b="1" dirty="0">
+              <a:t>→ Стратегия экономически эффективна: </a:t>
+            </a:r>
+            <a:r>
+              <a:rPr lang="ru-RU" sz="1100" dirty="0">
                 <a:solidFill>
                   <a:srgbClr val="FFFFFF"/>
                 </a:solidFill>
@@ -24255,556 +26006,7 @@
                 <a:ea typeface="PT Sans"/>
                 <a:cs typeface="PT Sans"/>
               </a:rPr>
-              <a:t>Репутационный</a:t>
-            </a:r>
-          </a:p>
-        </p:txBody>
-      </p:sp>
-      <p:sp>
-        <p:nvSpPr>
-          <p:cNvPr id="831" name="Risk1B"/>
-          <p:cNvSpPr/>
-          <p:nvPr/>
-        </p:nvSpPr>
-        <p:spPr>
-          <a:xfrm>
-            <a:off x="7330000" y="1480000"/>
-            <a:ext cx="1620000" cy="1040000"/>
-          </a:xfrm>
-          <a:prstGeom prst="rect">
-            <a:avLst/>
-          </a:prstGeom>
-          <a:solidFill>
-            <a:srgbClr val="FFFFFF"/>
-          </a:solidFill>
-          <a:ln w="3175">
-            <a:solidFill>
-              <a:srgbClr val="888888"/>
-            </a:solidFill>
-          </a:ln>
-        </p:spPr>
-        <p:txBody>
-          <a:bodyPr wrap="square" lIns="91440" tIns="45720" rIns="91440" bIns="45720" anchor="t" anchorCtr="1">
-            <a:normAutofit/>
-          </a:bodyPr>
-          <a:lstStyle/>
-          <a:p>
-            <a:pPr marL="0" lvl="0" indent="0" algn="l" rtl="0">
-              <a:lnSpc>
-                <a:spcPct val="110000"/>
-              </a:lnSpc>
-              <a:spcBef>
-                <a:spcPts val="0"/>
-              </a:spcBef>
-              <a:spcAft>
-                <a:spcPts val="0"/>
-              </a:spcAft>
-              <a:buNone/>
-            </a:pPr>
-            <a:r>
-              <a:rPr lang="ru-RU" sz="850" b="1" dirty="0">
-                <a:solidFill>
-                  <a:srgbClr val="17365D"/>
-                </a:solidFill>
-                <a:latin typeface="PT Sans"/>
-                <a:ea typeface="PT Sans"/>
-                <a:cs typeface="PT Sans"/>
-              </a:rPr>
-              <a:t>Угроза:</a:t>
-            </a:r>
-          </a:p>
-          <a:p>
-            <a:pPr marL="0" lvl="0" indent="0" algn="l" rtl="0">
-              <a:lnSpc>
-                <a:spcPct val="110000"/>
-              </a:lnSpc>
-              <a:spcBef>
-                <a:spcPts val="40"/>
-              </a:spcBef>
-              <a:spcAft>
-                <a:spcPts val="0"/>
-              </a:spcAft>
-              <a:buNone/>
-            </a:pPr>
-            <a:r>
-              <a:rPr lang="ru-RU" sz="850" dirty="0">
-                <a:solidFill>
-                  <a:srgbClr val="000000"/>
-                </a:solidFill>
-                <a:latin typeface="PT Sans"/>
-                <a:ea typeface="PT Sans"/>
-                <a:cs typeface="PT Sans"/>
-              </a:rPr>
-              <a:t>утечка / инцидент, волна публикаций</a:t>
-            </a:r>
-          </a:p>
-          <a:p>
-            <a:pPr marL="0" lvl="0" indent="0" algn="l" rtl="0">
-              <a:lnSpc>
-                <a:spcPct val="110000"/>
-              </a:lnSpc>
-              <a:spcBef>
-                <a:spcPts val="120"/>
-              </a:spcBef>
-              <a:spcAft>
-                <a:spcPts val="0"/>
-              </a:spcAft>
-              <a:buNone/>
-            </a:pPr>
-            <a:r>
-              <a:rPr lang="ru-RU" sz="850" b="1" dirty="0">
-                <a:solidFill>
-                  <a:srgbClr val="17365D"/>
-                </a:solidFill>
-                <a:latin typeface="PT Sans"/>
-                <a:ea typeface="PT Sans"/>
-                <a:cs typeface="PT Sans"/>
-              </a:rPr>
-              <a:t>Меры:</a:t>
-            </a:r>
-          </a:p>
-          <a:p>
-            <a:pPr marL="0" lvl="0" indent="0" algn="l" rtl="0">
-              <a:lnSpc>
-                <a:spcPct val="110000"/>
-              </a:lnSpc>
-              <a:spcBef>
-                <a:spcPts val="40"/>
-              </a:spcBef>
-              <a:spcAft>
-                <a:spcPts val="0"/>
-              </a:spcAft>
-              <a:buNone/>
-            </a:pPr>
-            <a:r>
-              <a:rPr lang="ru-RU" sz="850" dirty="0">
-                <a:solidFill>
-                  <a:srgbClr val="000000"/>
-                </a:solidFill>
-                <a:latin typeface="PT Sans"/>
-                <a:ea typeface="PT Sans"/>
-                <a:cs typeface="PT Sans"/>
-              </a:rPr>
-              <a:t>комплаенс, мониторинг, кризис-план</a:t>
-            </a:r>
-          </a:p>
-        </p:txBody>
-      </p:sp>
-      <p:sp>
-        <p:nvSpPr>
-          <p:cNvPr id="832" name="Risk2H"/>
-          <p:cNvSpPr/>
-          <p:nvPr/>
-        </p:nvSpPr>
-        <p:spPr>
-          <a:xfrm>
-            <a:off x="5650000" y="2580000"/>
-            <a:ext cx="1620000" cy="280000"/>
-          </a:xfrm>
-          <a:prstGeom prst="rect">
-            <a:avLst/>
-          </a:prstGeom>
-          <a:solidFill>
-            <a:srgbClr val="888888"/>
-          </a:solidFill>
-          <a:ln>
-            <a:noFill/>
-          </a:ln>
-        </p:spPr>
-        <p:txBody>
-          <a:bodyPr wrap="square" lIns="91440" tIns="45720" rIns="91440" bIns="45720" anchor="ctr" anchorCtr="1">
-            <a:normAutofit/>
-          </a:bodyPr>
-          <a:lstStyle/>
-          <a:p>
-            <a:pPr marL="0" lvl="0" indent="0" algn="ctr" rtl="0">
-              <a:lnSpc>
-                <a:spcPct val="110000"/>
-              </a:lnSpc>
-              <a:spcBef>
-                <a:spcPts val="0"/>
-              </a:spcBef>
-              <a:spcAft>
-                <a:spcPts val="0"/>
-              </a:spcAft>
-              <a:buNone/>
-            </a:pPr>
-            <a:r>
-              <a:rPr lang="ru-RU" sz="1000" b="1" dirty="0">
-                <a:solidFill>
-                  <a:srgbClr val="FFFFFF"/>
-                </a:solidFill>
-                <a:latin typeface="PT Sans"/>
-                <a:ea typeface="PT Sans"/>
-                <a:cs typeface="PT Sans"/>
-              </a:rPr>
-              <a:t>Технический</a:t>
-            </a:r>
-          </a:p>
-        </p:txBody>
-      </p:sp>
-      <p:sp>
-        <p:nvSpPr>
-          <p:cNvPr id="833" name="Risk2B"/>
-          <p:cNvSpPr/>
-          <p:nvPr/>
-        </p:nvSpPr>
-        <p:spPr>
-          <a:xfrm>
-            <a:off x="5650000" y="2860000"/>
-            <a:ext cx="1620000" cy="1040000"/>
-          </a:xfrm>
-          <a:prstGeom prst="rect">
-            <a:avLst/>
-          </a:prstGeom>
-          <a:solidFill>
-            <a:srgbClr val="FFFFFF"/>
-          </a:solidFill>
-          <a:ln w="3175">
-            <a:solidFill>
-              <a:srgbClr val="888888"/>
-            </a:solidFill>
-          </a:ln>
-        </p:spPr>
-        <p:txBody>
-          <a:bodyPr wrap="square" lIns="91440" tIns="45720" rIns="91440" bIns="45720" anchor="t" anchorCtr="1">
-            <a:normAutofit/>
-          </a:bodyPr>
-          <a:lstStyle/>
-          <a:p>
-            <a:pPr marL="0" lvl="0" indent="0" algn="l" rtl="0">
-              <a:lnSpc>
-                <a:spcPct val="110000"/>
-              </a:lnSpc>
-              <a:spcBef>
-                <a:spcPts val="0"/>
-              </a:spcBef>
-              <a:spcAft>
-                <a:spcPts val="0"/>
-              </a:spcAft>
-              <a:buNone/>
-            </a:pPr>
-            <a:r>
-              <a:rPr lang="ru-RU" sz="850" b="1" dirty="0">
-                <a:solidFill>
-                  <a:srgbClr val="17365D"/>
-                </a:solidFill>
-                <a:latin typeface="PT Sans"/>
-                <a:ea typeface="PT Sans"/>
-                <a:cs typeface="PT Sans"/>
-              </a:rPr>
-              <a:t>Угроза:</a:t>
-            </a:r>
-          </a:p>
-          <a:p>
-            <a:pPr marL="0" lvl="0" indent="0" algn="l" rtl="0">
-              <a:lnSpc>
-                <a:spcPct val="110000"/>
-              </a:lnSpc>
-              <a:spcBef>
-                <a:spcPts val="40"/>
-              </a:spcBef>
-              <a:spcAft>
-                <a:spcPts val="0"/>
-              </a:spcAft>
-              <a:buNone/>
-            </a:pPr>
-            <a:r>
-              <a:rPr lang="ru-RU" sz="850" dirty="0">
-                <a:solidFill>
-                  <a:srgbClr val="000000"/>
-                </a:solidFill>
-                <a:latin typeface="PT Sans"/>
-                <a:ea typeface="PT Sans"/>
-                <a:cs typeface="PT Sans"/>
-              </a:rPr>
-              <a:t>сбои распознавания, ложные срабатывания</a:t>
-            </a:r>
-          </a:p>
-          <a:p>
-            <a:pPr marL="0" lvl="0" indent="0" algn="l" rtl="0">
-              <a:lnSpc>
-                <a:spcPct val="110000"/>
-              </a:lnSpc>
-              <a:spcBef>
-                <a:spcPts val="120"/>
-              </a:spcBef>
-              <a:spcAft>
-                <a:spcPts val="0"/>
-              </a:spcAft>
-              <a:buNone/>
-            </a:pPr>
-            <a:r>
-              <a:rPr lang="ru-RU" sz="850" b="1" dirty="0">
-                <a:solidFill>
-                  <a:srgbClr val="17365D"/>
-                </a:solidFill>
-                <a:latin typeface="PT Sans"/>
-                <a:ea typeface="PT Sans"/>
-                <a:cs typeface="PT Sans"/>
-              </a:rPr>
-              <a:t>Меры:</a:t>
-            </a:r>
-          </a:p>
-          <a:p>
-            <a:pPr marL="0" lvl="0" indent="0" algn="l" rtl="0">
-              <a:lnSpc>
-                <a:spcPct val="110000"/>
-              </a:lnSpc>
-              <a:spcBef>
-                <a:spcPts val="40"/>
-              </a:spcBef>
-              <a:spcAft>
-                <a:spcPts val="0"/>
-              </a:spcAft>
-              <a:buNone/>
-            </a:pPr>
-            <a:r>
-              <a:rPr lang="ru-RU" sz="850" dirty="0">
-                <a:solidFill>
-                  <a:srgbClr val="000000"/>
-                </a:solidFill>
-                <a:latin typeface="PT Sans"/>
-                <a:ea typeface="PT Sans"/>
-                <a:cs typeface="PT Sans"/>
-              </a:rPr>
-              <a:t>пилоты, A/B-тесты, контроль FAR/FRR</a:t>
-            </a:r>
-          </a:p>
-        </p:txBody>
-      </p:sp>
-      <p:sp>
-        <p:nvSpPr>
-          <p:cNvPr id="834" name="Risk3H"/>
-          <p:cNvSpPr/>
-          <p:nvPr/>
-        </p:nvSpPr>
-        <p:spPr>
-          <a:xfrm>
-            <a:off x="7330000" y="2580000"/>
-            <a:ext cx="1620000" cy="280000"/>
-          </a:xfrm>
-          <a:prstGeom prst="rect">
-            <a:avLst/>
-          </a:prstGeom>
-          <a:solidFill>
-            <a:srgbClr val="888888"/>
-          </a:solidFill>
-          <a:ln>
-            <a:noFill/>
-          </a:ln>
-        </p:spPr>
-        <p:txBody>
-          <a:bodyPr wrap="square" lIns="91440" tIns="45720" rIns="91440" bIns="45720" anchor="ctr" anchorCtr="1">
-            <a:normAutofit/>
-          </a:bodyPr>
-          <a:lstStyle/>
-          <a:p>
-            <a:pPr marL="0" lvl="0" indent="0" algn="ctr" rtl="0">
-              <a:lnSpc>
-                <a:spcPct val="110000"/>
-              </a:lnSpc>
-              <a:spcBef>
-                <a:spcPts val="0"/>
-              </a:spcBef>
-              <a:spcAft>
-                <a:spcPts val="0"/>
-              </a:spcAft>
-              <a:buNone/>
-            </a:pPr>
-            <a:r>
-              <a:rPr lang="ru-RU" sz="1000" b="1" dirty="0">
-                <a:solidFill>
-                  <a:srgbClr val="FFFFFF"/>
-                </a:solidFill>
-                <a:latin typeface="PT Sans"/>
-                <a:ea typeface="PT Sans"/>
-                <a:cs typeface="PT Sans"/>
-              </a:rPr>
-              <a:t>Рыночный</a:t>
-            </a:r>
-          </a:p>
-        </p:txBody>
-      </p:sp>
-      <p:sp>
-        <p:nvSpPr>
-          <p:cNvPr id="835" name="Risk3B"/>
-          <p:cNvSpPr/>
-          <p:nvPr/>
-        </p:nvSpPr>
-        <p:spPr>
-          <a:xfrm>
-            <a:off x="7330000" y="2860000"/>
-            <a:ext cx="1620000" cy="1040000"/>
-          </a:xfrm>
-          <a:prstGeom prst="rect">
-            <a:avLst/>
-          </a:prstGeom>
-          <a:solidFill>
-            <a:srgbClr val="FFFFFF"/>
-          </a:solidFill>
-          <a:ln w="3175">
-            <a:solidFill>
-              <a:srgbClr val="888888"/>
-            </a:solidFill>
-          </a:ln>
-        </p:spPr>
-        <p:txBody>
-          <a:bodyPr wrap="square" lIns="91440" tIns="45720" rIns="91440" bIns="45720" anchor="t" anchorCtr="1">
-            <a:normAutofit/>
-          </a:bodyPr>
-          <a:lstStyle/>
-          <a:p>
-            <a:pPr marL="0" lvl="0" indent="0" algn="l" rtl="0">
-              <a:lnSpc>
-                <a:spcPct val="110000"/>
-              </a:lnSpc>
-              <a:spcBef>
-                <a:spcPts val="0"/>
-              </a:spcBef>
-              <a:spcAft>
-                <a:spcPts val="0"/>
-              </a:spcAft>
-              <a:buNone/>
-            </a:pPr>
-            <a:r>
-              <a:rPr lang="ru-RU" sz="850" b="1" dirty="0">
-                <a:solidFill>
-                  <a:srgbClr val="17365D"/>
-                </a:solidFill>
-                <a:latin typeface="PT Sans"/>
-                <a:ea typeface="PT Sans"/>
-                <a:cs typeface="PT Sans"/>
-              </a:rPr>
-              <a:t>Угроза:</a:t>
-            </a:r>
-          </a:p>
-          <a:p>
-            <a:pPr marL="0" lvl="0" indent="0" algn="l" rtl="0">
-              <a:lnSpc>
-                <a:spcPct val="110000"/>
-              </a:lnSpc>
-              <a:spcBef>
-                <a:spcPts val="40"/>
-              </a:spcBef>
-              <a:spcAft>
-                <a:spcPts val="0"/>
-              </a:spcAft>
-              <a:buNone/>
-            </a:pPr>
-            <a:r>
-              <a:rPr lang="ru-RU" sz="850" dirty="0">
-                <a:solidFill>
-                  <a:srgbClr val="000000"/>
-                </a:solidFill>
-                <a:latin typeface="PT Sans"/>
-                <a:ea typeface="PT Sans"/>
-                <a:cs typeface="PT Sans"/>
-              </a:rPr>
-              <a:t>медленная диффузия, психологические барьеры</a:t>
-            </a:r>
-          </a:p>
-          <a:p>
-            <a:pPr marL="0" lvl="0" indent="0" algn="l" rtl="0">
-              <a:lnSpc>
-                <a:spcPct val="110000"/>
-              </a:lnSpc>
-              <a:spcBef>
-                <a:spcPts val="120"/>
-              </a:spcBef>
-              <a:spcAft>
-                <a:spcPts val="0"/>
-              </a:spcAft>
-              <a:buNone/>
-            </a:pPr>
-            <a:r>
-              <a:rPr lang="ru-RU" sz="850" b="1" dirty="0">
-                <a:solidFill>
-                  <a:srgbClr val="17365D"/>
-                </a:solidFill>
-                <a:latin typeface="PT Sans"/>
-                <a:ea typeface="PT Sans"/>
-                <a:cs typeface="PT Sans"/>
-              </a:rPr>
-              <a:t>Меры:</a:t>
-            </a:r>
-          </a:p>
-          <a:p>
-            <a:pPr marL="0" lvl="0" indent="0" algn="l" rtl="0">
-              <a:lnSpc>
-                <a:spcPct val="110000"/>
-              </a:lnSpc>
-              <a:spcBef>
-                <a:spcPts val="40"/>
-              </a:spcBef>
-              <a:spcAft>
-                <a:spcPts val="0"/>
-              </a:spcAft>
-              <a:buNone/>
-            </a:pPr>
-            <a:r>
-              <a:rPr lang="ru-RU" sz="850" dirty="0">
-                <a:solidFill>
-                  <a:srgbClr val="000000"/>
-                </a:solidFill>
-                <a:latin typeface="PT Sans"/>
-                <a:ea typeface="PT Sans"/>
-                <a:cs typeface="PT Sans"/>
-              </a:rPr>
-              <a:t>образовательные форматы, кейсы и партнёры</a:t>
-            </a:r>
-          </a:p>
-        </p:txBody>
-      </p:sp>
-      <p:sp>
-        <p:nvSpPr>
-          <p:cNvPr id="836" name="FinalNote"/>
-          <p:cNvSpPr/>
-          <p:nvPr/>
-        </p:nvSpPr>
-        <p:spPr>
-          <a:xfrm>
-            <a:off x="1050000" y="4500000"/>
-            <a:ext cx="7900000" cy="400000"/>
-          </a:xfrm>
-          <a:prstGeom prst="rect">
-            <a:avLst/>
-          </a:prstGeom>
-          <a:solidFill>
-            <a:srgbClr val="17365D"/>
-          </a:solidFill>
-          <a:ln>
-            <a:noFill/>
-          </a:ln>
-        </p:spPr>
-        <p:txBody>
-          <a:bodyPr wrap="square" lIns="91440" tIns="45720" rIns="91440" bIns="45720" anchor="ctr" anchorCtr="1">
-            <a:normAutofit/>
-          </a:bodyPr>
-          <a:lstStyle/>
-          <a:p>
-            <a:pPr marL="0" lvl="0" indent="0" algn="ctr" rtl="0">
-              <a:lnSpc>
-                <a:spcPct val="110000"/>
-              </a:lnSpc>
-              <a:spcBef>
-                <a:spcPts val="0"/>
-              </a:spcBef>
-              <a:spcAft>
-                <a:spcPts val="0"/>
-              </a:spcAft>
-              <a:buNone/>
-            </a:pPr>
-            <a:r>
-              <a:rPr lang="ru-RU" sz="1100" b="1" dirty="0">
-                <a:solidFill>
-                  <a:srgbClr val="FFFFFF"/>
-                </a:solidFill>
-                <a:latin typeface="PT Sans"/>
-                <a:ea typeface="PT Sans"/>
-                <a:cs typeface="PT Sans"/>
-              </a:rPr>
-              <a:t>→ Стратегия экономически эффективна при условии удержания регуляторных и репутационных рисков под контролем</a:t>
+              <a:t>NPV &gt; 0, IRR (66 %) ≫ r (18 %), PP &lt; 24 мес., PI &gt; 1</a:t>
             </a:r>
           </a:p>
         </p:txBody>

--- a/ВКР_Face2_АкБарс_презентация.pptx
+++ b/ВКР_Face2_АкБарс_презентация.pptx
@@ -22852,7 +22852,7 @@
                 <a:ea typeface="PT Sans"/>
                 <a:cs typeface="PT Sans"/>
               </a:rPr>
-              <a:t> = 25 млн ₽   ·   r = 18 %   ·   горизонт 5 лет   ·   CF = (8 / 18 / 28 / 35 / 38) млн ₽</a:t>
+              <a:t> = 28 млн ₽   ·   r = 20 % (ЦБ 17 % + премия 3 %)   ·   CF после налога 25 % = (6 / 16 / 28 / 40 / 48) млн ₽</a:t>
             </a:r>
           </a:p>
         </p:txBody>
@@ -22950,7 +22950,7 @@
               <a:buNone/>
             </a:pPr>
             <a:r>
-              <a:rPr lang="ru-RU" sz="2200" b="1" dirty="0">
+              <a:rPr lang="ru-RU" sz="2000" b="1" dirty="0">
                 <a:solidFill>
                   <a:srgbClr val="FFFFFF"/>
                 </a:solidFill>
@@ -22958,7 +22958,7 @@
                 <a:ea typeface="PT Sans"/>
                 <a:cs typeface="PT Sans"/>
               </a:rPr>
-              <a:t>46,4 млн ₽</a:t>
+              <a:t>42,9 млн ₽</a:t>
             </a:r>
           </a:p>
           <a:p>
@@ -23061,7 +23061,7 @@
                 <a:ea typeface="PT Sans"/>
                 <a:cs typeface="PT Sans"/>
               </a:rPr>
-              <a:t>PP</a:t>
+              <a:t>PP / DPP</a:t>
             </a:r>
           </a:p>
         </p:txBody>
@@ -23106,7 +23106,7 @@
               <a:buNone/>
             </a:pPr>
             <a:r>
-              <a:rPr lang="ru-RU" sz="2200" b="1" dirty="0">
+              <a:rPr lang="ru-RU" sz="2000" b="1" dirty="0">
                 <a:solidFill>
                   <a:srgbClr val="FFFFFF"/>
                 </a:solidFill>
@@ -23114,7 +23114,7 @@
                 <a:ea typeface="PT Sans"/>
                 <a:cs typeface="PT Sans"/>
               </a:rPr>
-              <a:t>23 мес.</a:t>
+              <a:t>27 / 33 мес.</a:t>
             </a:r>
           </a:p>
           <a:p>
@@ -23139,7 +23139,7 @@
                 <a:ea typeface="PT Sans"/>
                 <a:cs typeface="PT Sans"/>
               </a:rPr>
-              <a:t>простой срок</a:t>
+              <a:t>простой и дисконтированный</a:t>
             </a:r>
           </a:p>
           <a:p>
@@ -23164,7 +23164,7 @@
                 <a:ea typeface="PT Sans"/>
                 <a:cs typeface="PT Sans"/>
               </a:rPr>
-              <a:t>окупаемости (DPP ≈ 28 мес.)</a:t>
+              <a:t>сроки окупаемости</a:t>
             </a:r>
           </a:p>
         </p:txBody>
@@ -23262,7 +23262,7 @@
               <a:buNone/>
             </a:pPr>
             <a:r>
-              <a:rPr lang="ru-RU" sz="2200" b="1" dirty="0">
+              <a:rPr lang="ru-RU" sz="2000" b="1" dirty="0">
                 <a:solidFill>
                   <a:srgbClr val="FFFFFF"/>
                 </a:solidFill>
@@ -23270,7 +23270,7 @@
                 <a:ea typeface="PT Sans"/>
                 <a:cs typeface="PT Sans"/>
               </a:rPr>
-              <a:t>2,86</a:t>
+              <a:t>2,53</a:t>
             </a:r>
           </a:p>
           <a:p>
@@ -23320,7 +23320,7 @@
                 <a:ea typeface="PT Sans"/>
                 <a:cs typeface="PT Sans"/>
               </a:rPr>
-              <a:t>на 1 ₽ инвестиций 2,86 ₽</a:t>
+              <a:t>на 1 ₽ инвестиций 2,53 ₽</a:t>
             </a:r>
           </a:p>
         </p:txBody>
@@ -23418,7 +23418,7 @@
               <a:buNone/>
             </a:pPr>
             <a:r>
-              <a:rPr lang="ru-RU" sz="2200" b="1" dirty="0">
+              <a:rPr lang="ru-RU" sz="2000" b="1" dirty="0">
                 <a:solidFill>
                   <a:srgbClr val="FFFFFF"/>
                 </a:solidFill>
@@ -23426,7 +23426,7 @@
                 <a:ea typeface="PT Sans"/>
                 <a:cs typeface="PT Sans"/>
               </a:rPr>
-              <a:t>66,2 %</a:t>
+              <a:t>59,1 %</a:t>
             </a:r>
           </a:p>
           <a:p>
@@ -23476,7 +23476,7 @@
                 <a:ea typeface="PT Sans"/>
                 <a:cs typeface="PT Sans"/>
               </a:rPr>
-              <a:t>доходности (≫ r = 18 %)</a:t>
+              <a:t>доходности (≫ r = 20 %)</a:t>
             </a:r>
           </a:p>
         </p:txBody>
@@ -23527,7 +23527,40 @@
                 <a:ea typeface="PT Sans"/>
                 <a:cs typeface="PT Sans"/>
               </a:rPr>
-              <a:t>ДЕНЕЖНЫЕ ПОТОКИ СТРАТЕГИИ ПРОДВИЖЕНИЯ FACE2</a:t>
+              <a:t>ДЕНЕЖНЫЕ ПОТОКИ СТРАТЕГИИ ПРОДВИЖЕНИЯ FACE2  </a:t>
+            </a:r>
+            <a:r>
+              <a:rPr lang="ru-RU" sz="850" i="1" dirty="0">
+                <a:solidFill>
+                  <a:srgbClr val="888888"/>
+                </a:solidFill>
+                <a:latin typeface="PT Sans"/>
+                <a:ea typeface="PT Sans"/>
+                <a:cs typeface="PT Sans"/>
+              </a:rPr>
+              <a:t>(детальная декомпозиция I</a:t>
+            </a:r>
+            <a:r>
+              <a:rPr lang="ru-RU" sz="600" i="1" dirty="0">
+                <a:solidFill>
+                  <a:srgbClr val="888888"/>
+                </a:solidFill>
+                <a:latin typeface="PT Sans"/>
+                <a:ea typeface="PT Sans"/>
+                <a:cs typeface="PT Sans"/>
+              </a:rPr>
+              <a:t>0</a:t>
+            </a:r>
+            <a:r>
+              <a:rPr lang="ru-RU" sz="850" i="1" dirty="0">
+                <a:solidFill>
+                  <a:srgbClr val="888888"/>
+                </a:solidFill>
+                <a:latin typeface="PT Sans"/>
+                <a:ea typeface="PT Sans"/>
+                <a:cs typeface="PT Sans"/>
+              </a:rPr>
+              <a:t> и CF — Финансовая_модель_Face2.md)</a:t>
             </a:r>
           </a:p>
         </p:txBody>
@@ -24061,7 +24094,7 @@
                 <a:ea typeface="PT Sans"/>
                 <a:cs typeface="PT Sans"/>
               </a:rPr>
-              <a:t>−25,0</a:t>
+              <a:t>−28,0</a:t>
             </a:r>
           </a:p>
         </p:txBody>
@@ -24116,7 +24149,7 @@
                 <a:ea typeface="PT Sans"/>
                 <a:cs typeface="PT Sans"/>
               </a:rPr>
-              <a:t>8,0</a:t>
+              <a:t>6,0</a:t>
             </a:r>
           </a:p>
         </p:txBody>
@@ -24171,7 +24204,7 @@
                 <a:ea typeface="PT Sans"/>
                 <a:cs typeface="PT Sans"/>
               </a:rPr>
-              <a:t>18,0</a:t>
+              <a:t>16,0</a:t>
             </a:r>
           </a:p>
         </p:txBody>
@@ -24281,7 +24314,7 @@
                 <a:ea typeface="PT Sans"/>
                 <a:cs typeface="PT Sans"/>
               </a:rPr>
-              <a:t>35,0</a:t>
+              <a:t>40,0</a:t>
             </a:r>
           </a:p>
         </p:txBody>
@@ -24336,7 +24369,7 @@
                 <a:ea typeface="PT Sans"/>
                 <a:cs typeface="PT Sans"/>
               </a:rPr>
-              <a:t>38,0</a:t>
+              <a:t>48,0</a:t>
             </a:r>
           </a:p>
         </p:txBody>
@@ -24391,7 +24424,7 @@
                 <a:ea typeface="PT Sans"/>
                 <a:cs typeface="PT Sans"/>
               </a:rPr>
-              <a:t>+127,0</a:t>
+              <a:t>+138,0</a:t>
             </a:r>
           </a:p>
         </p:txBody>
@@ -24446,7 +24479,7 @@
                 <a:ea typeface="PT Sans"/>
                 <a:cs typeface="PT Sans"/>
               </a:rPr>
-              <a:t>DCF, млн ₽ (r=18 %)</a:t>
+              <a:t>DCF, млн ₽ (r=20 %)</a:t>
             </a:r>
           </a:p>
         </p:txBody>
@@ -24501,7 +24534,7 @@
                 <a:ea typeface="PT Sans"/>
                 <a:cs typeface="PT Sans"/>
               </a:rPr>
-              <a:t>−25,0</a:t>
+              <a:t>−28,0</a:t>
             </a:r>
           </a:p>
         </p:txBody>
@@ -24556,7 +24589,7 @@
                 <a:ea typeface="PT Sans"/>
                 <a:cs typeface="PT Sans"/>
               </a:rPr>
-              <a:t>6,8</a:t>
+              <a:t>5,0</a:t>
             </a:r>
           </a:p>
         </p:txBody>
@@ -24611,7 +24644,7 @@
                 <a:ea typeface="PT Sans"/>
                 <a:cs typeface="PT Sans"/>
               </a:rPr>
-              <a:t>12,9</a:t>
+              <a:t>11,1</a:t>
             </a:r>
           </a:p>
         </p:txBody>
@@ -24666,7 +24699,7 @@
                 <a:ea typeface="PT Sans"/>
                 <a:cs typeface="PT Sans"/>
               </a:rPr>
-              <a:t>17,0</a:t>
+              <a:t>16,2</a:t>
             </a:r>
           </a:p>
         </p:txBody>
@@ -24721,7 +24754,7 @@
                 <a:ea typeface="PT Sans"/>
                 <a:cs typeface="PT Sans"/>
               </a:rPr>
-              <a:t>18,1</a:t>
+              <a:t>19,3</a:t>
             </a:r>
           </a:p>
         </p:txBody>
@@ -24776,7 +24809,7 @@
                 <a:ea typeface="PT Sans"/>
                 <a:cs typeface="PT Sans"/>
               </a:rPr>
-              <a:t>16,6</a:t>
+              <a:t>19,3</a:t>
             </a:r>
           </a:p>
         </p:txBody>
@@ -24831,7 +24864,7 @@
                 <a:ea typeface="PT Sans"/>
                 <a:cs typeface="PT Sans"/>
               </a:rPr>
-              <a:t>+71,4</a:t>
+              <a:t>+70,9</a:t>
             </a:r>
           </a:p>
         </p:txBody>
@@ -24941,7 +24974,7 @@
                 <a:ea typeface="PT Sans"/>
                 <a:cs typeface="PT Sans"/>
               </a:rPr>
-              <a:t>−25,0</a:t>
+              <a:t>−28,0</a:t>
             </a:r>
           </a:p>
         </p:txBody>
@@ -24996,7 +25029,7 @@
                 <a:ea typeface="PT Sans"/>
                 <a:cs typeface="PT Sans"/>
               </a:rPr>
-              <a:t>−18,2</a:t>
+              <a:t>−23,0</a:t>
             </a:r>
           </a:p>
         </p:txBody>
@@ -25051,7 +25084,7 @@
                 <a:ea typeface="PT Sans"/>
                 <a:cs typeface="PT Sans"/>
               </a:rPr>
-              <a:t>−5,3</a:t>
+              <a:t>−11,9</a:t>
             </a:r>
           </a:p>
         </p:txBody>
@@ -25106,7 +25139,7 @@
                 <a:ea typeface="PT Sans"/>
                 <a:cs typeface="PT Sans"/>
               </a:rPr>
-              <a:t>+11,8</a:t>
+              <a:t>+4,3</a:t>
             </a:r>
           </a:p>
         </p:txBody>
@@ -25161,7 +25194,7 @@
                 <a:ea typeface="PT Sans"/>
                 <a:cs typeface="PT Sans"/>
               </a:rPr>
-              <a:t>+29,8</a:t>
+              <a:t>+23,6</a:t>
             </a:r>
           </a:p>
         </p:txBody>
@@ -25216,7 +25249,7 @@
                 <a:ea typeface="PT Sans"/>
                 <a:cs typeface="PT Sans"/>
               </a:rPr>
-              <a:t>+46,4</a:t>
+              <a:t>+42,9</a:t>
             </a:r>
           </a:p>
         </p:txBody>
@@ -25995,7 +26028,7 @@
                 <a:ea typeface="PT Sans"/>
                 <a:cs typeface="PT Sans"/>
               </a:rPr>
-              <a:t>→ Стратегия экономически эффективна: </a:t>
+              <a:t>→ Стратегия эффективна: </a:t>
             </a:r>
             <a:r>
               <a:rPr lang="ru-RU" sz="1100" dirty="0">
@@ -26006,7 +26039,7 @@
                 <a:ea typeface="PT Sans"/>
                 <a:cs typeface="PT Sans"/>
               </a:rPr>
-              <a:t>NPV &gt; 0, IRR (66 %) ≫ r (18 %), PP &lt; 24 мес., PI &gt; 1</a:t>
+              <a:t>NPV &gt; 0, IRR (59 %) ≫ r (20 %), PI = 2,5; запас прочности — снижение CF до −60 % сохраняет NPV &gt; 0</a:t>
             </a:r>
           </a:p>
         </p:txBody>

--- a/ВКР_Face2_АкБарс_презентация.pptx
+++ b/ВКР_Face2_АкБарс_презентация.pptx
@@ -26752,7 +26752,7 @@
                 <a:ea typeface="PT Sans"/>
                 <a:cs typeface="PT Sans"/>
               </a:rPr>
-              <a:t>Предложена интегрированная стратегия push + pull с маркетинговой воронкой и этапом доверия, набором 7P и комплексом мероприятий. Целевой ROI ≥ 180 % за 24 месяца.</a:t>
+              <a:t>Предложена интегрированная стратегия push + pull с маркетинговой воронкой, набором 7P и комплексом мероприятий. Финансовая оценка: NPV +42,9 млн ₽, IRR 59 % при r = 20 %, PI 2,5; окупаемость ~27 мес.</a:t>
             </a:r>
           </a:p>
         </p:txBody>

--- a/ВКР_Face2_АкБарс_презентация.pptx
+++ b/ВКР_Face2_АкБарс_презентация.pptx
@@ -15,6 +15,7 @@
     <p:sldId id="281" r:id="rId6"/>
     <p:sldId id="282" r:id="rId7"/>
     <p:sldId id="283" r:id="rId8"/>
+    <p:sldId id="285" r:id="rId32"/>
     <p:sldId id="284" r:id="rId9"/>
     <p:sldId id="280" r:id="rId10"/>
     <p:sldId id="276" r:id="rId11"/>
@@ -1674,6 +1675,69 @@
             </a:pathLst>
           </a:custGeom>
         </p:spPr>
+      </p:sp>
+    </p:spTree>
+  </p:cSld>
+  <p:clrMapOvr>
+    <a:masterClrMapping/>
+  </p:clrMapOvr>
+</p:notes>
+</file>
+
+<file path=ppt/notesSlides/notesSlide11.xml><?xml version="1.0" encoding="utf-8"?>
+<p:notes xmlns:a="http://schemas.openxmlformats.org/drawingml/2006/main" xmlns:r="http://schemas.openxmlformats.org/officeDocument/2006/relationships" xmlns:p="http://schemas.openxmlformats.org/presentationml/2006/main" showMasterSp="0" showMasterPhAnim="0">
+  <p:cSld>
+    <p:spTree>
+      <p:nvGrpSpPr>
+        <p:cNvPr id="1" name="Group"/>
+        <p:cNvGrpSpPr/>
+        <p:nvPr/>
+      </p:nvGrpSpPr>
+      <p:grpSpPr>
+        <a:xfrm>
+          <a:off x="0" y="0"/>
+          <a:ext cx="0" cy="0"/>
+          <a:chOff x="0" y="0"/>
+          <a:chExt cx="0" cy="0"/>
+        </a:xfrm>
+      </p:grpSpPr>
+      <p:sp>
+        <p:nvSpPr>
+          <p:cNvPr id="2" name="Notes Body"/>
+          <p:cNvSpPr txBox="1">
+            <a:spLocks noGrp="1"/>
+          </p:cNvSpPr>
+          <p:nvPr>
+            <p:ph type="body" idx="1"/>
+          </p:nvPr>
+        </p:nvSpPr>
+        <p:spPr>
+          <a:xfrm>
+            <a:off x="685800" y="4400550"/>
+            <a:ext cx="5486400" cy="3600600"/>
+          </a:xfrm>
+          <a:prstGeom prst="rect">
+            <a:avLst/>
+          </a:prstGeom>
+        </p:spPr>
+        <p:txBody>
+          <a:bodyPr spcFirstLastPara="1" wrap="square" lIns="91425" tIns="45700" rIns="91425" bIns="45700" anchor="t" anchorCtr="0">
+            <a:noAutofit/>
+          </a:bodyPr>
+          <a:lstStyle/>
+          <a:p>
+            <a:pPr marL="0" lvl="0" indent="0" algn="l" rtl="0">
+              <a:spcBef>
+                <a:spcPts val="0"/>
+              </a:spcBef>
+              <a:spcAft>
+                <a:spcPts val="0"/>
+              </a:spcAft>
+              <a:buNone/>
+            </a:pPr>
+            <a:endParaRPr/>
+          </a:p>
+        </p:txBody>
       </p:sp>
     </p:spTree>
   </p:cSld>
@@ -13221,6 +13285,1574 @@
 </p:sld>
 </file>
 
+<file path=ppt/slides/slide11.xml><?xml version="1.0" encoding="utf-8"?>
+<p:sld xmlns:a="http://schemas.openxmlformats.org/drawingml/2006/main" xmlns:r="http://schemas.openxmlformats.org/officeDocument/2006/relationships" xmlns:p="http://schemas.openxmlformats.org/presentationml/2006/main">
+  <p:cSld>
+    <p:spTree>
+      <p:nvGrpSpPr>
+        <p:cNvPr id="1" name="Group"/>
+        <p:cNvGrpSpPr/>
+        <p:nvPr/>
+      </p:nvGrpSpPr>
+      <p:grpSpPr>
+        <a:xfrm>
+          <a:off x="0" y="0"/>
+          <a:ext cx="0" cy="0"/>
+          <a:chOff x="0" y="0"/>
+          <a:chExt cx="0" cy="0"/>
+        </a:xfrm>
+      </p:grpSpPr>
+      <p:pic>
+        <p:nvPicPr>
+          <p:cNvPr id="1101" name="Stripe"/>
+          <p:cNvPicPr preferRelativeResize="0"/>
+          <p:nvPr/>
+        </p:nvPicPr>
+        <p:blipFill rotWithShape="1">
+          <a:blip r:embed="rId3">
+            <a:alphaModFix/>
+          </a:blip>
+          <a:srcRect/>
+          <a:stretch/>
+        </p:blipFill>
+        <p:spPr>
+          <a:xfrm>
+            <a:off x="0" y="-4795"/>
+            <a:ext cx="899592" cy="5148295"/>
+          </a:xfrm>
+          <a:prstGeom prst="rect">
+            <a:avLst/>
+          </a:prstGeom>
+          <a:noFill/>
+          <a:ln>
+            <a:noFill/>
+          </a:ln>
+        </p:spPr>
+      </p:pic>
+      <p:pic>
+        <p:nvPicPr>
+          <p:cNvPr id="1102" name="KFULogo"/>
+          <p:cNvPicPr preferRelativeResize="0"/>
+          <p:nvPr/>
+        </p:nvPicPr>
+        <p:blipFill rotWithShape="1">
+          <a:blip r:embed="rId5">
+            <a:alphaModFix/>
+          </a:blip>
+          <a:srcRect/>
+          <a:stretch/>
+        </p:blipFill>
+        <p:spPr>
+          <a:xfrm>
+            <a:off x="134703" y="93531"/>
+            <a:ext cx="684193" cy="580591"/>
+          </a:xfrm>
+          <a:prstGeom prst="rect">
+            <a:avLst/>
+          </a:prstGeom>
+          <a:noFill/>
+          <a:ln>
+            <a:noFill/>
+          </a:ln>
+        </p:spPr>
+      </p:pic>
+      <p:sp>
+        <p:nvSpPr>
+          <p:cNvPr id="1103" name="SlideNumber"/>
+          <p:cNvSpPr txBox="1"/>
+          <p:nvPr/>
+        </p:nvSpPr>
+        <p:spPr>
+          <a:xfrm>
+            <a:off x="100000" y="4643500"/>
+            <a:ext cx="699592" cy="350000"/>
+          </a:xfrm>
+          <a:prstGeom prst="rect">
+            <a:avLst/>
+          </a:prstGeom>
+          <a:noFill/>
+          <a:ln>
+            <a:noFill/>
+          </a:ln>
+        </p:spPr>
+        <p:txBody>
+          <a:bodyPr wrap="square" lIns="91440" tIns="45720" rIns="91440" bIns="45720" anchor="ctr" anchorCtr="0">
+            <a:noAutofit/>
+          </a:bodyPr>
+          <a:lstStyle/>
+          <a:p>
+            <a:pPr marL="0" lvl="0" indent="0" algn="ctr" rtl="0">
+              <a:lnSpc>
+                <a:spcPct val="110000"/>
+              </a:lnSpc>
+              <a:spcBef>
+                <a:spcPts val="0"/>
+              </a:spcBef>
+              <a:spcAft>
+                <a:spcPts val="0"/>
+              </a:spcAft>
+              <a:buNone/>
+            </a:pPr>
+            <a:r>
+              <a:rPr lang="ru-RU" sz="1400" b="1" dirty="0">
+                <a:solidFill>
+                  <a:srgbClr val="FFFFFF"/>
+                </a:solidFill>
+                <a:latin typeface="PT Sans"/>
+                <a:ea typeface="PT Sans"/>
+                <a:cs typeface="PT Sans"/>
+              </a:rPr>
+              <a:t>8</a:t>
+            </a:r>
+          </a:p>
+        </p:txBody>
+      </p:sp>
+      <p:sp>
+        <p:nvSpPr>
+          <p:cNvPr id="1104" name="Title"/>
+          <p:cNvSpPr txBox="1"/>
+          <p:nvPr/>
+        </p:nvSpPr>
+        <p:spPr>
+          <a:xfrm>
+            <a:off x="989551" y="130000"/>
+            <a:ext cx="7800000" cy="580000"/>
+          </a:xfrm>
+          <a:prstGeom prst="rect">
+            <a:avLst/>
+          </a:prstGeom>
+          <a:noFill/>
+          <a:ln>
+            <a:noFill/>
+          </a:ln>
+        </p:spPr>
+        <p:txBody>
+          <a:bodyPr wrap="square" lIns="91440" tIns="45720" rIns="91440" bIns="45720" anchor="ctr" anchorCtr="0">
+            <a:noAutofit/>
+          </a:bodyPr>
+          <a:lstStyle/>
+          <a:p>
+            <a:pPr marL="0" lvl="0" indent="0" algn="l" rtl="0">
+              <a:lnSpc>
+                <a:spcPct val="110000"/>
+              </a:lnSpc>
+              <a:spcBef>
+                <a:spcPts val="0"/>
+              </a:spcBef>
+              <a:spcAft>
+                <a:spcPts val="0"/>
+              </a:spcAft>
+              <a:buNone/>
+            </a:pPr>
+            <a:r>
+              <a:rPr lang="ru-RU" sz="2400" b="1" dirty="0">
+                <a:solidFill>
+                  <a:srgbClr val="17365D"/>
+                </a:solidFill>
+                <a:latin typeface="PT Sans"/>
+                <a:ea typeface="PT Sans"/>
+                <a:cs typeface="PT Sans"/>
+              </a:rPr>
+              <a:t>РЕКОМЕНДАЦИИ ПО СЕГМЕНТАМ ЦЕЛЕВОЙ АУДИТОРИИ</a:t>
+            </a:r>
+          </a:p>
+        </p:txBody>
+      </p:sp>
+      <p:sp>
+        <p:nvSpPr>
+          <p:cNvPr id="1105" name="Subtitle"/>
+          <p:cNvSpPr txBox="1"/>
+          <p:nvPr/>
+        </p:nvSpPr>
+        <p:spPr>
+          <a:xfrm>
+            <a:off x="1050000" y="800000"/>
+            <a:ext cx="7900000" cy="350000"/>
+          </a:xfrm>
+          <a:prstGeom prst="rect">
+            <a:avLst/>
+          </a:prstGeom>
+          <a:noFill/>
+          <a:ln>
+            <a:noFill/>
+          </a:ln>
+        </p:spPr>
+        <p:txBody>
+          <a:bodyPr wrap="square" lIns="91440" tIns="45720" rIns="91440" bIns="45720" anchor="ctr" anchorCtr="0">
+            <a:noAutofit/>
+          </a:bodyPr>
+          <a:lstStyle/>
+          <a:p>
+            <a:pPr marL="0" lvl="0" indent="0" algn="l" rtl="0">
+              <a:lnSpc>
+                <a:spcPct val="110000"/>
+              </a:lnSpc>
+              <a:spcBef>
+                <a:spcPts val="0"/>
+              </a:spcBef>
+              <a:spcAft>
+                <a:spcPts val="0"/>
+              </a:spcAft>
+              <a:buNone/>
+            </a:pPr>
+            <a:r>
+              <a:rPr lang="ru-RU" sz="1300" i="1" dirty="0">
+                <a:solidFill>
+                  <a:srgbClr val="17365D"/>
+                </a:solidFill>
+                <a:latin typeface="PT Sans"/>
+                <a:ea typeface="PT Sans"/>
+                <a:cs typeface="PT Sans"/>
+              </a:rPr>
+              <a:t>Дифференцированный подход к продвижению Face2: сегменты решают разные задачи и требуют разных каналов</a:t>
+            </a:r>
+          </a:p>
+        </p:txBody>
+      </p:sp>
+      <p:sp>
+        <p:nvSpPr>
+          <p:cNvPr id="1106" name="Seg0H"/>
+          <p:cNvSpPr/>
+          <p:nvPr/>
+        </p:nvSpPr>
+        <p:spPr>
+          <a:xfrm>
+            <a:off x="1050000" y="1300000"/>
+            <a:ext cx="2566666" cy="480000"/>
+          </a:xfrm>
+          <a:prstGeom prst="rect">
+            <a:avLst/>
+          </a:prstGeom>
+          <a:solidFill>
+            <a:srgbClr val="17365D"/>
+          </a:solidFill>
+          <a:ln>
+            <a:noFill/>
+          </a:ln>
+        </p:spPr>
+        <p:txBody>
+          <a:bodyPr wrap="square" lIns="91440" tIns="45720" rIns="91440" bIns="45720" anchor="ctr" anchorCtr="1">
+            <a:normAutofit/>
+          </a:bodyPr>
+          <a:lstStyle/>
+          <a:p>
+            <a:pPr marL="0" lvl="0" indent="0" algn="ctr" rtl="0">
+              <a:lnSpc>
+                <a:spcPct val="110000"/>
+              </a:lnSpc>
+              <a:spcBef>
+                <a:spcPts val="0"/>
+              </a:spcBef>
+              <a:spcAft>
+                <a:spcPts val="0"/>
+              </a:spcAft>
+              <a:buNone/>
+            </a:pPr>
+            <a:r>
+              <a:rPr lang="ru-RU" sz="2400" b="1" dirty="0">
+                <a:solidFill>
+                  <a:srgbClr val="FFFFFF"/>
+                </a:solidFill>
+                <a:latin typeface="PT Sans"/>
+                <a:ea typeface="PT Sans"/>
+                <a:cs typeface="PT Sans"/>
+              </a:rPr>
+              <a:t>B2B</a:t>
+            </a:r>
+          </a:p>
+        </p:txBody>
+      </p:sp>
+      <p:sp>
+        <p:nvSpPr>
+          <p:cNvPr id="1107" name="Seg0A"/>
+          <p:cNvSpPr/>
+          <p:nvPr/>
+        </p:nvSpPr>
+        <p:spPr>
+          <a:xfrm>
+            <a:off x="1050000" y="1780000"/>
+            <a:ext cx="2566666" cy="480000"/>
+          </a:xfrm>
+          <a:prstGeom prst="rect">
+            <a:avLst/>
+          </a:prstGeom>
+          <a:solidFill>
+            <a:srgbClr val="888888"/>
+          </a:solidFill>
+          <a:ln>
+            <a:noFill/>
+          </a:ln>
+        </p:spPr>
+        <p:txBody>
+          <a:bodyPr wrap="square" lIns="91440" tIns="45720" rIns="91440" bIns="45720" anchor="ctr" anchorCtr="1">
+            <a:normAutofit/>
+          </a:bodyPr>
+          <a:lstStyle/>
+          <a:p>
+            <a:pPr marL="0" lvl="0" indent="0" algn="ctr" rtl="0">
+              <a:lnSpc>
+                <a:spcPct val="110000"/>
+              </a:lnSpc>
+              <a:spcBef>
+                <a:spcPts val="0"/>
+              </a:spcBef>
+              <a:spcAft>
+                <a:spcPts val="0"/>
+              </a:spcAft>
+              <a:buNone/>
+            </a:pPr>
+            <a:r>
+              <a:rPr lang="ru-RU" sz="900" dirty="0">
+                <a:solidFill>
+                  <a:srgbClr val="FFFFFF"/>
+                </a:solidFill>
+                <a:latin typeface="PT Sans"/>
+                <a:ea typeface="PT Sans"/>
+                <a:cs typeface="PT Sans"/>
+              </a:rPr>
+              <a:t>Банки, ритейл, заводы,</a:t>
+            </a:r>
+          </a:p>
+          <a:p>
+            <a:pPr marL="0" lvl="0" indent="0" algn="ctr" rtl="0">
+              <a:lnSpc>
+                <a:spcPct val="110000"/>
+              </a:lnSpc>
+              <a:spcBef>
+                <a:spcPts val="50"/>
+              </a:spcBef>
+              <a:spcAft>
+                <a:spcPts val="0"/>
+              </a:spcAft>
+              <a:buNone/>
+            </a:pPr>
+            <a:r>
+              <a:rPr lang="ru-RU" sz="900" dirty="0">
+                <a:solidFill>
+                  <a:srgbClr val="FFFFFF"/>
+                </a:solidFill>
+                <a:latin typeface="PT Sans"/>
+                <a:ea typeface="PT Sans"/>
+                <a:cs typeface="PT Sans"/>
+              </a:rPr>
+              <a:t>транспорт, интеграторы</a:t>
+            </a:r>
+          </a:p>
+        </p:txBody>
+      </p:sp>
+      <p:sp>
+        <p:nvSpPr>
+          <p:cNvPr id="1108" name="Seg0G"/>
+          <p:cNvSpPr/>
+          <p:nvPr/>
+        </p:nvSpPr>
+        <p:spPr>
+          <a:xfrm>
+            <a:off x="1050000" y="2260000"/>
+            <a:ext cx="2566666" cy="460000"/>
+          </a:xfrm>
+          <a:prstGeom prst="rect">
+            <a:avLst/>
+          </a:prstGeom>
+          <a:solidFill>
+            <a:srgbClr val="D6DCE5"/>
+          </a:solidFill>
+          <a:ln>
+            <a:noFill/>
+          </a:ln>
+        </p:spPr>
+        <p:txBody>
+          <a:bodyPr wrap="square" lIns="91440" tIns="45720" rIns="91440" bIns="45720" anchor="ctr" anchorCtr="1">
+            <a:normAutofit/>
+          </a:bodyPr>
+          <a:lstStyle/>
+          <a:p>
+            <a:pPr marL="0" lvl="0" indent="0" algn="l" rtl="0">
+              <a:lnSpc>
+                <a:spcPct val="110000"/>
+              </a:lnSpc>
+              <a:spcBef>
+                <a:spcPts val="0"/>
+              </a:spcBef>
+              <a:spcAft>
+                <a:spcPts val="0"/>
+              </a:spcAft>
+              <a:buNone/>
+            </a:pPr>
+            <a:r>
+              <a:rPr lang="ru-RU" sz="950" b="1" dirty="0">
+                <a:solidFill>
+                  <a:srgbClr val="17365D"/>
+                </a:solidFill>
+                <a:latin typeface="PT Sans"/>
+                <a:ea typeface="PT Sans"/>
+                <a:cs typeface="PT Sans"/>
+              </a:rPr>
+              <a:t>Цель: </a:t>
+            </a:r>
+            <a:r>
+              <a:rPr lang="ru-RU" sz="950" dirty="0">
+                <a:solidFill>
+                  <a:srgbClr val="000000"/>
+                </a:solidFill>
+                <a:latin typeface="PT Sans"/>
+                <a:ea typeface="PT Sans"/>
+                <a:cs typeface="PT Sans"/>
+              </a:rPr>
+              <a:t>продажи КБС и линейки Face2 (Pay/Pass/Check-in)</a:t>
+            </a:r>
+          </a:p>
+        </p:txBody>
+      </p:sp>
+      <p:sp>
+        <p:nvSpPr>
+          <p:cNvPr id="1109" name="Seg0R"/>
+          <p:cNvSpPr/>
+          <p:nvPr/>
+        </p:nvSpPr>
+        <p:spPr>
+          <a:xfrm>
+            <a:off x="1050000" y="2720000"/>
+            <a:ext cx="2566666" cy="1880000"/>
+          </a:xfrm>
+          <a:prstGeom prst="rect">
+            <a:avLst/>
+          </a:prstGeom>
+          <a:solidFill>
+            <a:srgbClr val="FFFFFF"/>
+          </a:solidFill>
+          <a:ln w="6350">
+            <a:solidFill>
+              <a:srgbClr val="17365D"/>
+            </a:solidFill>
+          </a:ln>
+        </p:spPr>
+        <p:txBody>
+          <a:bodyPr wrap="square" lIns="91440" tIns="45720" rIns="91440" bIns="45720" anchor="t" anchorCtr="1">
+            <a:normAutofit/>
+          </a:bodyPr>
+          <a:lstStyle/>
+          <a:p>
+            <a:pPr marL="0" lvl="0" indent="0" algn="l" rtl="0">
+              <a:lnSpc>
+                <a:spcPct val="110000"/>
+              </a:lnSpc>
+              <a:spcBef>
+                <a:spcPts val="0"/>
+              </a:spcBef>
+              <a:spcAft>
+                <a:spcPts val="0"/>
+              </a:spcAft>
+              <a:buNone/>
+            </a:pPr>
+            <a:r>
+              <a:rPr lang="ru-RU" sz="1000" b="1" dirty="0">
+                <a:solidFill>
+                  <a:srgbClr val="17365D"/>
+                </a:solidFill>
+                <a:latin typeface="PT Sans"/>
+                <a:ea typeface="PT Sans"/>
+                <a:cs typeface="PT Sans"/>
+              </a:rPr>
+              <a:t>Рекомендации:</a:t>
+            </a:r>
+          </a:p>
+          <a:p>
+            <a:pPr marL="250000" lvl="0" indent="-200000" algn="l" rtl="0">
+              <a:lnSpc>
+                <a:spcPct val="115000"/>
+              </a:lnSpc>
+              <a:spcBef>
+                <a:spcPts val="120"/>
+              </a:spcBef>
+              <a:spcAft>
+                <a:spcPts val="0"/>
+              </a:spcAft>
+              <a:buClr>
+                <a:srgbClr val="17365D"/>
+              </a:buClr>
+              <a:buFont typeface="Arial"/>
+              <a:buChar char="■"/>
+            </a:pPr>
+            <a:r>
+              <a:rPr lang="ru-RU" sz="900" dirty="0">
+                <a:solidFill>
+                  <a:srgbClr val="000000"/>
+                </a:solidFill>
+                <a:latin typeface="PT Sans"/>
+                <a:ea typeface="PT Sans"/>
+                <a:cs typeface="PT Sans"/>
+              </a:rPr>
+              <a:t>Отраслевые конференции и форумы (ФинТех, СБП, Cipher, TAdviser)</a:t>
+            </a:r>
+          </a:p>
+          <a:p>
+            <a:pPr marL="250000" lvl="0" indent="-200000" algn="l" rtl="0">
+              <a:lnSpc>
+                <a:spcPct val="115000"/>
+              </a:lnSpc>
+              <a:spcBef>
+                <a:spcPts val="120"/>
+              </a:spcBef>
+              <a:spcAft>
+                <a:spcPts val="0"/>
+              </a:spcAft>
+              <a:buClr>
+                <a:srgbClr val="17365D"/>
+              </a:buClr>
+              <a:buFont typeface="Arial"/>
+              <a:buChar char="■"/>
+            </a:pPr>
+            <a:r>
+              <a:rPr lang="ru-RU" sz="900" dirty="0">
+                <a:solidFill>
+                  <a:srgbClr val="000000"/>
+                </a:solidFill>
+                <a:latin typeface="PT Sans"/>
+                <a:ea typeface="PT Sans"/>
+                <a:cs typeface="PT Sans"/>
+              </a:rPr>
+              <a:t>Кейсы АББ и Татарстана как референс-проекты</a:t>
+            </a:r>
+          </a:p>
+          <a:p>
+            <a:pPr marL="250000" lvl="0" indent="-200000" algn="l" rtl="0">
+              <a:lnSpc>
+                <a:spcPct val="115000"/>
+              </a:lnSpc>
+              <a:spcBef>
+                <a:spcPts val="120"/>
+              </a:spcBef>
+              <a:spcAft>
+                <a:spcPts val="0"/>
+              </a:spcAft>
+              <a:buClr>
+                <a:srgbClr val="17365D"/>
+              </a:buClr>
+              <a:buFont typeface="Arial"/>
+              <a:buChar char="■"/>
+            </a:pPr>
+            <a:r>
+              <a:rPr lang="ru-RU" sz="900" dirty="0">
+                <a:solidFill>
+                  <a:srgbClr val="000000"/>
+                </a:solidFill>
+                <a:latin typeface="PT Sans"/>
+                <a:ea typeface="PT Sans"/>
+                <a:cs typeface="PT Sans"/>
+              </a:rPr>
+              <a:t>Партнёрства с банковскими интеграторами и НСПК</a:t>
+            </a:r>
+          </a:p>
+          <a:p>
+            <a:pPr marL="250000" lvl="0" indent="-200000" algn="l" rtl="0">
+              <a:lnSpc>
+                <a:spcPct val="115000"/>
+              </a:lnSpc>
+              <a:spcBef>
+                <a:spcPts val="120"/>
+              </a:spcBef>
+              <a:spcAft>
+                <a:spcPts val="0"/>
+              </a:spcAft>
+              <a:buClr>
+                <a:srgbClr val="17365D"/>
+              </a:buClr>
+              <a:buFont typeface="Arial"/>
+              <a:buChar char="■"/>
+            </a:pPr>
+            <a:r>
+              <a:rPr lang="ru-RU" sz="900" dirty="0">
+                <a:solidFill>
+                  <a:srgbClr val="000000"/>
+                </a:solidFill>
+                <a:latin typeface="PT Sans"/>
+                <a:ea typeface="PT Sans"/>
+                <a:cs typeface="PT Sans"/>
+              </a:rPr>
+              <a:t>Платные пилоты и демо-стенды на площадке клиента</a:t>
+            </a:r>
+          </a:p>
+          <a:p>
+            <a:pPr marL="250000" lvl="0" indent="-200000" algn="l" rtl="0">
+              <a:lnSpc>
+                <a:spcPct val="115000"/>
+              </a:lnSpc>
+              <a:spcBef>
+                <a:spcPts val="120"/>
+              </a:spcBef>
+              <a:spcAft>
+                <a:spcPts val="0"/>
+              </a:spcAft>
+              <a:buClr>
+                <a:srgbClr val="17365D"/>
+              </a:buClr>
+              <a:buFont typeface="Arial"/>
+              <a:buChar char="■"/>
+            </a:pPr>
+            <a:r>
+              <a:rPr lang="ru-RU" sz="900" dirty="0">
+                <a:solidFill>
+                  <a:srgbClr val="000000"/>
+                </a:solidFill>
+                <a:latin typeface="PT Sans"/>
+                <a:ea typeface="PT Sans"/>
+                <a:cs typeface="PT Sans"/>
+              </a:rPr>
+              <a:t>White papers и экспертный контент в TAdviser, Banki.ru</a:t>
+            </a:r>
+          </a:p>
+          <a:p>
+            <a:pPr marL="250000" lvl="0" indent="-200000" algn="l" rtl="0">
+              <a:lnSpc>
+                <a:spcPct val="115000"/>
+              </a:lnSpc>
+              <a:spcBef>
+                <a:spcPts val="120"/>
+              </a:spcBef>
+              <a:spcAft>
+                <a:spcPts val="0"/>
+              </a:spcAft>
+              <a:buClr>
+                <a:srgbClr val="17365D"/>
+              </a:buClr>
+              <a:buFont typeface="Arial"/>
+              <a:buChar char="■"/>
+            </a:pPr>
+            <a:r>
+              <a:rPr lang="ru-RU" sz="900" dirty="0">
+                <a:solidFill>
+                  <a:srgbClr val="000000"/>
+                </a:solidFill>
+                <a:latin typeface="PT Sans"/>
+                <a:ea typeface="PT Sans"/>
+                <a:cs typeface="PT Sans"/>
+              </a:rPr>
+              <a:t>Прямые продажи через KAM и менеджеров по отраслям</a:t>
+            </a:r>
+          </a:p>
+        </p:txBody>
+      </p:sp>
+      <p:sp>
+        <p:nvSpPr>
+          <p:cNvPr id="1110" name="Seg1H"/>
+          <p:cNvSpPr/>
+          <p:nvPr/>
+        </p:nvSpPr>
+        <p:spPr>
+          <a:xfrm>
+            <a:off x="3716666" y="1300000"/>
+            <a:ext cx="2566666" cy="480000"/>
+          </a:xfrm>
+          <a:prstGeom prst="rect">
+            <a:avLst/>
+          </a:prstGeom>
+          <a:solidFill>
+            <a:srgbClr val="17365D"/>
+          </a:solidFill>
+          <a:ln>
+            <a:noFill/>
+          </a:ln>
+        </p:spPr>
+        <p:txBody>
+          <a:bodyPr wrap="square" lIns="91440" tIns="45720" rIns="91440" bIns="45720" anchor="ctr" anchorCtr="1">
+            <a:normAutofit/>
+          </a:bodyPr>
+          <a:lstStyle/>
+          <a:p>
+            <a:pPr marL="0" lvl="0" indent="0" algn="ctr" rtl="0">
+              <a:lnSpc>
+                <a:spcPct val="110000"/>
+              </a:lnSpc>
+              <a:spcBef>
+                <a:spcPts val="0"/>
+              </a:spcBef>
+              <a:spcAft>
+                <a:spcPts val="0"/>
+              </a:spcAft>
+              <a:buNone/>
+            </a:pPr>
+            <a:r>
+              <a:rPr lang="ru-RU" sz="2400" b="1" dirty="0">
+                <a:solidFill>
+                  <a:srgbClr val="FFFFFF"/>
+                </a:solidFill>
+                <a:latin typeface="PT Sans"/>
+                <a:ea typeface="PT Sans"/>
+                <a:cs typeface="PT Sans"/>
+              </a:rPr>
+              <a:t>B2C</a:t>
+            </a:r>
+          </a:p>
+        </p:txBody>
+      </p:sp>
+      <p:sp>
+        <p:nvSpPr>
+          <p:cNvPr id="1111" name="Seg1A"/>
+          <p:cNvSpPr/>
+          <p:nvPr/>
+        </p:nvSpPr>
+        <p:spPr>
+          <a:xfrm>
+            <a:off x="3716666" y="1780000"/>
+            <a:ext cx="2566666" cy="480000"/>
+          </a:xfrm>
+          <a:prstGeom prst="rect">
+            <a:avLst/>
+          </a:prstGeom>
+          <a:solidFill>
+            <a:srgbClr val="888888"/>
+          </a:solidFill>
+          <a:ln>
+            <a:noFill/>
+          </a:ln>
+        </p:spPr>
+        <p:txBody>
+          <a:bodyPr wrap="square" lIns="91440" tIns="45720" rIns="91440" bIns="45720" anchor="ctr" anchorCtr="1">
+            <a:normAutofit/>
+          </a:bodyPr>
+          <a:lstStyle/>
+          <a:p>
+            <a:pPr marL="0" lvl="0" indent="0" algn="ctr" rtl="0">
+              <a:lnSpc>
+                <a:spcPct val="110000"/>
+              </a:lnSpc>
+              <a:spcBef>
+                <a:spcPts val="0"/>
+              </a:spcBef>
+              <a:spcAft>
+                <a:spcPts val="0"/>
+              </a:spcAft>
+              <a:buNone/>
+            </a:pPr>
+            <a:r>
+              <a:rPr lang="ru-RU" sz="900" dirty="0">
+                <a:solidFill>
+                  <a:srgbClr val="FFFFFF"/>
+                </a:solidFill>
+                <a:latin typeface="PT Sans"/>
+                <a:ea typeface="PT Sans"/>
+                <a:cs typeface="PT Sans"/>
+              </a:rPr>
+              <a:t>Клиенты банков, пассажиры</a:t>
+            </a:r>
+          </a:p>
+          <a:p>
+            <a:pPr marL="0" lvl="0" indent="0" algn="ctr" rtl="0">
+              <a:lnSpc>
+                <a:spcPct val="110000"/>
+              </a:lnSpc>
+              <a:spcBef>
+                <a:spcPts val="50"/>
+              </a:spcBef>
+              <a:spcAft>
+                <a:spcPts val="0"/>
+              </a:spcAft>
+              <a:buNone/>
+            </a:pPr>
+            <a:r>
+              <a:rPr lang="ru-RU" sz="900" dirty="0">
+                <a:solidFill>
+                  <a:srgbClr val="FFFFFF"/>
+                </a:solidFill>
+                <a:latin typeface="PT Sans"/>
+                <a:ea typeface="PT Sans"/>
+                <a:cs typeface="PT Sans"/>
+              </a:rPr>
+              <a:t>метро, посетители ритейла</a:t>
+            </a:r>
+          </a:p>
+        </p:txBody>
+      </p:sp>
+      <p:sp>
+        <p:nvSpPr>
+          <p:cNvPr id="1112" name="Seg1G"/>
+          <p:cNvSpPr/>
+          <p:nvPr/>
+        </p:nvSpPr>
+        <p:spPr>
+          <a:xfrm>
+            <a:off x="3716666" y="2260000"/>
+            <a:ext cx="2566666" cy="460000"/>
+          </a:xfrm>
+          <a:prstGeom prst="rect">
+            <a:avLst/>
+          </a:prstGeom>
+          <a:solidFill>
+            <a:srgbClr val="D6DCE5"/>
+          </a:solidFill>
+          <a:ln>
+            <a:noFill/>
+          </a:ln>
+        </p:spPr>
+        <p:txBody>
+          <a:bodyPr wrap="square" lIns="91440" tIns="45720" rIns="91440" bIns="45720" anchor="ctr" anchorCtr="1">
+            <a:normAutofit/>
+          </a:bodyPr>
+          <a:lstStyle/>
+          <a:p>
+            <a:pPr marL="0" lvl="0" indent="0" algn="l" rtl="0">
+              <a:lnSpc>
+                <a:spcPct val="110000"/>
+              </a:lnSpc>
+              <a:spcBef>
+                <a:spcPts val="0"/>
+              </a:spcBef>
+              <a:spcAft>
+                <a:spcPts val="0"/>
+              </a:spcAft>
+              <a:buNone/>
+            </a:pPr>
+            <a:r>
+              <a:rPr lang="ru-RU" sz="950" b="1" dirty="0">
+                <a:solidFill>
+                  <a:srgbClr val="17365D"/>
+                </a:solidFill>
+                <a:latin typeface="PT Sans"/>
+                <a:ea typeface="PT Sans"/>
+                <a:cs typeface="PT Sans"/>
+              </a:rPr>
+              <a:t>Цель: </a:t>
+            </a:r>
+            <a:r>
+              <a:rPr lang="ru-RU" sz="950" dirty="0">
+                <a:solidFill>
+                  <a:srgbClr val="000000"/>
+                </a:solidFill>
+                <a:latin typeface="PT Sans"/>
+                <a:ea typeface="PT Sans"/>
+                <a:cs typeface="PT Sans"/>
+              </a:rPr>
+              <a:t>снятие барьеров доверия, рост Face2Pay-аудитории</a:t>
+            </a:r>
+          </a:p>
+        </p:txBody>
+      </p:sp>
+      <p:sp>
+        <p:nvSpPr>
+          <p:cNvPr id="1113" name="Seg1R"/>
+          <p:cNvSpPr/>
+          <p:nvPr/>
+        </p:nvSpPr>
+        <p:spPr>
+          <a:xfrm>
+            <a:off x="3716666" y="2720000"/>
+            <a:ext cx="2566666" cy="1880000"/>
+          </a:xfrm>
+          <a:prstGeom prst="rect">
+            <a:avLst/>
+          </a:prstGeom>
+          <a:solidFill>
+            <a:srgbClr val="FFFFFF"/>
+          </a:solidFill>
+          <a:ln w="6350">
+            <a:solidFill>
+              <a:srgbClr val="17365D"/>
+            </a:solidFill>
+          </a:ln>
+        </p:spPr>
+        <p:txBody>
+          <a:bodyPr wrap="square" lIns="91440" tIns="45720" rIns="91440" bIns="45720" anchor="t" anchorCtr="1">
+            <a:normAutofit/>
+          </a:bodyPr>
+          <a:lstStyle/>
+          <a:p>
+            <a:pPr marL="0" lvl="0" indent="0" algn="l" rtl="0">
+              <a:lnSpc>
+                <a:spcPct val="110000"/>
+              </a:lnSpc>
+              <a:spcBef>
+                <a:spcPts val="0"/>
+              </a:spcBef>
+              <a:spcAft>
+                <a:spcPts val="0"/>
+              </a:spcAft>
+              <a:buNone/>
+            </a:pPr>
+            <a:r>
+              <a:rPr lang="ru-RU" sz="1000" b="1" dirty="0">
+                <a:solidFill>
+                  <a:srgbClr val="17365D"/>
+                </a:solidFill>
+                <a:latin typeface="PT Sans"/>
+                <a:ea typeface="PT Sans"/>
+                <a:cs typeface="PT Sans"/>
+              </a:rPr>
+              <a:t>Рекомендации:</a:t>
+            </a:r>
+          </a:p>
+          <a:p>
+            <a:pPr marL="250000" lvl="0" indent="-200000" algn="l" rtl="0">
+              <a:lnSpc>
+                <a:spcPct val="115000"/>
+              </a:lnSpc>
+              <a:spcBef>
+                <a:spcPts val="120"/>
+              </a:spcBef>
+              <a:spcAft>
+                <a:spcPts val="0"/>
+              </a:spcAft>
+              <a:buClr>
+                <a:srgbClr val="17365D"/>
+              </a:buClr>
+              <a:buFont typeface="Arial"/>
+              <a:buChar char="■"/>
+            </a:pPr>
+            <a:r>
+              <a:rPr lang="ru-RU" sz="900" dirty="0">
+                <a:solidFill>
+                  <a:srgbClr val="000000"/>
+                </a:solidFill>
+                <a:latin typeface="PT Sans"/>
+                <a:ea typeface="PT Sans"/>
+                <a:cs typeface="PT Sans"/>
+              </a:rPr>
+              <a:t>Образовательный контент в ВК, Telegram, Дзен</a:t>
+            </a:r>
+          </a:p>
+          <a:p>
+            <a:pPr marL="250000" lvl="0" indent="-200000" algn="l" rtl="0">
+              <a:lnSpc>
+                <a:spcPct val="115000"/>
+              </a:lnSpc>
+              <a:spcBef>
+                <a:spcPts val="120"/>
+              </a:spcBef>
+              <a:spcAft>
+                <a:spcPts val="0"/>
+              </a:spcAft>
+              <a:buClr>
+                <a:srgbClr val="17365D"/>
+              </a:buClr>
+              <a:buFont typeface="Arial"/>
+              <a:buChar char="■"/>
+            </a:pPr>
+            <a:r>
+              <a:rPr lang="ru-RU" sz="900" dirty="0">
+                <a:solidFill>
+                  <a:srgbClr val="000000"/>
+                </a:solidFill>
+                <a:latin typeface="PT Sans"/>
+                <a:ea typeface="PT Sans"/>
+                <a:cs typeface="PT Sans"/>
+              </a:rPr>
+              <a:t>Видео-демо в отделениях и мобильном приложении АББ</a:t>
+            </a:r>
+          </a:p>
+          <a:p>
+            <a:pPr marL="250000" lvl="0" indent="-200000" algn="l" rtl="0">
+              <a:lnSpc>
+                <a:spcPct val="115000"/>
+              </a:lnSpc>
+              <a:spcBef>
+                <a:spcPts val="120"/>
+              </a:spcBef>
+              <a:spcAft>
+                <a:spcPts val="0"/>
+              </a:spcAft>
+              <a:buClr>
+                <a:srgbClr val="17365D"/>
+              </a:buClr>
+              <a:buFont typeface="Arial"/>
+              <a:buChar char="■"/>
+            </a:pPr>
+            <a:r>
+              <a:rPr lang="ru-RU" sz="900" dirty="0">
+                <a:solidFill>
+                  <a:srgbClr val="000000"/>
+                </a:solidFill>
+                <a:latin typeface="PT Sans"/>
+                <a:ea typeface="PT Sans"/>
+                <a:cs typeface="PT Sans"/>
+              </a:rPr>
+              <a:t>Бесшовный UX в казанском метро как образцовый кейс</a:t>
+            </a:r>
+          </a:p>
+          <a:p>
+            <a:pPr marL="250000" lvl="0" indent="-200000" algn="l" rtl="0">
+              <a:lnSpc>
+                <a:spcPct val="115000"/>
+              </a:lnSpc>
+              <a:spcBef>
+                <a:spcPts val="120"/>
+              </a:spcBef>
+              <a:spcAft>
+                <a:spcPts val="0"/>
+              </a:spcAft>
+              <a:buClr>
+                <a:srgbClr val="17365D"/>
+              </a:buClr>
+              <a:buFont typeface="Arial"/>
+              <a:buChar char="■"/>
+            </a:pPr>
+            <a:r>
+              <a:rPr lang="ru-RU" sz="900" dirty="0">
+                <a:solidFill>
+                  <a:srgbClr val="000000"/>
+                </a:solidFill>
+                <a:latin typeface="PT Sans"/>
+                <a:ea typeface="PT Sans"/>
+                <a:cs typeface="PT Sans"/>
+              </a:rPr>
+              <a:t>Бонусы и кешбэк за оплату по лицу (Face2Pay)</a:t>
+            </a:r>
+          </a:p>
+          <a:p>
+            <a:pPr marL="250000" lvl="0" indent="-200000" algn="l" rtl="0">
+              <a:lnSpc>
+                <a:spcPct val="115000"/>
+              </a:lnSpc>
+              <a:spcBef>
+                <a:spcPts val="120"/>
+              </a:spcBef>
+              <a:spcAft>
+                <a:spcPts val="0"/>
+              </a:spcAft>
+              <a:buClr>
+                <a:srgbClr val="17365D"/>
+              </a:buClr>
+              <a:buFont typeface="Arial"/>
+              <a:buChar char="■"/>
+            </a:pPr>
+            <a:r>
+              <a:rPr lang="ru-RU" sz="900" dirty="0">
+                <a:solidFill>
+                  <a:srgbClr val="000000"/>
+                </a:solidFill>
+                <a:latin typeface="PT Sans"/>
+                <a:ea typeface="PT Sans"/>
+                <a:cs typeface="PT Sans"/>
+              </a:rPr>
+              <a:t>Прозрачная коммуникация прав клиента по 572-ФЗ</a:t>
+            </a:r>
+          </a:p>
+          <a:p>
+            <a:pPr marL="250000" lvl="0" indent="-200000" algn="l" rtl="0">
+              <a:lnSpc>
+                <a:spcPct val="115000"/>
+              </a:lnSpc>
+              <a:spcBef>
+                <a:spcPts val="120"/>
+              </a:spcBef>
+              <a:spcAft>
+                <a:spcPts val="0"/>
+              </a:spcAft>
+              <a:buClr>
+                <a:srgbClr val="17365D"/>
+              </a:buClr>
+              <a:buFont typeface="Arial"/>
+              <a:buChar char="■"/>
+            </a:pPr>
+            <a:r>
+              <a:rPr lang="ru-RU" sz="900" dirty="0">
+                <a:solidFill>
+                  <a:srgbClr val="000000"/>
+                </a:solidFill>
+                <a:latin typeface="PT Sans"/>
+                <a:ea typeface="PT Sans"/>
+                <a:cs typeface="PT Sans"/>
+              </a:rPr>
+              <a:t>Локальные медиа Татарстана и лидеры мнений</a:t>
+            </a:r>
+          </a:p>
+        </p:txBody>
+      </p:sp>
+      <p:sp>
+        <p:nvSpPr>
+          <p:cNvPr id="1114" name="Seg2H"/>
+          <p:cNvSpPr/>
+          <p:nvPr/>
+        </p:nvSpPr>
+        <p:spPr>
+          <a:xfrm>
+            <a:off x="6383332" y="1300000"/>
+            <a:ext cx="2566666" cy="480000"/>
+          </a:xfrm>
+          <a:prstGeom prst="rect">
+            <a:avLst/>
+          </a:prstGeom>
+          <a:solidFill>
+            <a:srgbClr val="17365D"/>
+          </a:solidFill>
+          <a:ln>
+            <a:noFill/>
+          </a:ln>
+        </p:spPr>
+        <p:txBody>
+          <a:bodyPr wrap="square" lIns="91440" tIns="45720" rIns="91440" bIns="45720" anchor="ctr" anchorCtr="1">
+            <a:normAutofit/>
+          </a:bodyPr>
+          <a:lstStyle/>
+          <a:p>
+            <a:pPr marL="0" lvl="0" indent="0" algn="ctr" rtl="0">
+              <a:lnSpc>
+                <a:spcPct val="110000"/>
+              </a:lnSpc>
+              <a:spcBef>
+                <a:spcPts val="0"/>
+              </a:spcBef>
+              <a:spcAft>
+                <a:spcPts val="0"/>
+              </a:spcAft>
+              <a:buNone/>
+            </a:pPr>
+            <a:r>
+              <a:rPr lang="ru-RU" sz="2400" b="1" dirty="0">
+                <a:solidFill>
+                  <a:srgbClr val="FFFFFF"/>
+                </a:solidFill>
+                <a:latin typeface="PT Sans"/>
+                <a:ea typeface="PT Sans"/>
+                <a:cs typeface="PT Sans"/>
+              </a:rPr>
+              <a:t>B2G</a:t>
+            </a:r>
+          </a:p>
+        </p:txBody>
+      </p:sp>
+      <p:sp>
+        <p:nvSpPr>
+          <p:cNvPr id="1115" name="Seg2A"/>
+          <p:cNvSpPr/>
+          <p:nvPr/>
+        </p:nvSpPr>
+        <p:spPr>
+          <a:xfrm>
+            <a:off x="6383332" y="1780000"/>
+            <a:ext cx="2566666" cy="480000"/>
+          </a:xfrm>
+          <a:prstGeom prst="rect">
+            <a:avLst/>
+          </a:prstGeom>
+          <a:solidFill>
+            <a:srgbClr val="888888"/>
+          </a:solidFill>
+          <a:ln>
+            <a:noFill/>
+          </a:ln>
+        </p:spPr>
+        <p:txBody>
+          <a:bodyPr wrap="square" lIns="91440" tIns="45720" rIns="91440" bIns="45720" anchor="ctr" anchorCtr="1">
+            <a:normAutofit/>
+          </a:bodyPr>
+          <a:lstStyle/>
+          <a:p>
+            <a:pPr marL="0" lvl="0" indent="0" algn="ctr" rtl="0">
+              <a:lnSpc>
+                <a:spcPct val="110000"/>
+              </a:lnSpc>
+              <a:spcBef>
+                <a:spcPts val="0"/>
+              </a:spcBef>
+              <a:spcAft>
+                <a:spcPts val="0"/>
+              </a:spcAft>
+              <a:buNone/>
+            </a:pPr>
+            <a:r>
+              <a:rPr lang="ru-RU" sz="900" dirty="0">
+                <a:solidFill>
+                  <a:srgbClr val="FFFFFF"/>
+                </a:solidFill>
+                <a:latin typeface="PT Sans"/>
+                <a:ea typeface="PT Sans"/>
+                <a:cs typeface="PT Sans"/>
+              </a:rPr>
+              <a:t>Минцифры, ЦБ РФ, регионы,</a:t>
+            </a:r>
+          </a:p>
+          <a:p>
+            <a:pPr marL="0" lvl="0" indent="0" algn="ctr" rtl="0">
+              <a:lnSpc>
+                <a:spcPct val="110000"/>
+              </a:lnSpc>
+              <a:spcBef>
+                <a:spcPts val="50"/>
+              </a:spcBef>
+              <a:spcAft>
+                <a:spcPts val="0"/>
+              </a:spcAft>
+              <a:buNone/>
+            </a:pPr>
+            <a:r>
+              <a:rPr lang="ru-RU" sz="900" dirty="0">
+                <a:solidFill>
+                  <a:srgbClr val="FFFFFF"/>
+                </a:solidFill>
+                <a:latin typeface="PT Sans"/>
+                <a:ea typeface="PT Sans"/>
+                <a:cs typeface="PT Sans"/>
+              </a:rPr>
+              <a:t>госкорпорации, ФОИВ</a:t>
+            </a:r>
+          </a:p>
+        </p:txBody>
+      </p:sp>
+      <p:sp>
+        <p:nvSpPr>
+          <p:cNvPr id="1116" name="Seg2G"/>
+          <p:cNvSpPr/>
+          <p:nvPr/>
+        </p:nvSpPr>
+        <p:spPr>
+          <a:xfrm>
+            <a:off x="6383332" y="2260000"/>
+            <a:ext cx="2566666" cy="460000"/>
+          </a:xfrm>
+          <a:prstGeom prst="rect">
+            <a:avLst/>
+          </a:prstGeom>
+          <a:solidFill>
+            <a:srgbClr val="D6DCE5"/>
+          </a:solidFill>
+          <a:ln>
+            <a:noFill/>
+          </a:ln>
+        </p:spPr>
+        <p:txBody>
+          <a:bodyPr wrap="square" lIns="91440" tIns="45720" rIns="91440" bIns="45720" anchor="ctr" anchorCtr="1">
+            <a:normAutofit/>
+          </a:bodyPr>
+          <a:lstStyle/>
+          <a:p>
+            <a:pPr marL="0" lvl="0" indent="0" algn="l" rtl="0">
+              <a:lnSpc>
+                <a:spcPct val="110000"/>
+              </a:lnSpc>
+              <a:spcBef>
+                <a:spcPts val="0"/>
+              </a:spcBef>
+              <a:spcAft>
+                <a:spcPts val="0"/>
+              </a:spcAft>
+              <a:buNone/>
+            </a:pPr>
+            <a:r>
+              <a:rPr lang="ru-RU" sz="950" b="1" dirty="0">
+                <a:solidFill>
+                  <a:srgbClr val="17365D"/>
+                </a:solidFill>
+                <a:latin typeface="PT Sans"/>
+                <a:ea typeface="PT Sans"/>
+                <a:cs typeface="PT Sans"/>
+              </a:rPr>
+              <a:t>Цель: </a:t>
+            </a:r>
+            <a:r>
+              <a:rPr lang="ru-RU" sz="950" dirty="0">
+                <a:solidFill>
+                  <a:srgbClr val="000000"/>
+                </a:solidFill>
+                <a:latin typeface="PT Sans"/>
+                <a:ea typeface="PT Sans"/>
+                <a:cs typeface="PT Sans"/>
+              </a:rPr>
+              <a:t>GR-доступ к тендерам и федеральным пилотам</a:t>
+            </a:r>
+          </a:p>
+        </p:txBody>
+      </p:sp>
+      <p:sp>
+        <p:nvSpPr>
+          <p:cNvPr id="1117" name="Seg2R"/>
+          <p:cNvSpPr/>
+          <p:nvPr/>
+        </p:nvSpPr>
+        <p:spPr>
+          <a:xfrm>
+            <a:off x="6383332" y="2720000"/>
+            <a:ext cx="2566666" cy="1880000"/>
+          </a:xfrm>
+          <a:prstGeom prst="rect">
+            <a:avLst/>
+          </a:prstGeom>
+          <a:solidFill>
+            <a:srgbClr val="FFFFFF"/>
+          </a:solidFill>
+          <a:ln w="6350">
+            <a:solidFill>
+              <a:srgbClr val="17365D"/>
+            </a:solidFill>
+          </a:ln>
+        </p:spPr>
+        <p:txBody>
+          <a:bodyPr wrap="square" lIns="91440" tIns="45720" rIns="91440" bIns="45720" anchor="t" anchorCtr="1">
+            <a:normAutofit/>
+          </a:bodyPr>
+          <a:lstStyle/>
+          <a:p>
+            <a:pPr marL="0" lvl="0" indent="0" algn="l" rtl="0">
+              <a:lnSpc>
+                <a:spcPct val="110000"/>
+              </a:lnSpc>
+              <a:spcBef>
+                <a:spcPts val="0"/>
+              </a:spcBef>
+              <a:spcAft>
+                <a:spcPts val="0"/>
+              </a:spcAft>
+              <a:buNone/>
+            </a:pPr>
+            <a:r>
+              <a:rPr lang="ru-RU" sz="1000" b="1" dirty="0">
+                <a:solidFill>
+                  <a:srgbClr val="17365D"/>
+                </a:solidFill>
+                <a:latin typeface="PT Sans"/>
+                <a:ea typeface="PT Sans"/>
+                <a:cs typeface="PT Sans"/>
+              </a:rPr>
+              <a:t>Рекомендации:</a:t>
+            </a:r>
+          </a:p>
+          <a:p>
+            <a:pPr marL="250000" lvl="0" indent="-200000" algn="l" rtl="0">
+              <a:lnSpc>
+                <a:spcPct val="115000"/>
+              </a:lnSpc>
+              <a:spcBef>
+                <a:spcPts val="120"/>
+              </a:spcBef>
+              <a:spcAft>
+                <a:spcPts val="0"/>
+              </a:spcAft>
+              <a:buClr>
+                <a:srgbClr val="17365D"/>
+              </a:buClr>
+              <a:buFont typeface="Arial"/>
+              <a:buChar char="■"/>
+            </a:pPr>
+            <a:r>
+              <a:rPr lang="ru-RU" sz="900" dirty="0">
+                <a:solidFill>
+                  <a:srgbClr val="000000"/>
+                </a:solidFill>
+                <a:latin typeface="PT Sans"/>
+                <a:ea typeface="PT Sans"/>
+                <a:cs typeface="PT Sans"/>
+              </a:rPr>
+              <a:t>Акцент на КБС № 4-А и реестре отечественного ПО</a:t>
+            </a:r>
+          </a:p>
+          <a:p>
+            <a:pPr marL="250000" lvl="0" indent="-200000" algn="l" rtl="0">
+              <a:lnSpc>
+                <a:spcPct val="115000"/>
+              </a:lnSpc>
+              <a:spcBef>
+                <a:spcPts val="120"/>
+              </a:spcBef>
+              <a:spcAft>
+                <a:spcPts val="0"/>
+              </a:spcAft>
+              <a:buClr>
+                <a:srgbClr val="17365D"/>
+              </a:buClr>
+              <a:buFont typeface="Arial"/>
+              <a:buChar char="■"/>
+            </a:pPr>
+            <a:r>
+              <a:rPr lang="ru-RU" sz="900" dirty="0">
+                <a:solidFill>
+                  <a:srgbClr val="000000"/>
+                </a:solidFill>
+                <a:latin typeface="PT Sans"/>
+                <a:ea typeface="PT Sans"/>
+                <a:cs typeface="PT Sans"/>
+              </a:rPr>
+              <a:t>Импортозамещение и нацпроект «Цифровая экономика»</a:t>
+            </a:r>
+          </a:p>
+          <a:p>
+            <a:pPr marL="250000" lvl="0" indent="-200000" algn="l" rtl="0">
+              <a:lnSpc>
+                <a:spcPct val="115000"/>
+              </a:lnSpc>
+              <a:spcBef>
+                <a:spcPts val="120"/>
+              </a:spcBef>
+              <a:spcAft>
+                <a:spcPts val="0"/>
+              </a:spcAft>
+              <a:buClr>
+                <a:srgbClr val="17365D"/>
+              </a:buClr>
+              <a:buFont typeface="Arial"/>
+              <a:buChar char="■"/>
+            </a:pPr>
+            <a:r>
+              <a:rPr lang="ru-RU" sz="900" dirty="0">
+                <a:solidFill>
+                  <a:srgbClr val="000000"/>
+                </a:solidFill>
+                <a:latin typeface="PT Sans"/>
+                <a:ea typeface="PT Sans"/>
+                <a:cs typeface="PT Sans"/>
+              </a:rPr>
+              <a:t>Совместные пилоты с Минцифры РТ и смежных регионов</a:t>
+            </a:r>
+          </a:p>
+          <a:p>
+            <a:pPr marL="250000" lvl="0" indent="-200000" algn="l" rtl="0">
+              <a:lnSpc>
+                <a:spcPct val="115000"/>
+              </a:lnSpc>
+              <a:spcBef>
+                <a:spcPts val="120"/>
+              </a:spcBef>
+              <a:spcAft>
+                <a:spcPts val="0"/>
+              </a:spcAft>
+              <a:buClr>
+                <a:srgbClr val="17365D"/>
+              </a:buClr>
+              <a:buFont typeface="Arial"/>
+              <a:buChar char="■"/>
+            </a:pPr>
+            <a:r>
+              <a:rPr lang="ru-RU" sz="900" dirty="0">
+                <a:solidFill>
+                  <a:srgbClr val="000000"/>
+                </a:solidFill>
+                <a:latin typeface="PT Sans"/>
+                <a:ea typeface="PT Sans"/>
+                <a:cs typeface="PT Sans"/>
+              </a:rPr>
+              <a:t>Участие в РСПП, Ассоциации банков России, АРБ</a:t>
+            </a:r>
+          </a:p>
+          <a:p>
+            <a:pPr marL="250000" lvl="0" indent="-200000" algn="l" rtl="0">
+              <a:lnSpc>
+                <a:spcPct val="115000"/>
+              </a:lnSpc>
+              <a:spcBef>
+                <a:spcPts val="120"/>
+              </a:spcBef>
+              <a:spcAft>
+                <a:spcPts val="0"/>
+              </a:spcAft>
+              <a:buClr>
+                <a:srgbClr val="17365D"/>
+              </a:buClr>
+              <a:buFont typeface="Arial"/>
+              <a:buChar char="■"/>
+            </a:pPr>
+            <a:r>
+              <a:rPr lang="ru-RU" sz="900" dirty="0">
+                <a:solidFill>
+                  <a:srgbClr val="000000"/>
+                </a:solidFill>
+                <a:latin typeface="PT Sans"/>
+                <a:ea typeface="PT Sans"/>
+                <a:cs typeface="PT Sans"/>
+              </a:rPr>
+              <a:t>Татарстан как технологический хаб биометрии в ПФО</a:t>
+            </a:r>
+          </a:p>
+          <a:p>
+            <a:pPr marL="250000" lvl="0" indent="-200000" algn="l" rtl="0">
+              <a:lnSpc>
+                <a:spcPct val="115000"/>
+              </a:lnSpc>
+              <a:spcBef>
+                <a:spcPts val="120"/>
+              </a:spcBef>
+              <a:spcAft>
+                <a:spcPts val="0"/>
+              </a:spcAft>
+              <a:buClr>
+                <a:srgbClr val="17365D"/>
+              </a:buClr>
+              <a:buFont typeface="Arial"/>
+              <a:buChar char="■"/>
+            </a:pPr>
+            <a:r>
+              <a:rPr lang="ru-RU" sz="900" dirty="0">
+                <a:solidFill>
+                  <a:srgbClr val="000000"/>
+                </a:solidFill>
+                <a:latin typeface="PT Sans"/>
+                <a:ea typeface="PT Sans"/>
+                <a:cs typeface="PT Sans"/>
+              </a:rPr>
+              <a:t>Закрытые презентации на отраслевых форумах ЦБ и ФСБ</a:t>
+            </a:r>
+          </a:p>
+        </p:txBody>
+      </p:sp>
+      <p:sp>
+        <p:nvSpPr>
+          <p:cNvPr id="1118" name="Footer"/>
+          <p:cNvSpPr/>
+          <p:nvPr/>
+        </p:nvSpPr>
+        <p:spPr>
+          <a:xfrm>
+            <a:off x="1050000" y="4660000"/>
+            <a:ext cx="7900000" cy="380000"/>
+          </a:xfrm>
+          <a:prstGeom prst="rect">
+            <a:avLst/>
+          </a:prstGeom>
+          <a:solidFill>
+            <a:srgbClr val="17365D"/>
+          </a:solidFill>
+          <a:ln>
+            <a:noFill/>
+          </a:ln>
+        </p:spPr>
+        <p:txBody>
+          <a:bodyPr wrap="square" lIns="91440" tIns="45720" rIns="91440" bIns="45720" anchor="ctr" anchorCtr="1">
+            <a:normAutofit/>
+          </a:bodyPr>
+          <a:lstStyle/>
+          <a:p>
+            <a:pPr marL="0" lvl="0" indent="0" algn="ctr" rtl="0">
+              <a:lnSpc>
+                <a:spcPct val="110000"/>
+              </a:lnSpc>
+              <a:spcBef>
+                <a:spcPts val="0"/>
+              </a:spcBef>
+              <a:spcAft>
+                <a:spcPts val="0"/>
+              </a:spcAft>
+              <a:buNone/>
+            </a:pPr>
+            <a:r>
+              <a:rPr lang="ru-RU" sz="1100" b="1" dirty="0">
+                <a:solidFill>
+                  <a:srgbClr val="FFFFFF"/>
+                </a:solidFill>
+                <a:latin typeface="PT Sans"/>
+                <a:ea typeface="PT Sans"/>
+                <a:cs typeface="PT Sans"/>
+              </a:rPr>
+              <a:t>→ Сегментированный подход усиливает push + pull-стратегию: </a:t>
+            </a:r>
+            <a:r>
+              <a:rPr lang="ru-RU" sz="1100" dirty="0">
+                <a:solidFill>
+                  <a:srgbClr val="FFFFFF"/>
+                </a:solidFill>
+                <a:latin typeface="PT Sans"/>
+                <a:ea typeface="PT Sans"/>
+                <a:cs typeface="PT Sans"/>
+              </a:rPr>
+              <a:t>B2B и B2G формируют контракты, B2C — массу пользователей и социальное доверие к биометрии</a:t>
+            </a:r>
+          </a:p>
+        </p:txBody>
+      </p:sp>
+    </p:spTree>
+  </p:cSld>
+  <p:clrMapOvr>
+    <a:masterClrMapping/>
+  </p:clrMapOvr>
+</p:sld>
+</file>
+
 <file path=ppt/slides/slide2.xml><?xml version="1.0" encoding="utf-8"?>
 <p:sld xmlns:a="http://schemas.openxmlformats.org/drawingml/2006/main" xmlns:r="http://schemas.openxmlformats.org/officeDocument/2006/relationships" xmlns:p="http://schemas.openxmlformats.org/presentationml/2006/main">
   <p:cSld>
@@ -22717,7 +24349,7 @@
                 <a:ea typeface="PT Sans"/>
                 <a:cs typeface="PT Sans"/>
               </a:rPr>
-              <a:t>8</a:t>
+              <a:t>9</a:t>
             </a:r>
           </a:p>
         </p:txBody>
@@ -24934,7 +26566,7 @@
                 <a:ea typeface="PT Sans"/>
                 <a:cs typeface="PT Sans"/>
               </a:rPr>
-              <a:t>9</a:t>
+              <a:t>10</a:t>
             </a:r>
           </a:p>
         </p:txBody>
